--- a/FiveGuys_Presentation.pptx
+++ b/FiveGuys_Presentation.pptx
@@ -3100,64 +3100,9 @@
         <p:nvPr/>
       </p:nvGrpSpPr>
       <p:grpSpPr/>
-      <p:sp>
-        <p:nvSpPr>
-          <p:cNvPr id="2" name="Title 1"/>
-          <p:cNvSpPr>
-            <a:spLocks noGrp="1"/>
-          </p:cNvSpPr>
-          <p:nvPr>
-            <p:ph type="title"/>
-          </p:nvPr>
-        </p:nvSpPr>
-        <p:spPr>
-          <a:xfrm>
-            <a:off x="548640" y="1536192"/>
-            <a:ext cx="5897880" cy="2240280"/>
-          </a:xfrm>
-        </p:spPr>
-        <p:txBody>
-          <a:bodyPr anchor="t" wrap="square" lIns="0" rIns="0" tIns="0" bIns="0">
-            <a:noAutofit/>
-          </a:bodyPr>
-          <a:lstStyle/>
-          <a:p>
-            <a:pPr algn="l">
-              <a:lnSpc>
-                <a:spcPct val="88000"/>
-              </a:lnSpc>
-            </a:pPr>
-            <a:r>
-              <a:rPr sz="8400" b="1" spc="-200">
-                <a:solidFill>
-                  <a:srgbClr val="FFFFFF"/>
-                </a:solidFill>
-                <a:latin typeface="Arial"/>
-              </a:rPr>
-              <a:t>FIVE GUYS</a:t>
-            </a:r>
-          </a:p>
-          <a:p>
-            <a:pPr algn="l">
-              <a:lnSpc>
-                <a:spcPct val="88000"/>
-              </a:lnSpc>
-            </a:pPr>
-            <a:r>
-              <a:rPr sz="8400" b="1" spc="-200">
-                <a:solidFill>
-                  <a:srgbClr val="000000"/>
-                </a:solidFill>
-                <a:latin typeface="Arial"/>
-              </a:rPr>
-              <a:t>REVIEW</a:t>
-            </a:r>
-          </a:p>
-        </p:txBody>
-      </p:sp>
       <p:pic>
         <p:nvPicPr>
-          <p:cNvPr id="3" name="Photo store_brighton_night" descr="Five Guys restaurant at night with its red neon FIVE GUYS sign"/>
+          <p:cNvPr id="2" name="Photo store_brighton_night" descr="Five Guys restaurant at night with its red neon sign"/>
           <p:cNvPicPr>
             <a:picLocks noChangeAspect="1"/>
           </p:cNvPicPr>
@@ -3165,71 +3110,26 @@
         </p:nvPicPr>
         <p:blipFill>
           <a:blip r:embed="rId2"/>
-          <a:srcRect l="13489" r="21489"/>
+          <a:srcRect t="16456" b="16456"/>
           <a:stretch>
             <a:fillRect/>
           </a:stretch>
         </p:blipFill>
         <p:spPr>
           <a:xfrm>
-            <a:off x="6583680" y="0"/>
-            <a:ext cx="5608320" cy="6451600"/>
+            <a:off x="457200" y="411480"/>
+            <a:ext cx="11277600" cy="5674360"/>
           </a:xfrm>
-          <a:prstGeom prst="rect">
-            <a:avLst/>
+          <a:prstGeom prst="roundRect">
+            <a:avLst>
+              <a:gd name="adj" fmla="val 2256"/>
+            </a:avLst>
           </a:prstGeom>
         </p:spPr>
       </p:pic>
-      <p:sp>
-        <p:nvSpPr>
-          <p:cNvPr id="4" name="Subtitle"/>
-          <p:cNvSpPr txBox="1"/>
-          <p:nvPr/>
-        </p:nvSpPr>
-        <p:spPr>
-          <a:xfrm>
-            <a:off x="548640" y="4041648"/>
-            <a:ext cx="5852160" cy="1005840"/>
-          </a:xfrm>
-          <a:prstGeom prst="rect">
-            <a:avLst/>
-          </a:prstGeom>
-          <a:noFill/>
-        </p:spPr>
-        <p:txBody>
-          <a:bodyPr wrap="square" anchor="t" lIns="0" rIns="0" tIns="0" bIns="0">
-            <a:noAutofit/>
-          </a:bodyPr>
-          <a:lstStyle/>
-          <a:p>
-            <a:pPr algn="l"/>
-            <a:r>
-              <a:rPr sz="3000" b="1">
-                <a:solidFill>
-                  <a:srgbClr val="FFFFFF"/>
-                </a:solidFill>
-                <a:latin typeface="Arial"/>
-              </a:rPr>
-              <a:t>Successful Marketing</a:t>
-            </a:r>
-          </a:p>
-          <a:p>
-            <a:pPr algn="l"/>
-            <a:r>
-              <a:rPr sz="3000" b="1">
-                <a:solidFill>
-                  <a:srgbClr val="FFFFFF"/>
-                </a:solidFill>
-                <a:latin typeface="Arial"/>
-              </a:rPr>
-              <a:t>&amp; Signature Menu</a:t>
-            </a:r>
-          </a:p>
-        </p:txBody>
-      </p:sp>
       <p:grpSp>
         <p:nvGrpSpPr>
-          <p:cNvPr id="5" name="Checker band"/>
+          <p:cNvPr id="3" name="Checker band"/>
           <p:cNvGrpSpPr/>
           <p:nvPr/>
         </p:nvGrpSpPr>
@@ -3243,7 +3143,7 @@
         </p:grpSpPr>
         <p:sp>
           <p:nvSpPr>
-            <p:cNvPr id="6" name="Rectangle 5"/>
+            <p:cNvPr id="4" name="Rectangle 3"/>
             <p:cNvSpPr/>
             <p:nvPr/>
           </p:nvSpPr>
@@ -3273,13 +3173,73 @@
         </p:sp>
         <p:sp>
           <p:nvSpPr>
+            <p:cNvPr id="5" name="Rectangle 4"/>
+            <p:cNvSpPr/>
+            <p:nvPr/>
+          </p:nvSpPr>
+          <p:spPr>
+            <a:xfrm>
+              <a:off x="0" y="6451600"/>
+              <a:ext cx="203200" cy="203200"/>
+            </a:xfrm>
+            <a:prstGeom prst="rect">
+              <a:avLst/>
+            </a:prstGeom>
+            <a:solidFill>
+              <a:srgbClr val="ED1C24"/>
+            </a:solidFill>
+            <a:ln>
+              <a:noFill/>
+            </a:ln>
+            <a:effectLst/>
+          </p:spPr>
+          <p:txBody>
+            <a:bodyPr rtlCol="0" anchor="ctr"/>
+            <a:lstStyle/>
+            <a:p>
+              <a:pPr algn="ctr"/>
+            </a:p>
+          </p:txBody>
+        </p:sp>
+        <p:sp>
+          <p:nvSpPr>
+            <p:cNvPr id="6" name="Rectangle 5"/>
+            <p:cNvSpPr/>
+            <p:nvPr/>
+          </p:nvSpPr>
+          <p:spPr>
+            <a:xfrm>
+              <a:off x="406400" y="6451600"/>
+              <a:ext cx="203200" cy="203200"/>
+            </a:xfrm>
+            <a:prstGeom prst="rect">
+              <a:avLst/>
+            </a:prstGeom>
+            <a:solidFill>
+              <a:srgbClr val="ED1C24"/>
+            </a:solidFill>
+            <a:ln>
+              <a:noFill/>
+            </a:ln>
+            <a:effectLst/>
+          </p:spPr>
+          <p:txBody>
+            <a:bodyPr rtlCol="0" anchor="ctr"/>
+            <a:lstStyle/>
+            <a:p>
+              <a:pPr algn="ctr"/>
+            </a:p>
+          </p:txBody>
+        </p:sp>
+        <p:sp>
+          <p:nvSpPr>
             <p:cNvPr id="7" name="Rectangle 6"/>
             <p:cNvSpPr/>
             <p:nvPr/>
           </p:nvSpPr>
           <p:spPr>
             <a:xfrm>
-              <a:off x="0" y="6451600"/>
+              <a:off x="812800" y="6451600"/>
               <a:ext cx="203200" cy="203200"/>
             </a:xfrm>
             <a:prstGeom prst="rect">
@@ -3309,7 +3269,7 @@
           </p:nvSpPr>
           <p:spPr>
             <a:xfrm>
-              <a:off x="406400" y="6451600"/>
+              <a:off x="1219200" y="6451600"/>
               <a:ext cx="203200" cy="203200"/>
             </a:xfrm>
             <a:prstGeom prst="rect">
@@ -3339,7 +3299,7 @@
           </p:nvSpPr>
           <p:spPr>
             <a:xfrm>
-              <a:off x="812800" y="6451600"/>
+              <a:off x="1625600" y="6451600"/>
               <a:ext cx="203200" cy="203200"/>
             </a:xfrm>
             <a:prstGeom prst="rect">
@@ -3369,7 +3329,7 @@
           </p:nvSpPr>
           <p:spPr>
             <a:xfrm>
-              <a:off x="1219200" y="6451600"/>
+              <a:off x="2032000" y="6451600"/>
               <a:ext cx="203200" cy="203200"/>
             </a:xfrm>
             <a:prstGeom prst="rect">
@@ -3399,7 +3359,7 @@
           </p:nvSpPr>
           <p:spPr>
             <a:xfrm>
-              <a:off x="1625600" y="6451600"/>
+              <a:off x="2438400" y="6451600"/>
               <a:ext cx="203200" cy="203200"/>
             </a:xfrm>
             <a:prstGeom prst="rect">
@@ -3429,7 +3389,7 @@
           </p:nvSpPr>
           <p:spPr>
             <a:xfrm>
-              <a:off x="2032000" y="6451600"/>
+              <a:off x="2844800" y="6451600"/>
               <a:ext cx="203200" cy="203200"/>
             </a:xfrm>
             <a:prstGeom prst="rect">
@@ -3459,7 +3419,7 @@
           </p:nvSpPr>
           <p:spPr>
             <a:xfrm>
-              <a:off x="2438400" y="6451600"/>
+              <a:off x="3251200" y="6451600"/>
               <a:ext cx="203200" cy="203200"/>
             </a:xfrm>
             <a:prstGeom prst="rect">
@@ -3489,7 +3449,7 @@
           </p:nvSpPr>
           <p:spPr>
             <a:xfrm>
-              <a:off x="2844800" y="6451600"/>
+              <a:off x="3657600" y="6451600"/>
               <a:ext cx="203200" cy="203200"/>
             </a:xfrm>
             <a:prstGeom prst="rect">
@@ -3519,7 +3479,7 @@
           </p:nvSpPr>
           <p:spPr>
             <a:xfrm>
-              <a:off x="3251200" y="6451600"/>
+              <a:off x="4064000" y="6451600"/>
               <a:ext cx="203200" cy="203200"/>
             </a:xfrm>
             <a:prstGeom prst="rect">
@@ -3549,7 +3509,7 @@
           </p:nvSpPr>
           <p:spPr>
             <a:xfrm>
-              <a:off x="3657600" y="6451600"/>
+              <a:off x="4470400" y="6451600"/>
               <a:ext cx="203200" cy="203200"/>
             </a:xfrm>
             <a:prstGeom prst="rect">
@@ -3579,7 +3539,7 @@
           </p:nvSpPr>
           <p:spPr>
             <a:xfrm>
-              <a:off x="4064000" y="6451600"/>
+              <a:off x="4876800" y="6451600"/>
               <a:ext cx="203200" cy="203200"/>
             </a:xfrm>
             <a:prstGeom prst="rect">
@@ -3609,7 +3569,7 @@
           </p:nvSpPr>
           <p:spPr>
             <a:xfrm>
-              <a:off x="4470400" y="6451600"/>
+              <a:off x="5283200" y="6451600"/>
               <a:ext cx="203200" cy="203200"/>
             </a:xfrm>
             <a:prstGeom prst="rect">
@@ -3639,7 +3599,7 @@
           </p:nvSpPr>
           <p:spPr>
             <a:xfrm>
-              <a:off x="4876800" y="6451600"/>
+              <a:off x="5689600" y="6451600"/>
               <a:ext cx="203200" cy="203200"/>
             </a:xfrm>
             <a:prstGeom prst="rect">
@@ -3669,7 +3629,7 @@
           </p:nvSpPr>
           <p:spPr>
             <a:xfrm>
-              <a:off x="5283200" y="6451600"/>
+              <a:off x="6096000" y="6451600"/>
               <a:ext cx="203200" cy="203200"/>
             </a:xfrm>
             <a:prstGeom prst="rect">
@@ -3699,7 +3659,7 @@
           </p:nvSpPr>
           <p:spPr>
             <a:xfrm>
-              <a:off x="5689600" y="6451600"/>
+              <a:off x="6502400" y="6451600"/>
               <a:ext cx="203200" cy="203200"/>
             </a:xfrm>
             <a:prstGeom prst="rect">
@@ -3729,7 +3689,7 @@
           </p:nvSpPr>
           <p:spPr>
             <a:xfrm>
-              <a:off x="6096000" y="6451600"/>
+              <a:off x="6908800" y="6451600"/>
               <a:ext cx="203200" cy="203200"/>
             </a:xfrm>
             <a:prstGeom prst="rect">
@@ -3759,7 +3719,7 @@
           </p:nvSpPr>
           <p:spPr>
             <a:xfrm>
-              <a:off x="6502400" y="6451600"/>
+              <a:off x="7315200" y="6451600"/>
               <a:ext cx="203200" cy="203200"/>
             </a:xfrm>
             <a:prstGeom prst="rect">
@@ -3789,7 +3749,7 @@
           </p:nvSpPr>
           <p:spPr>
             <a:xfrm>
-              <a:off x="6908800" y="6451600"/>
+              <a:off x="7721600" y="6451600"/>
               <a:ext cx="203200" cy="203200"/>
             </a:xfrm>
             <a:prstGeom prst="rect">
@@ -3819,7 +3779,7 @@
           </p:nvSpPr>
           <p:spPr>
             <a:xfrm>
-              <a:off x="7315200" y="6451600"/>
+              <a:off x="8128000" y="6451600"/>
               <a:ext cx="203200" cy="203200"/>
             </a:xfrm>
             <a:prstGeom prst="rect">
@@ -3849,7 +3809,7 @@
           </p:nvSpPr>
           <p:spPr>
             <a:xfrm>
-              <a:off x="7721600" y="6451600"/>
+              <a:off x="8534400" y="6451600"/>
               <a:ext cx="203200" cy="203200"/>
             </a:xfrm>
             <a:prstGeom prst="rect">
@@ -3879,7 +3839,7 @@
           </p:nvSpPr>
           <p:spPr>
             <a:xfrm>
-              <a:off x="8128000" y="6451600"/>
+              <a:off x="8940800" y="6451600"/>
               <a:ext cx="203200" cy="203200"/>
             </a:xfrm>
             <a:prstGeom prst="rect">
@@ -3909,7 +3869,7 @@
           </p:nvSpPr>
           <p:spPr>
             <a:xfrm>
-              <a:off x="8534400" y="6451600"/>
+              <a:off x="9347200" y="6451600"/>
               <a:ext cx="203200" cy="203200"/>
             </a:xfrm>
             <a:prstGeom prst="rect">
@@ -3939,7 +3899,7 @@
           </p:nvSpPr>
           <p:spPr>
             <a:xfrm>
-              <a:off x="8940800" y="6451600"/>
+              <a:off x="9753600" y="6451600"/>
               <a:ext cx="203200" cy="203200"/>
             </a:xfrm>
             <a:prstGeom prst="rect">
@@ -3969,7 +3929,7 @@
           </p:nvSpPr>
           <p:spPr>
             <a:xfrm>
-              <a:off x="9347200" y="6451600"/>
+              <a:off x="10160000" y="6451600"/>
               <a:ext cx="203200" cy="203200"/>
             </a:xfrm>
             <a:prstGeom prst="rect">
@@ -3999,7 +3959,7 @@
           </p:nvSpPr>
           <p:spPr>
             <a:xfrm>
-              <a:off x="9753600" y="6451600"/>
+              <a:off x="10566400" y="6451600"/>
               <a:ext cx="203200" cy="203200"/>
             </a:xfrm>
             <a:prstGeom prst="rect">
@@ -4029,7 +3989,7 @@
           </p:nvSpPr>
           <p:spPr>
             <a:xfrm>
-              <a:off x="10160000" y="6451600"/>
+              <a:off x="10972800" y="6451600"/>
               <a:ext cx="203200" cy="203200"/>
             </a:xfrm>
             <a:prstGeom prst="rect">
@@ -4059,7 +4019,7 @@
           </p:nvSpPr>
           <p:spPr>
             <a:xfrm>
-              <a:off x="10566400" y="6451600"/>
+              <a:off x="11379200" y="6451600"/>
               <a:ext cx="203200" cy="203200"/>
             </a:xfrm>
             <a:prstGeom prst="rect">
@@ -4089,7 +4049,7 @@
           </p:nvSpPr>
           <p:spPr>
             <a:xfrm>
-              <a:off x="10972800" y="6451600"/>
+              <a:off x="11785600" y="6451600"/>
               <a:ext cx="203200" cy="203200"/>
             </a:xfrm>
             <a:prstGeom prst="rect">
@@ -4119,7 +4079,7 @@
           </p:nvSpPr>
           <p:spPr>
             <a:xfrm>
-              <a:off x="11379200" y="6451600"/>
+              <a:off x="203200" y="6654800"/>
               <a:ext cx="203200" cy="203200"/>
             </a:xfrm>
             <a:prstGeom prst="rect">
@@ -4149,7 +4109,7 @@
           </p:nvSpPr>
           <p:spPr>
             <a:xfrm>
-              <a:off x="11785600" y="6451600"/>
+              <a:off x="609600" y="6654800"/>
               <a:ext cx="203200" cy="203200"/>
             </a:xfrm>
             <a:prstGeom prst="rect">
@@ -4179,7 +4139,7 @@
           </p:nvSpPr>
           <p:spPr>
             <a:xfrm>
-              <a:off x="203200" y="6654800"/>
+              <a:off x="1016000" y="6654800"/>
               <a:ext cx="203200" cy="203200"/>
             </a:xfrm>
             <a:prstGeom prst="rect">
@@ -4209,7 +4169,7 @@
           </p:nvSpPr>
           <p:spPr>
             <a:xfrm>
-              <a:off x="609600" y="6654800"/>
+              <a:off x="1422400" y="6654800"/>
               <a:ext cx="203200" cy="203200"/>
             </a:xfrm>
             <a:prstGeom prst="rect">
@@ -4239,7 +4199,7 @@
           </p:nvSpPr>
           <p:spPr>
             <a:xfrm>
-              <a:off x="1016000" y="6654800"/>
+              <a:off x="1828800" y="6654800"/>
               <a:ext cx="203200" cy="203200"/>
             </a:xfrm>
             <a:prstGeom prst="rect">
@@ -4269,7 +4229,7 @@
           </p:nvSpPr>
           <p:spPr>
             <a:xfrm>
-              <a:off x="1422400" y="6654800"/>
+              <a:off x="2235200" y="6654800"/>
               <a:ext cx="203200" cy="203200"/>
             </a:xfrm>
             <a:prstGeom prst="rect">
@@ -4299,7 +4259,7 @@
           </p:nvSpPr>
           <p:spPr>
             <a:xfrm>
-              <a:off x="1828800" y="6654800"/>
+              <a:off x="2641600" y="6654800"/>
               <a:ext cx="203200" cy="203200"/>
             </a:xfrm>
             <a:prstGeom prst="rect">
@@ -4329,7 +4289,7 @@
           </p:nvSpPr>
           <p:spPr>
             <a:xfrm>
-              <a:off x="2235200" y="6654800"/>
+              <a:off x="3048000" y="6654800"/>
               <a:ext cx="203200" cy="203200"/>
             </a:xfrm>
             <a:prstGeom prst="rect">
@@ -4359,7 +4319,7 @@
           </p:nvSpPr>
           <p:spPr>
             <a:xfrm>
-              <a:off x="2641600" y="6654800"/>
+              <a:off x="3454400" y="6654800"/>
               <a:ext cx="203200" cy="203200"/>
             </a:xfrm>
             <a:prstGeom prst="rect">
@@ -4389,7 +4349,7 @@
           </p:nvSpPr>
           <p:spPr>
             <a:xfrm>
-              <a:off x="3048000" y="6654800"/>
+              <a:off x="3860800" y="6654800"/>
               <a:ext cx="203200" cy="203200"/>
             </a:xfrm>
             <a:prstGeom prst="rect">
@@ -4419,7 +4379,7 @@
           </p:nvSpPr>
           <p:spPr>
             <a:xfrm>
-              <a:off x="3454400" y="6654800"/>
+              <a:off x="4267200" y="6654800"/>
               <a:ext cx="203200" cy="203200"/>
             </a:xfrm>
             <a:prstGeom prst="rect">
@@ -4449,7 +4409,7 @@
           </p:nvSpPr>
           <p:spPr>
             <a:xfrm>
-              <a:off x="3860800" y="6654800"/>
+              <a:off x="4673600" y="6654800"/>
               <a:ext cx="203200" cy="203200"/>
             </a:xfrm>
             <a:prstGeom prst="rect">
@@ -4479,7 +4439,7 @@
           </p:nvSpPr>
           <p:spPr>
             <a:xfrm>
-              <a:off x="4267200" y="6654800"/>
+              <a:off x="5080000" y="6654800"/>
               <a:ext cx="203200" cy="203200"/>
             </a:xfrm>
             <a:prstGeom prst="rect">
@@ -4509,7 +4469,7 @@
           </p:nvSpPr>
           <p:spPr>
             <a:xfrm>
-              <a:off x="4673600" y="6654800"/>
+              <a:off x="5486400" y="6654800"/>
               <a:ext cx="203200" cy="203200"/>
             </a:xfrm>
             <a:prstGeom prst="rect">
@@ -4539,7 +4499,7 @@
           </p:nvSpPr>
           <p:spPr>
             <a:xfrm>
-              <a:off x="5080000" y="6654800"/>
+              <a:off x="5892800" y="6654800"/>
               <a:ext cx="203200" cy="203200"/>
             </a:xfrm>
             <a:prstGeom prst="rect">
@@ -4569,7 +4529,7 @@
           </p:nvSpPr>
           <p:spPr>
             <a:xfrm>
-              <a:off x="5486400" y="6654800"/>
+              <a:off x="6299200" y="6654800"/>
               <a:ext cx="203200" cy="203200"/>
             </a:xfrm>
             <a:prstGeom prst="rect">
@@ -4599,7 +4559,7 @@
           </p:nvSpPr>
           <p:spPr>
             <a:xfrm>
-              <a:off x="5892800" y="6654800"/>
+              <a:off x="6705600" y="6654800"/>
               <a:ext cx="203200" cy="203200"/>
             </a:xfrm>
             <a:prstGeom prst="rect">
@@ -4629,7 +4589,7 @@
           </p:nvSpPr>
           <p:spPr>
             <a:xfrm>
-              <a:off x="6299200" y="6654800"/>
+              <a:off x="7112000" y="6654800"/>
               <a:ext cx="203200" cy="203200"/>
             </a:xfrm>
             <a:prstGeom prst="rect">
@@ -4659,7 +4619,7 @@
           </p:nvSpPr>
           <p:spPr>
             <a:xfrm>
-              <a:off x="6705600" y="6654800"/>
+              <a:off x="7518400" y="6654800"/>
               <a:ext cx="203200" cy="203200"/>
             </a:xfrm>
             <a:prstGeom prst="rect">
@@ -4689,7 +4649,7 @@
           </p:nvSpPr>
           <p:spPr>
             <a:xfrm>
-              <a:off x="7112000" y="6654800"/>
+              <a:off x="7924800" y="6654800"/>
               <a:ext cx="203200" cy="203200"/>
             </a:xfrm>
             <a:prstGeom prst="rect">
@@ -4719,7 +4679,7 @@
           </p:nvSpPr>
           <p:spPr>
             <a:xfrm>
-              <a:off x="7518400" y="6654800"/>
+              <a:off x="8331200" y="6654800"/>
               <a:ext cx="203200" cy="203200"/>
             </a:xfrm>
             <a:prstGeom prst="rect">
@@ -4749,7 +4709,7 @@
           </p:nvSpPr>
           <p:spPr>
             <a:xfrm>
-              <a:off x="7924800" y="6654800"/>
+              <a:off x="8737600" y="6654800"/>
               <a:ext cx="203200" cy="203200"/>
             </a:xfrm>
             <a:prstGeom prst="rect">
@@ -4779,7 +4739,7 @@
           </p:nvSpPr>
           <p:spPr>
             <a:xfrm>
-              <a:off x="8331200" y="6654800"/>
+              <a:off x="9144000" y="6654800"/>
               <a:ext cx="203200" cy="203200"/>
             </a:xfrm>
             <a:prstGeom prst="rect">
@@ -4809,7 +4769,7 @@
           </p:nvSpPr>
           <p:spPr>
             <a:xfrm>
-              <a:off x="8737600" y="6654800"/>
+              <a:off x="9550400" y="6654800"/>
               <a:ext cx="203200" cy="203200"/>
             </a:xfrm>
             <a:prstGeom prst="rect">
@@ -4839,7 +4799,7 @@
           </p:nvSpPr>
           <p:spPr>
             <a:xfrm>
-              <a:off x="9144000" y="6654800"/>
+              <a:off x="9956800" y="6654800"/>
               <a:ext cx="203200" cy="203200"/>
             </a:xfrm>
             <a:prstGeom prst="rect">
@@ -4869,7 +4829,7 @@
           </p:nvSpPr>
           <p:spPr>
             <a:xfrm>
-              <a:off x="9550400" y="6654800"/>
+              <a:off x="10363200" y="6654800"/>
               <a:ext cx="203200" cy="203200"/>
             </a:xfrm>
             <a:prstGeom prst="rect">
@@ -4899,7 +4859,7 @@
           </p:nvSpPr>
           <p:spPr>
             <a:xfrm>
-              <a:off x="9956800" y="6654800"/>
+              <a:off x="10769600" y="6654800"/>
               <a:ext cx="203200" cy="203200"/>
             </a:xfrm>
             <a:prstGeom prst="rect">
@@ -4929,7 +4889,7 @@
           </p:nvSpPr>
           <p:spPr>
             <a:xfrm>
-              <a:off x="10363200" y="6654800"/>
+              <a:off x="11176000" y="6654800"/>
               <a:ext cx="203200" cy="203200"/>
             </a:xfrm>
             <a:prstGeom prst="rect">
@@ -4959,7 +4919,7 @@
           </p:nvSpPr>
           <p:spPr>
             <a:xfrm>
-              <a:off x="10769600" y="6654800"/>
+              <a:off x="11582400" y="6654800"/>
               <a:ext cx="203200" cy="203200"/>
             </a:xfrm>
             <a:prstGeom prst="rect">
@@ -4984,66 +4944,6 @@
         <p:sp>
           <p:nvSpPr>
             <p:cNvPr id="64" name="Rectangle 63"/>
-            <p:cNvSpPr/>
-            <p:nvPr/>
-          </p:nvSpPr>
-          <p:spPr>
-            <a:xfrm>
-              <a:off x="11176000" y="6654800"/>
-              <a:ext cx="203200" cy="203200"/>
-            </a:xfrm>
-            <a:prstGeom prst="rect">
-              <a:avLst/>
-            </a:prstGeom>
-            <a:solidFill>
-              <a:srgbClr val="ED1C24"/>
-            </a:solidFill>
-            <a:ln>
-              <a:noFill/>
-            </a:ln>
-            <a:effectLst/>
-          </p:spPr>
-          <p:txBody>
-            <a:bodyPr rtlCol="0" anchor="ctr"/>
-            <a:lstStyle/>
-            <a:p>
-              <a:pPr algn="ctr"/>
-            </a:p>
-          </p:txBody>
-        </p:sp>
-        <p:sp>
-          <p:nvSpPr>
-            <p:cNvPr id="65" name="Rectangle 64"/>
-            <p:cNvSpPr/>
-            <p:nvPr/>
-          </p:nvSpPr>
-          <p:spPr>
-            <a:xfrm>
-              <a:off x="11582400" y="6654800"/>
-              <a:ext cx="203200" cy="203200"/>
-            </a:xfrm>
-            <a:prstGeom prst="rect">
-              <a:avLst/>
-            </a:prstGeom>
-            <a:solidFill>
-              <a:srgbClr val="ED1C24"/>
-            </a:solidFill>
-            <a:ln>
-              <a:noFill/>
-            </a:ln>
-            <a:effectLst/>
-          </p:spPr>
-          <p:txBody>
-            <a:bodyPr rtlCol="0" anchor="ctr"/>
-            <a:lstStyle/>
-            <a:p>
-              <a:pPr algn="ctr"/>
-            </a:p>
-          </p:txBody>
-        </p:sp>
-        <p:sp>
-          <p:nvSpPr>
-            <p:cNvPr id="66" name="Rectangle 65"/>
             <p:cNvSpPr/>
             <p:nvPr/>
           </p:nvSpPr>
@@ -5098,64 +4998,9 @@
         <p:nvPr/>
       </p:nvGrpSpPr>
       <p:grpSpPr/>
-      <p:sp>
-        <p:nvSpPr>
-          <p:cNvPr id="2" name="Title 1"/>
-          <p:cNvSpPr>
-            <a:spLocks noGrp="1"/>
-          </p:cNvSpPr>
-          <p:nvPr>
-            <p:ph type="title"/>
-          </p:nvPr>
-        </p:nvSpPr>
-        <p:spPr>
-          <a:xfrm>
-            <a:off x="548640" y="566928"/>
-            <a:ext cx="5760720" cy="1371600"/>
-          </a:xfrm>
-        </p:spPr>
-        <p:txBody>
-          <a:bodyPr anchor="t" wrap="square" lIns="0" rIns="0" tIns="0" bIns="0">
-            <a:noAutofit/>
-          </a:bodyPr>
-          <a:lstStyle/>
-          <a:p>
-            <a:pPr algn="l">
-              <a:lnSpc>
-                <a:spcPct val="92000"/>
-              </a:lnSpc>
-            </a:pPr>
-            <a:r>
-              <a:rPr sz="4400" b="1">
-                <a:solidFill>
-                  <a:srgbClr val="000000"/>
-                </a:solidFill>
-                <a:latin typeface="Arial"/>
-              </a:rPr>
-              <a:t>$0 Advertising</a:t>
-            </a:r>
-          </a:p>
-          <a:p>
-            <a:pPr algn="l">
-              <a:lnSpc>
-                <a:spcPct val="92000"/>
-              </a:lnSpc>
-            </a:pPr>
-            <a:r>
-              <a:rPr sz="4400" b="1">
-                <a:solidFill>
-                  <a:srgbClr val="ED1C24"/>
-                </a:solidFill>
-                <a:latin typeface="Arial"/>
-              </a:rPr>
-              <a:t>&amp; Open Kitchen</a:t>
-            </a:r>
-          </a:p>
-        </p:txBody>
-      </p:sp>
       <p:pic>
         <p:nvPicPr>
-          <p:cNvPr id="3" name="Photo open_kitchen_covent_garden" descr="Five Guys staff in red shirts cooking burgers in an open kitchen"/>
+          <p:cNvPr id="2" name="Photo open_kitchen_covent_garden" descr="Five Guys cooks making burgers in an open kitchen"/>
           <p:cNvPicPr>
             <a:picLocks noChangeAspect="1"/>
           </p:cNvPicPr>
@@ -5163,56 +5008,26 @@
         </p:nvPicPr>
         <p:blipFill>
           <a:blip r:embed="rId2"/>
-          <a:srcRect l="10566" r="34566"/>
+          <a:srcRect r="8530"/>
           <a:stretch>
             <a:fillRect/>
           </a:stretch>
         </p:blipFill>
         <p:spPr>
           <a:xfrm>
-            <a:off x="7452360" y="0"/>
-            <a:ext cx="4739640" cy="6451600"/>
+            <a:off x="457200" y="411480"/>
+            <a:ext cx="6949440" cy="5674360"/>
           </a:xfrm>
-          <a:prstGeom prst="rect">
-            <a:avLst/>
+          <a:prstGeom prst="roundRect">
+            <a:avLst>
+              <a:gd name="adj" fmla="val 2256"/>
+            </a:avLst>
           </a:prstGeom>
         </p:spPr>
       </p:pic>
-      <p:sp>
-        <p:nvSpPr>
-          <p:cNvPr id="4" name="Stat $0"/>
-          <p:cNvSpPr/>
-          <p:nvPr/>
-        </p:nvSpPr>
-        <p:spPr>
-          <a:xfrm>
-            <a:off x="548640" y="2240280"/>
-            <a:ext cx="2468880" cy="3840480"/>
-          </a:xfrm>
-          <a:prstGeom prst="roundRect">
-            <a:avLst>
-              <a:gd name="adj" fmla="val 5555"/>
-            </a:avLst>
-          </a:prstGeom>
-          <a:solidFill>
-            <a:srgbClr val="ED1C24"/>
-          </a:solidFill>
-          <a:ln>
-            <a:noFill/>
-          </a:ln>
-          <a:effectLst/>
-        </p:spPr>
-        <p:txBody>
-          <a:bodyPr rtlCol="0" anchor="ctr"/>
-          <a:lstStyle/>
-          <a:p>
-            <a:pPr algn="ctr"/>
-          </a:p>
-        </p:txBody>
-      </p:sp>
       <p:pic>
         <p:nvPicPr>
-          <p:cNvPr id="5" name="Icon device-tv-off" descr="device tv off icon"/>
+          <p:cNvPr id="3" name="Photo fresh_potatoes_peanuts" descr="Sacks of fresh potatoes and boxes of peanuts inside a Five Guys"/>
           <p:cNvPicPr>
             <a:picLocks noChangeAspect="1"/>
           </p:cNvPicPr>
@@ -5220,542 +5035,26 @@
         </p:nvPicPr>
         <p:blipFill>
           <a:blip r:embed="rId3"/>
+          <a:srcRect l="17982" r="17982"/>
           <a:stretch>
             <a:fillRect/>
           </a:stretch>
         </p:blipFill>
         <p:spPr>
           <a:xfrm>
-            <a:off x="841248" y="2560320"/>
-            <a:ext cx="713232" cy="713232"/>
+            <a:off x="7589520" y="411480"/>
+            <a:ext cx="4145280" cy="5674360"/>
           </a:xfrm>
-          <a:prstGeom prst="rect">
-            <a:avLst/>
+          <a:prstGeom prst="roundRect">
+            <a:avLst>
+              <a:gd name="adj" fmla="val 3088"/>
+            </a:avLst>
           </a:prstGeom>
         </p:spPr>
       </p:pic>
-      <p:sp>
-        <p:nvSpPr>
-          <p:cNvPr id="6" name="TextBox 5"/>
-          <p:cNvSpPr txBox="1"/>
-          <p:nvPr/>
-        </p:nvSpPr>
-        <p:spPr>
-          <a:xfrm>
-            <a:off x="777240" y="3977640"/>
-            <a:ext cx="2194560" cy="1783080"/>
-          </a:xfrm>
-          <a:prstGeom prst="rect">
-            <a:avLst/>
-          </a:prstGeom>
-          <a:noFill/>
-        </p:spPr>
-        <p:txBody>
-          <a:bodyPr wrap="square" anchor="b" lIns="0" rIns="0" tIns="0" bIns="0">
-            <a:noAutofit/>
-          </a:bodyPr>
-          <a:lstStyle/>
-          <a:p>
-            <a:pPr algn="l"/>
-            <a:r>
-              <a:rPr sz="12000" b="1">
-                <a:solidFill>
-                  <a:srgbClr val="FFFFFF"/>
-                </a:solidFill>
-                <a:latin typeface="Arial"/>
-              </a:rPr>
-              <a:t>$0</a:t>
-            </a:r>
-          </a:p>
-        </p:txBody>
-      </p:sp>
-      <p:sp>
-        <p:nvSpPr>
-          <p:cNvPr id="7" name="Keyword Word-of-Mouth"/>
-          <p:cNvSpPr/>
-          <p:nvPr/>
-        </p:nvSpPr>
-        <p:spPr>
-          <a:xfrm>
-            <a:off x="3291840" y="2240280"/>
-            <a:ext cx="3703320" cy="795528"/>
-          </a:xfrm>
-          <a:prstGeom prst="roundRect">
-            <a:avLst>
-              <a:gd name="adj" fmla="val 13793"/>
-            </a:avLst>
-          </a:prstGeom>
-          <a:solidFill>
-            <a:srgbClr val="F2F2F2"/>
-          </a:solidFill>
-          <a:ln>
-            <a:noFill/>
-          </a:ln>
-          <a:effectLst/>
-        </p:spPr>
-        <p:txBody>
-          <a:bodyPr rtlCol="0" anchor="ctr"/>
-          <a:lstStyle/>
-          <a:p>
-            <a:pPr algn="ctr"/>
-          </a:p>
-        </p:txBody>
-      </p:sp>
-      <p:sp>
-        <p:nvSpPr>
-          <p:cNvPr id="8" name="Badge messages"/>
-          <p:cNvSpPr/>
-          <p:nvPr/>
-        </p:nvSpPr>
-        <p:spPr>
-          <a:xfrm>
-            <a:off x="3429000" y="2359152"/>
-            <a:ext cx="557784" cy="557784"/>
-          </a:xfrm>
-          <a:prstGeom prst="ellipse">
-            <a:avLst/>
-          </a:prstGeom>
-          <a:solidFill>
-            <a:srgbClr val="ED1C24"/>
-          </a:solidFill>
-          <a:ln>
-            <a:noFill/>
-          </a:ln>
-          <a:effectLst/>
-        </p:spPr>
-        <p:txBody>
-          <a:bodyPr rtlCol="0" anchor="ctr"/>
-          <a:lstStyle/>
-          <a:p>
-            <a:pPr algn="ctr"/>
-          </a:p>
-        </p:txBody>
-      </p:sp>
-      <p:pic>
-        <p:nvPicPr>
-          <p:cNvPr id="9" name="Icon messages" descr="messages icon"/>
-          <p:cNvPicPr>
-            <a:picLocks noChangeAspect="1"/>
-          </p:cNvPicPr>
-          <p:nvPr/>
-        </p:nvPicPr>
-        <p:blipFill>
-          <a:blip r:embed="rId4"/>
-          <a:stretch>
-            <a:fillRect/>
-          </a:stretch>
-        </p:blipFill>
-        <p:spPr>
-          <a:xfrm>
-            <a:off x="3551712" y="2481864"/>
-            <a:ext cx="312359" cy="312359"/>
-          </a:xfrm>
-          <a:prstGeom prst="rect">
-            <a:avLst/>
-          </a:prstGeom>
-        </p:spPr>
-      </p:pic>
-      <p:sp>
-        <p:nvSpPr>
-          <p:cNvPr id="10" name="TextBox 9"/>
-          <p:cNvSpPr txBox="1"/>
-          <p:nvPr/>
-        </p:nvSpPr>
-        <p:spPr>
-          <a:xfrm>
-            <a:off x="4160520" y="2240280"/>
-            <a:ext cx="2788920" cy="795528"/>
-          </a:xfrm>
-          <a:prstGeom prst="rect">
-            <a:avLst/>
-          </a:prstGeom>
-          <a:noFill/>
-        </p:spPr>
-        <p:txBody>
-          <a:bodyPr wrap="square" anchor="ctr" lIns="0" rIns="0" tIns="0" bIns="0">
-            <a:noAutofit/>
-          </a:bodyPr>
-          <a:lstStyle/>
-          <a:p>
-            <a:pPr algn="l"/>
-            <a:r>
-              <a:rPr sz="2600" b="1">
-                <a:solidFill>
-                  <a:srgbClr val="000000"/>
-                </a:solidFill>
-                <a:latin typeface="Arial"/>
-              </a:rPr>
-              <a:t>Word-of-Mouth</a:t>
-            </a:r>
-          </a:p>
-        </p:txBody>
-      </p:sp>
-      <p:sp>
-        <p:nvSpPr>
-          <p:cNvPr id="11" name="Keyword No Freezers"/>
-          <p:cNvSpPr/>
-          <p:nvPr/>
-        </p:nvSpPr>
-        <p:spPr>
-          <a:xfrm>
-            <a:off x="3291840" y="3255264"/>
-            <a:ext cx="3703320" cy="795528"/>
-          </a:xfrm>
-          <a:prstGeom prst="roundRect">
-            <a:avLst>
-              <a:gd name="adj" fmla="val 13793"/>
-            </a:avLst>
-          </a:prstGeom>
-          <a:solidFill>
-            <a:srgbClr val="F2F2F2"/>
-          </a:solidFill>
-          <a:ln>
-            <a:noFill/>
-          </a:ln>
-          <a:effectLst/>
-        </p:spPr>
-        <p:txBody>
-          <a:bodyPr rtlCol="0" anchor="ctr"/>
-          <a:lstStyle/>
-          <a:p>
-            <a:pPr algn="ctr"/>
-          </a:p>
-        </p:txBody>
-      </p:sp>
-      <p:sp>
-        <p:nvSpPr>
-          <p:cNvPr id="12" name="Badge snowflake-off"/>
-          <p:cNvSpPr/>
-          <p:nvPr/>
-        </p:nvSpPr>
-        <p:spPr>
-          <a:xfrm>
-            <a:off x="3429000" y="3374136"/>
-            <a:ext cx="557784" cy="557784"/>
-          </a:xfrm>
-          <a:prstGeom prst="ellipse">
-            <a:avLst/>
-          </a:prstGeom>
-          <a:solidFill>
-            <a:srgbClr val="ED1C24"/>
-          </a:solidFill>
-          <a:ln>
-            <a:noFill/>
-          </a:ln>
-          <a:effectLst/>
-        </p:spPr>
-        <p:txBody>
-          <a:bodyPr rtlCol="0" anchor="ctr"/>
-          <a:lstStyle/>
-          <a:p>
-            <a:pPr algn="ctr"/>
-          </a:p>
-        </p:txBody>
-      </p:sp>
-      <p:pic>
-        <p:nvPicPr>
-          <p:cNvPr id="13" name="Icon snowflake-off" descr="snowflake off icon"/>
-          <p:cNvPicPr>
-            <a:picLocks noChangeAspect="1"/>
-          </p:cNvPicPr>
-          <p:nvPr/>
-        </p:nvPicPr>
-        <p:blipFill>
-          <a:blip r:embed="rId5"/>
-          <a:stretch>
-            <a:fillRect/>
-          </a:stretch>
-        </p:blipFill>
-        <p:spPr>
-          <a:xfrm>
-            <a:off x="3551712" y="3496848"/>
-            <a:ext cx="312359" cy="312359"/>
-          </a:xfrm>
-          <a:prstGeom prst="rect">
-            <a:avLst/>
-          </a:prstGeom>
-        </p:spPr>
-      </p:pic>
-      <p:sp>
-        <p:nvSpPr>
-          <p:cNvPr id="14" name="TextBox 13"/>
-          <p:cNvSpPr txBox="1"/>
-          <p:nvPr/>
-        </p:nvSpPr>
-        <p:spPr>
-          <a:xfrm>
-            <a:off x="4160520" y="3255264"/>
-            <a:ext cx="2788920" cy="795528"/>
-          </a:xfrm>
-          <a:prstGeom prst="rect">
-            <a:avLst/>
-          </a:prstGeom>
-          <a:noFill/>
-        </p:spPr>
-        <p:txBody>
-          <a:bodyPr wrap="square" anchor="ctr" lIns="0" rIns="0" tIns="0" bIns="0">
-            <a:noAutofit/>
-          </a:bodyPr>
-          <a:lstStyle/>
-          <a:p>
-            <a:pPr algn="l"/>
-            <a:r>
-              <a:rPr sz="2600" b="1">
-                <a:solidFill>
-                  <a:srgbClr val="000000"/>
-                </a:solidFill>
-                <a:latin typeface="Arial"/>
-              </a:rPr>
-              <a:t>No Freezers</a:t>
-            </a:r>
-          </a:p>
-        </p:txBody>
-      </p:sp>
-      <p:sp>
-        <p:nvSpPr>
-          <p:cNvPr id="15" name="Keyword 100% Fresh"/>
-          <p:cNvSpPr/>
-          <p:nvPr/>
-        </p:nvSpPr>
-        <p:spPr>
-          <a:xfrm>
-            <a:off x="3291840" y="4270248"/>
-            <a:ext cx="3703320" cy="795528"/>
-          </a:xfrm>
-          <a:prstGeom prst="roundRect">
-            <a:avLst>
-              <a:gd name="adj" fmla="val 13793"/>
-            </a:avLst>
-          </a:prstGeom>
-          <a:solidFill>
-            <a:srgbClr val="F2F2F2"/>
-          </a:solidFill>
-          <a:ln>
-            <a:noFill/>
-          </a:ln>
-          <a:effectLst/>
-        </p:spPr>
-        <p:txBody>
-          <a:bodyPr rtlCol="0" anchor="ctr"/>
-          <a:lstStyle/>
-          <a:p>
-            <a:pPr algn="ctr"/>
-          </a:p>
-        </p:txBody>
-      </p:sp>
-      <p:sp>
-        <p:nvSpPr>
-          <p:cNvPr id="16" name="Badge leaf"/>
-          <p:cNvSpPr/>
-          <p:nvPr/>
-        </p:nvSpPr>
-        <p:spPr>
-          <a:xfrm>
-            <a:off x="3429000" y="4389120"/>
-            <a:ext cx="557784" cy="557784"/>
-          </a:xfrm>
-          <a:prstGeom prst="ellipse">
-            <a:avLst/>
-          </a:prstGeom>
-          <a:solidFill>
-            <a:srgbClr val="ED1C24"/>
-          </a:solidFill>
-          <a:ln>
-            <a:noFill/>
-          </a:ln>
-          <a:effectLst/>
-        </p:spPr>
-        <p:txBody>
-          <a:bodyPr rtlCol="0" anchor="ctr"/>
-          <a:lstStyle/>
-          <a:p>
-            <a:pPr algn="ctr"/>
-          </a:p>
-        </p:txBody>
-      </p:sp>
-      <p:pic>
-        <p:nvPicPr>
-          <p:cNvPr id="17" name="Icon leaf" descr="leaf icon"/>
-          <p:cNvPicPr>
-            <a:picLocks noChangeAspect="1"/>
-          </p:cNvPicPr>
-          <p:nvPr/>
-        </p:nvPicPr>
-        <p:blipFill>
-          <a:blip r:embed="rId6"/>
-          <a:stretch>
-            <a:fillRect/>
-          </a:stretch>
-        </p:blipFill>
-        <p:spPr>
-          <a:xfrm>
-            <a:off x="3551712" y="4511832"/>
-            <a:ext cx="312359" cy="312359"/>
-          </a:xfrm>
-          <a:prstGeom prst="rect">
-            <a:avLst/>
-          </a:prstGeom>
-        </p:spPr>
-      </p:pic>
-      <p:sp>
-        <p:nvSpPr>
-          <p:cNvPr id="18" name="TextBox 17"/>
-          <p:cNvSpPr txBox="1"/>
-          <p:nvPr/>
-        </p:nvSpPr>
-        <p:spPr>
-          <a:xfrm>
-            <a:off x="4160520" y="4270248"/>
-            <a:ext cx="2788920" cy="795528"/>
-          </a:xfrm>
-          <a:prstGeom prst="rect">
-            <a:avLst/>
-          </a:prstGeom>
-          <a:noFill/>
-        </p:spPr>
-        <p:txBody>
-          <a:bodyPr wrap="square" anchor="ctr" lIns="0" rIns="0" tIns="0" bIns="0">
-            <a:noAutofit/>
-          </a:bodyPr>
-          <a:lstStyle/>
-          <a:p>
-            <a:pPr algn="l"/>
-            <a:r>
-              <a:rPr sz="2600" b="1">
-                <a:solidFill>
-                  <a:srgbClr val="000000"/>
-                </a:solidFill>
-                <a:latin typeface="Arial"/>
-              </a:rPr>
-              <a:t>100% Fresh</a:t>
-            </a:r>
-          </a:p>
-        </p:txBody>
-      </p:sp>
-      <p:sp>
-        <p:nvSpPr>
-          <p:cNvPr id="19" name="Keyword Customer Trust"/>
-          <p:cNvSpPr/>
-          <p:nvPr/>
-        </p:nvSpPr>
-        <p:spPr>
-          <a:xfrm>
-            <a:off x="3291840" y="5285232"/>
-            <a:ext cx="3703320" cy="795528"/>
-          </a:xfrm>
-          <a:prstGeom prst="roundRect">
-            <a:avLst>
-              <a:gd name="adj" fmla="val 13793"/>
-            </a:avLst>
-          </a:prstGeom>
-          <a:solidFill>
-            <a:srgbClr val="ED1C24"/>
-          </a:solidFill>
-          <a:ln>
-            <a:noFill/>
-          </a:ln>
-          <a:effectLst/>
-        </p:spPr>
-        <p:txBody>
-          <a:bodyPr rtlCol="0" anchor="ctr"/>
-          <a:lstStyle/>
-          <a:p>
-            <a:pPr algn="ctr"/>
-          </a:p>
-        </p:txBody>
-      </p:sp>
-      <p:sp>
-        <p:nvSpPr>
-          <p:cNvPr id="20" name="Badge heart-handshake"/>
-          <p:cNvSpPr/>
-          <p:nvPr/>
-        </p:nvSpPr>
-        <p:spPr>
-          <a:xfrm>
-            <a:off x="3429000" y="5404104"/>
-            <a:ext cx="557784" cy="557784"/>
-          </a:xfrm>
-          <a:prstGeom prst="ellipse">
-            <a:avLst/>
-          </a:prstGeom>
-          <a:solidFill>
-            <a:srgbClr val="FFFFFF"/>
-          </a:solidFill>
-          <a:ln>
-            <a:noFill/>
-          </a:ln>
-          <a:effectLst/>
-        </p:spPr>
-        <p:txBody>
-          <a:bodyPr rtlCol="0" anchor="ctr"/>
-          <a:lstStyle/>
-          <a:p>
-            <a:pPr algn="ctr"/>
-          </a:p>
-        </p:txBody>
-      </p:sp>
-      <p:pic>
-        <p:nvPicPr>
-          <p:cNvPr id="21" name="Icon heart-handshake" descr="heart handshake icon"/>
-          <p:cNvPicPr>
-            <a:picLocks noChangeAspect="1"/>
-          </p:cNvPicPr>
-          <p:nvPr/>
-        </p:nvPicPr>
-        <p:blipFill>
-          <a:blip r:embed="rId7"/>
-          <a:stretch>
-            <a:fillRect/>
-          </a:stretch>
-        </p:blipFill>
-        <p:spPr>
-          <a:xfrm>
-            <a:off x="3551712" y="5526816"/>
-            <a:ext cx="312359" cy="312359"/>
-          </a:xfrm>
-          <a:prstGeom prst="rect">
-            <a:avLst/>
-          </a:prstGeom>
-        </p:spPr>
-      </p:pic>
-      <p:sp>
-        <p:nvSpPr>
-          <p:cNvPr id="22" name="TextBox 21"/>
-          <p:cNvSpPr txBox="1"/>
-          <p:nvPr/>
-        </p:nvSpPr>
-        <p:spPr>
-          <a:xfrm>
-            <a:off x="4160520" y="5285232"/>
-            <a:ext cx="2788920" cy="795528"/>
-          </a:xfrm>
-          <a:prstGeom prst="rect">
-            <a:avLst/>
-          </a:prstGeom>
-          <a:noFill/>
-        </p:spPr>
-        <p:txBody>
-          <a:bodyPr wrap="square" anchor="ctr" lIns="0" rIns="0" tIns="0" bIns="0">
-            <a:noAutofit/>
-          </a:bodyPr>
-          <a:lstStyle/>
-          <a:p>
-            <a:pPr algn="l"/>
-            <a:r>
-              <a:rPr sz="2600" b="1">
-                <a:solidFill>
-                  <a:srgbClr val="FFFFFF"/>
-                </a:solidFill>
-                <a:latin typeface="Arial"/>
-              </a:rPr>
-              <a:t>Customer Trust</a:t>
-            </a:r>
-          </a:p>
-        </p:txBody>
-      </p:sp>
       <p:grpSp>
         <p:nvGrpSpPr>
-          <p:cNvPr id="23" name="Checker band"/>
+          <p:cNvPr id="4" name="Checker band"/>
           <p:cNvGrpSpPr/>
           <p:nvPr/>
         </p:nvGrpSpPr>
@@ -5769,7 +5068,7 @@
         </p:grpSpPr>
         <p:sp>
           <p:nvSpPr>
-            <p:cNvPr id="24" name="Rectangle 23"/>
+            <p:cNvPr id="5" name="Rectangle 4"/>
             <p:cNvSpPr/>
             <p:nvPr/>
           </p:nvSpPr>
@@ -5799,13 +5098,583 @@
         </p:sp>
         <p:sp>
           <p:nvSpPr>
+            <p:cNvPr id="6" name="Rectangle 5"/>
+            <p:cNvSpPr/>
+            <p:nvPr/>
+          </p:nvSpPr>
+          <p:spPr>
+            <a:xfrm>
+              <a:off x="0" y="6451600"/>
+              <a:ext cx="203200" cy="203200"/>
+            </a:xfrm>
+            <a:prstGeom prst="rect">
+              <a:avLst/>
+            </a:prstGeom>
+            <a:solidFill>
+              <a:srgbClr val="ED1C24"/>
+            </a:solidFill>
+            <a:ln>
+              <a:noFill/>
+            </a:ln>
+            <a:effectLst/>
+          </p:spPr>
+          <p:txBody>
+            <a:bodyPr rtlCol="0" anchor="ctr"/>
+            <a:lstStyle/>
+            <a:p>
+              <a:pPr algn="ctr"/>
+            </a:p>
+          </p:txBody>
+        </p:sp>
+        <p:sp>
+          <p:nvSpPr>
+            <p:cNvPr id="7" name="Rectangle 6"/>
+            <p:cNvSpPr/>
+            <p:nvPr/>
+          </p:nvSpPr>
+          <p:spPr>
+            <a:xfrm>
+              <a:off x="406400" y="6451600"/>
+              <a:ext cx="203200" cy="203200"/>
+            </a:xfrm>
+            <a:prstGeom prst="rect">
+              <a:avLst/>
+            </a:prstGeom>
+            <a:solidFill>
+              <a:srgbClr val="ED1C24"/>
+            </a:solidFill>
+            <a:ln>
+              <a:noFill/>
+            </a:ln>
+            <a:effectLst/>
+          </p:spPr>
+          <p:txBody>
+            <a:bodyPr rtlCol="0" anchor="ctr"/>
+            <a:lstStyle/>
+            <a:p>
+              <a:pPr algn="ctr"/>
+            </a:p>
+          </p:txBody>
+        </p:sp>
+        <p:sp>
+          <p:nvSpPr>
+            <p:cNvPr id="8" name="Rectangle 7"/>
+            <p:cNvSpPr/>
+            <p:nvPr/>
+          </p:nvSpPr>
+          <p:spPr>
+            <a:xfrm>
+              <a:off x="812800" y="6451600"/>
+              <a:ext cx="203200" cy="203200"/>
+            </a:xfrm>
+            <a:prstGeom prst="rect">
+              <a:avLst/>
+            </a:prstGeom>
+            <a:solidFill>
+              <a:srgbClr val="ED1C24"/>
+            </a:solidFill>
+            <a:ln>
+              <a:noFill/>
+            </a:ln>
+            <a:effectLst/>
+          </p:spPr>
+          <p:txBody>
+            <a:bodyPr rtlCol="0" anchor="ctr"/>
+            <a:lstStyle/>
+            <a:p>
+              <a:pPr algn="ctr"/>
+            </a:p>
+          </p:txBody>
+        </p:sp>
+        <p:sp>
+          <p:nvSpPr>
+            <p:cNvPr id="9" name="Rectangle 8"/>
+            <p:cNvSpPr/>
+            <p:nvPr/>
+          </p:nvSpPr>
+          <p:spPr>
+            <a:xfrm>
+              <a:off x="1219200" y="6451600"/>
+              <a:ext cx="203200" cy="203200"/>
+            </a:xfrm>
+            <a:prstGeom prst="rect">
+              <a:avLst/>
+            </a:prstGeom>
+            <a:solidFill>
+              <a:srgbClr val="ED1C24"/>
+            </a:solidFill>
+            <a:ln>
+              <a:noFill/>
+            </a:ln>
+            <a:effectLst/>
+          </p:spPr>
+          <p:txBody>
+            <a:bodyPr rtlCol="0" anchor="ctr"/>
+            <a:lstStyle/>
+            <a:p>
+              <a:pPr algn="ctr"/>
+            </a:p>
+          </p:txBody>
+        </p:sp>
+        <p:sp>
+          <p:nvSpPr>
+            <p:cNvPr id="10" name="Rectangle 9"/>
+            <p:cNvSpPr/>
+            <p:nvPr/>
+          </p:nvSpPr>
+          <p:spPr>
+            <a:xfrm>
+              <a:off x="1625600" y="6451600"/>
+              <a:ext cx="203200" cy="203200"/>
+            </a:xfrm>
+            <a:prstGeom prst="rect">
+              <a:avLst/>
+            </a:prstGeom>
+            <a:solidFill>
+              <a:srgbClr val="ED1C24"/>
+            </a:solidFill>
+            <a:ln>
+              <a:noFill/>
+            </a:ln>
+            <a:effectLst/>
+          </p:spPr>
+          <p:txBody>
+            <a:bodyPr rtlCol="0" anchor="ctr"/>
+            <a:lstStyle/>
+            <a:p>
+              <a:pPr algn="ctr"/>
+            </a:p>
+          </p:txBody>
+        </p:sp>
+        <p:sp>
+          <p:nvSpPr>
+            <p:cNvPr id="11" name="Rectangle 10"/>
+            <p:cNvSpPr/>
+            <p:nvPr/>
+          </p:nvSpPr>
+          <p:spPr>
+            <a:xfrm>
+              <a:off x="2032000" y="6451600"/>
+              <a:ext cx="203200" cy="203200"/>
+            </a:xfrm>
+            <a:prstGeom prst="rect">
+              <a:avLst/>
+            </a:prstGeom>
+            <a:solidFill>
+              <a:srgbClr val="ED1C24"/>
+            </a:solidFill>
+            <a:ln>
+              <a:noFill/>
+            </a:ln>
+            <a:effectLst/>
+          </p:spPr>
+          <p:txBody>
+            <a:bodyPr rtlCol="0" anchor="ctr"/>
+            <a:lstStyle/>
+            <a:p>
+              <a:pPr algn="ctr"/>
+            </a:p>
+          </p:txBody>
+        </p:sp>
+        <p:sp>
+          <p:nvSpPr>
+            <p:cNvPr id="12" name="Rectangle 11"/>
+            <p:cNvSpPr/>
+            <p:nvPr/>
+          </p:nvSpPr>
+          <p:spPr>
+            <a:xfrm>
+              <a:off x="2438400" y="6451600"/>
+              <a:ext cx="203200" cy="203200"/>
+            </a:xfrm>
+            <a:prstGeom prst="rect">
+              <a:avLst/>
+            </a:prstGeom>
+            <a:solidFill>
+              <a:srgbClr val="ED1C24"/>
+            </a:solidFill>
+            <a:ln>
+              <a:noFill/>
+            </a:ln>
+            <a:effectLst/>
+          </p:spPr>
+          <p:txBody>
+            <a:bodyPr rtlCol="0" anchor="ctr"/>
+            <a:lstStyle/>
+            <a:p>
+              <a:pPr algn="ctr"/>
+            </a:p>
+          </p:txBody>
+        </p:sp>
+        <p:sp>
+          <p:nvSpPr>
+            <p:cNvPr id="13" name="Rectangle 12"/>
+            <p:cNvSpPr/>
+            <p:nvPr/>
+          </p:nvSpPr>
+          <p:spPr>
+            <a:xfrm>
+              <a:off x="2844800" y="6451600"/>
+              <a:ext cx="203200" cy="203200"/>
+            </a:xfrm>
+            <a:prstGeom prst="rect">
+              <a:avLst/>
+            </a:prstGeom>
+            <a:solidFill>
+              <a:srgbClr val="ED1C24"/>
+            </a:solidFill>
+            <a:ln>
+              <a:noFill/>
+            </a:ln>
+            <a:effectLst/>
+          </p:spPr>
+          <p:txBody>
+            <a:bodyPr rtlCol="0" anchor="ctr"/>
+            <a:lstStyle/>
+            <a:p>
+              <a:pPr algn="ctr"/>
+            </a:p>
+          </p:txBody>
+        </p:sp>
+        <p:sp>
+          <p:nvSpPr>
+            <p:cNvPr id="14" name="Rectangle 13"/>
+            <p:cNvSpPr/>
+            <p:nvPr/>
+          </p:nvSpPr>
+          <p:spPr>
+            <a:xfrm>
+              <a:off x="3251200" y="6451600"/>
+              <a:ext cx="203200" cy="203200"/>
+            </a:xfrm>
+            <a:prstGeom prst="rect">
+              <a:avLst/>
+            </a:prstGeom>
+            <a:solidFill>
+              <a:srgbClr val="ED1C24"/>
+            </a:solidFill>
+            <a:ln>
+              <a:noFill/>
+            </a:ln>
+            <a:effectLst/>
+          </p:spPr>
+          <p:txBody>
+            <a:bodyPr rtlCol="0" anchor="ctr"/>
+            <a:lstStyle/>
+            <a:p>
+              <a:pPr algn="ctr"/>
+            </a:p>
+          </p:txBody>
+        </p:sp>
+        <p:sp>
+          <p:nvSpPr>
+            <p:cNvPr id="15" name="Rectangle 14"/>
+            <p:cNvSpPr/>
+            <p:nvPr/>
+          </p:nvSpPr>
+          <p:spPr>
+            <a:xfrm>
+              <a:off x="3657600" y="6451600"/>
+              <a:ext cx="203200" cy="203200"/>
+            </a:xfrm>
+            <a:prstGeom prst="rect">
+              <a:avLst/>
+            </a:prstGeom>
+            <a:solidFill>
+              <a:srgbClr val="ED1C24"/>
+            </a:solidFill>
+            <a:ln>
+              <a:noFill/>
+            </a:ln>
+            <a:effectLst/>
+          </p:spPr>
+          <p:txBody>
+            <a:bodyPr rtlCol="0" anchor="ctr"/>
+            <a:lstStyle/>
+            <a:p>
+              <a:pPr algn="ctr"/>
+            </a:p>
+          </p:txBody>
+        </p:sp>
+        <p:sp>
+          <p:nvSpPr>
+            <p:cNvPr id="16" name="Rectangle 15"/>
+            <p:cNvSpPr/>
+            <p:nvPr/>
+          </p:nvSpPr>
+          <p:spPr>
+            <a:xfrm>
+              <a:off x="4064000" y="6451600"/>
+              <a:ext cx="203200" cy="203200"/>
+            </a:xfrm>
+            <a:prstGeom prst="rect">
+              <a:avLst/>
+            </a:prstGeom>
+            <a:solidFill>
+              <a:srgbClr val="ED1C24"/>
+            </a:solidFill>
+            <a:ln>
+              <a:noFill/>
+            </a:ln>
+            <a:effectLst/>
+          </p:spPr>
+          <p:txBody>
+            <a:bodyPr rtlCol="0" anchor="ctr"/>
+            <a:lstStyle/>
+            <a:p>
+              <a:pPr algn="ctr"/>
+            </a:p>
+          </p:txBody>
+        </p:sp>
+        <p:sp>
+          <p:nvSpPr>
+            <p:cNvPr id="17" name="Rectangle 16"/>
+            <p:cNvSpPr/>
+            <p:nvPr/>
+          </p:nvSpPr>
+          <p:spPr>
+            <a:xfrm>
+              <a:off x="4470400" y="6451600"/>
+              <a:ext cx="203200" cy="203200"/>
+            </a:xfrm>
+            <a:prstGeom prst="rect">
+              <a:avLst/>
+            </a:prstGeom>
+            <a:solidFill>
+              <a:srgbClr val="ED1C24"/>
+            </a:solidFill>
+            <a:ln>
+              <a:noFill/>
+            </a:ln>
+            <a:effectLst/>
+          </p:spPr>
+          <p:txBody>
+            <a:bodyPr rtlCol="0" anchor="ctr"/>
+            <a:lstStyle/>
+            <a:p>
+              <a:pPr algn="ctr"/>
+            </a:p>
+          </p:txBody>
+        </p:sp>
+        <p:sp>
+          <p:nvSpPr>
+            <p:cNvPr id="18" name="Rectangle 17"/>
+            <p:cNvSpPr/>
+            <p:nvPr/>
+          </p:nvSpPr>
+          <p:spPr>
+            <a:xfrm>
+              <a:off x="4876800" y="6451600"/>
+              <a:ext cx="203200" cy="203200"/>
+            </a:xfrm>
+            <a:prstGeom prst="rect">
+              <a:avLst/>
+            </a:prstGeom>
+            <a:solidFill>
+              <a:srgbClr val="ED1C24"/>
+            </a:solidFill>
+            <a:ln>
+              <a:noFill/>
+            </a:ln>
+            <a:effectLst/>
+          </p:spPr>
+          <p:txBody>
+            <a:bodyPr rtlCol="0" anchor="ctr"/>
+            <a:lstStyle/>
+            <a:p>
+              <a:pPr algn="ctr"/>
+            </a:p>
+          </p:txBody>
+        </p:sp>
+        <p:sp>
+          <p:nvSpPr>
+            <p:cNvPr id="19" name="Rectangle 18"/>
+            <p:cNvSpPr/>
+            <p:nvPr/>
+          </p:nvSpPr>
+          <p:spPr>
+            <a:xfrm>
+              <a:off x="5283200" y="6451600"/>
+              <a:ext cx="203200" cy="203200"/>
+            </a:xfrm>
+            <a:prstGeom prst="rect">
+              <a:avLst/>
+            </a:prstGeom>
+            <a:solidFill>
+              <a:srgbClr val="ED1C24"/>
+            </a:solidFill>
+            <a:ln>
+              <a:noFill/>
+            </a:ln>
+            <a:effectLst/>
+          </p:spPr>
+          <p:txBody>
+            <a:bodyPr rtlCol="0" anchor="ctr"/>
+            <a:lstStyle/>
+            <a:p>
+              <a:pPr algn="ctr"/>
+            </a:p>
+          </p:txBody>
+        </p:sp>
+        <p:sp>
+          <p:nvSpPr>
+            <p:cNvPr id="20" name="Rectangle 19"/>
+            <p:cNvSpPr/>
+            <p:nvPr/>
+          </p:nvSpPr>
+          <p:spPr>
+            <a:xfrm>
+              <a:off x="5689600" y="6451600"/>
+              <a:ext cx="203200" cy="203200"/>
+            </a:xfrm>
+            <a:prstGeom prst="rect">
+              <a:avLst/>
+            </a:prstGeom>
+            <a:solidFill>
+              <a:srgbClr val="ED1C24"/>
+            </a:solidFill>
+            <a:ln>
+              <a:noFill/>
+            </a:ln>
+            <a:effectLst/>
+          </p:spPr>
+          <p:txBody>
+            <a:bodyPr rtlCol="0" anchor="ctr"/>
+            <a:lstStyle/>
+            <a:p>
+              <a:pPr algn="ctr"/>
+            </a:p>
+          </p:txBody>
+        </p:sp>
+        <p:sp>
+          <p:nvSpPr>
+            <p:cNvPr id="21" name="Rectangle 20"/>
+            <p:cNvSpPr/>
+            <p:nvPr/>
+          </p:nvSpPr>
+          <p:spPr>
+            <a:xfrm>
+              <a:off x="6096000" y="6451600"/>
+              <a:ext cx="203200" cy="203200"/>
+            </a:xfrm>
+            <a:prstGeom prst="rect">
+              <a:avLst/>
+            </a:prstGeom>
+            <a:solidFill>
+              <a:srgbClr val="ED1C24"/>
+            </a:solidFill>
+            <a:ln>
+              <a:noFill/>
+            </a:ln>
+            <a:effectLst/>
+          </p:spPr>
+          <p:txBody>
+            <a:bodyPr rtlCol="0" anchor="ctr"/>
+            <a:lstStyle/>
+            <a:p>
+              <a:pPr algn="ctr"/>
+            </a:p>
+          </p:txBody>
+        </p:sp>
+        <p:sp>
+          <p:nvSpPr>
+            <p:cNvPr id="22" name="Rectangle 21"/>
+            <p:cNvSpPr/>
+            <p:nvPr/>
+          </p:nvSpPr>
+          <p:spPr>
+            <a:xfrm>
+              <a:off x="6502400" y="6451600"/>
+              <a:ext cx="203200" cy="203200"/>
+            </a:xfrm>
+            <a:prstGeom prst="rect">
+              <a:avLst/>
+            </a:prstGeom>
+            <a:solidFill>
+              <a:srgbClr val="ED1C24"/>
+            </a:solidFill>
+            <a:ln>
+              <a:noFill/>
+            </a:ln>
+            <a:effectLst/>
+          </p:spPr>
+          <p:txBody>
+            <a:bodyPr rtlCol="0" anchor="ctr"/>
+            <a:lstStyle/>
+            <a:p>
+              <a:pPr algn="ctr"/>
+            </a:p>
+          </p:txBody>
+        </p:sp>
+        <p:sp>
+          <p:nvSpPr>
+            <p:cNvPr id="23" name="Rectangle 22"/>
+            <p:cNvSpPr/>
+            <p:nvPr/>
+          </p:nvSpPr>
+          <p:spPr>
+            <a:xfrm>
+              <a:off x="6908800" y="6451600"/>
+              <a:ext cx="203200" cy="203200"/>
+            </a:xfrm>
+            <a:prstGeom prst="rect">
+              <a:avLst/>
+            </a:prstGeom>
+            <a:solidFill>
+              <a:srgbClr val="ED1C24"/>
+            </a:solidFill>
+            <a:ln>
+              <a:noFill/>
+            </a:ln>
+            <a:effectLst/>
+          </p:spPr>
+          <p:txBody>
+            <a:bodyPr rtlCol="0" anchor="ctr"/>
+            <a:lstStyle/>
+            <a:p>
+              <a:pPr algn="ctr"/>
+            </a:p>
+          </p:txBody>
+        </p:sp>
+        <p:sp>
+          <p:nvSpPr>
+            <p:cNvPr id="24" name="Rectangle 23"/>
+            <p:cNvSpPr/>
+            <p:nvPr/>
+          </p:nvSpPr>
+          <p:spPr>
+            <a:xfrm>
+              <a:off x="7315200" y="6451600"/>
+              <a:ext cx="203200" cy="203200"/>
+            </a:xfrm>
+            <a:prstGeom prst="rect">
+              <a:avLst/>
+            </a:prstGeom>
+            <a:solidFill>
+              <a:srgbClr val="ED1C24"/>
+            </a:solidFill>
+            <a:ln>
+              <a:noFill/>
+            </a:ln>
+            <a:effectLst/>
+          </p:spPr>
+          <p:txBody>
+            <a:bodyPr rtlCol="0" anchor="ctr"/>
+            <a:lstStyle/>
+            <a:p>
+              <a:pPr algn="ctr"/>
+            </a:p>
+          </p:txBody>
+        </p:sp>
+        <p:sp>
+          <p:nvSpPr>
             <p:cNvPr id="25" name="Rectangle 24"/>
             <p:cNvSpPr/>
             <p:nvPr/>
           </p:nvSpPr>
           <p:spPr>
             <a:xfrm>
-              <a:off x="0" y="6451600"/>
+              <a:off x="7721600" y="6451600"/>
               <a:ext cx="203200" cy="203200"/>
             </a:xfrm>
             <a:prstGeom prst="rect">
@@ -5835,7 +5704,7 @@
           </p:nvSpPr>
           <p:spPr>
             <a:xfrm>
-              <a:off x="406400" y="6451600"/>
+              <a:off x="8128000" y="6451600"/>
               <a:ext cx="203200" cy="203200"/>
             </a:xfrm>
             <a:prstGeom prst="rect">
@@ -5865,7 +5734,7 @@
           </p:nvSpPr>
           <p:spPr>
             <a:xfrm>
-              <a:off x="812800" y="6451600"/>
+              <a:off x="8534400" y="6451600"/>
               <a:ext cx="203200" cy="203200"/>
             </a:xfrm>
             <a:prstGeom prst="rect">
@@ -5895,7 +5764,7 @@
           </p:nvSpPr>
           <p:spPr>
             <a:xfrm>
-              <a:off x="1219200" y="6451600"/>
+              <a:off x="8940800" y="6451600"/>
               <a:ext cx="203200" cy="203200"/>
             </a:xfrm>
             <a:prstGeom prst="rect">
@@ -5925,7 +5794,7 @@
           </p:nvSpPr>
           <p:spPr>
             <a:xfrm>
-              <a:off x="1625600" y="6451600"/>
+              <a:off x="9347200" y="6451600"/>
               <a:ext cx="203200" cy="203200"/>
             </a:xfrm>
             <a:prstGeom prst="rect">
@@ -5955,7 +5824,7 @@
           </p:nvSpPr>
           <p:spPr>
             <a:xfrm>
-              <a:off x="2032000" y="6451600"/>
+              <a:off x="9753600" y="6451600"/>
               <a:ext cx="203200" cy="203200"/>
             </a:xfrm>
             <a:prstGeom prst="rect">
@@ -5985,7 +5854,7 @@
           </p:nvSpPr>
           <p:spPr>
             <a:xfrm>
-              <a:off x="2438400" y="6451600"/>
+              <a:off x="10160000" y="6451600"/>
               <a:ext cx="203200" cy="203200"/>
             </a:xfrm>
             <a:prstGeom prst="rect">
@@ -6015,7 +5884,7 @@
           </p:nvSpPr>
           <p:spPr>
             <a:xfrm>
-              <a:off x="2844800" y="6451600"/>
+              <a:off x="10566400" y="6451600"/>
               <a:ext cx="203200" cy="203200"/>
             </a:xfrm>
             <a:prstGeom prst="rect">
@@ -6045,7 +5914,7 @@
           </p:nvSpPr>
           <p:spPr>
             <a:xfrm>
-              <a:off x="3251200" y="6451600"/>
+              <a:off x="10972800" y="6451600"/>
               <a:ext cx="203200" cy="203200"/>
             </a:xfrm>
             <a:prstGeom prst="rect">
@@ -6075,7 +5944,7 @@
           </p:nvSpPr>
           <p:spPr>
             <a:xfrm>
-              <a:off x="3657600" y="6451600"/>
+              <a:off x="11379200" y="6451600"/>
               <a:ext cx="203200" cy="203200"/>
             </a:xfrm>
             <a:prstGeom prst="rect">
@@ -6105,7 +5974,7 @@
           </p:nvSpPr>
           <p:spPr>
             <a:xfrm>
-              <a:off x="4064000" y="6451600"/>
+              <a:off x="11785600" y="6451600"/>
               <a:ext cx="203200" cy="203200"/>
             </a:xfrm>
             <a:prstGeom prst="rect">
@@ -6135,7 +6004,7 @@
           </p:nvSpPr>
           <p:spPr>
             <a:xfrm>
-              <a:off x="4470400" y="6451600"/>
+              <a:off x="203200" y="6654800"/>
               <a:ext cx="203200" cy="203200"/>
             </a:xfrm>
             <a:prstGeom prst="rect">
@@ -6165,7 +6034,7 @@
           </p:nvSpPr>
           <p:spPr>
             <a:xfrm>
-              <a:off x="4876800" y="6451600"/>
+              <a:off x="609600" y="6654800"/>
               <a:ext cx="203200" cy="203200"/>
             </a:xfrm>
             <a:prstGeom prst="rect">
@@ -6195,7 +6064,7 @@
           </p:nvSpPr>
           <p:spPr>
             <a:xfrm>
-              <a:off x="5283200" y="6451600"/>
+              <a:off x="1016000" y="6654800"/>
               <a:ext cx="203200" cy="203200"/>
             </a:xfrm>
             <a:prstGeom prst="rect">
@@ -6225,7 +6094,7 @@
           </p:nvSpPr>
           <p:spPr>
             <a:xfrm>
-              <a:off x="5689600" y="6451600"/>
+              <a:off x="1422400" y="6654800"/>
               <a:ext cx="203200" cy="203200"/>
             </a:xfrm>
             <a:prstGeom prst="rect">
@@ -6255,7 +6124,7 @@
           </p:nvSpPr>
           <p:spPr>
             <a:xfrm>
-              <a:off x="6096000" y="6451600"/>
+              <a:off x="1828800" y="6654800"/>
               <a:ext cx="203200" cy="203200"/>
             </a:xfrm>
             <a:prstGeom prst="rect">
@@ -6285,7 +6154,7 @@
           </p:nvSpPr>
           <p:spPr>
             <a:xfrm>
-              <a:off x="6502400" y="6451600"/>
+              <a:off x="2235200" y="6654800"/>
               <a:ext cx="203200" cy="203200"/>
             </a:xfrm>
             <a:prstGeom prst="rect">
@@ -6315,7 +6184,7 @@
           </p:nvSpPr>
           <p:spPr>
             <a:xfrm>
-              <a:off x="6908800" y="6451600"/>
+              <a:off x="2641600" y="6654800"/>
               <a:ext cx="203200" cy="203200"/>
             </a:xfrm>
             <a:prstGeom prst="rect">
@@ -6345,7 +6214,7 @@
           </p:nvSpPr>
           <p:spPr>
             <a:xfrm>
-              <a:off x="7315200" y="6451600"/>
+              <a:off x="3048000" y="6654800"/>
               <a:ext cx="203200" cy="203200"/>
             </a:xfrm>
             <a:prstGeom prst="rect">
@@ -6375,7 +6244,7 @@
           </p:nvSpPr>
           <p:spPr>
             <a:xfrm>
-              <a:off x="7721600" y="6451600"/>
+              <a:off x="3454400" y="6654800"/>
               <a:ext cx="203200" cy="203200"/>
             </a:xfrm>
             <a:prstGeom prst="rect">
@@ -6405,7 +6274,7 @@
           </p:nvSpPr>
           <p:spPr>
             <a:xfrm>
-              <a:off x="8128000" y="6451600"/>
+              <a:off x="3860800" y="6654800"/>
               <a:ext cx="203200" cy="203200"/>
             </a:xfrm>
             <a:prstGeom prst="rect">
@@ -6435,7 +6304,7 @@
           </p:nvSpPr>
           <p:spPr>
             <a:xfrm>
-              <a:off x="8534400" y="6451600"/>
+              <a:off x="4267200" y="6654800"/>
               <a:ext cx="203200" cy="203200"/>
             </a:xfrm>
             <a:prstGeom prst="rect">
@@ -6465,7 +6334,7 @@
           </p:nvSpPr>
           <p:spPr>
             <a:xfrm>
-              <a:off x="8940800" y="6451600"/>
+              <a:off x="4673600" y="6654800"/>
               <a:ext cx="203200" cy="203200"/>
             </a:xfrm>
             <a:prstGeom prst="rect">
@@ -6495,7 +6364,7 @@
           </p:nvSpPr>
           <p:spPr>
             <a:xfrm>
-              <a:off x="9347200" y="6451600"/>
+              <a:off x="5080000" y="6654800"/>
               <a:ext cx="203200" cy="203200"/>
             </a:xfrm>
             <a:prstGeom prst="rect">
@@ -6525,7 +6394,7 @@
           </p:nvSpPr>
           <p:spPr>
             <a:xfrm>
-              <a:off x="9753600" y="6451600"/>
+              <a:off x="5486400" y="6654800"/>
               <a:ext cx="203200" cy="203200"/>
             </a:xfrm>
             <a:prstGeom prst="rect">
@@ -6555,7 +6424,7 @@
           </p:nvSpPr>
           <p:spPr>
             <a:xfrm>
-              <a:off x="10160000" y="6451600"/>
+              <a:off x="5892800" y="6654800"/>
               <a:ext cx="203200" cy="203200"/>
             </a:xfrm>
             <a:prstGeom prst="rect">
@@ -6585,7 +6454,7 @@
           </p:nvSpPr>
           <p:spPr>
             <a:xfrm>
-              <a:off x="10566400" y="6451600"/>
+              <a:off x="6299200" y="6654800"/>
               <a:ext cx="203200" cy="203200"/>
             </a:xfrm>
             <a:prstGeom prst="rect">
@@ -6615,7 +6484,7 @@
           </p:nvSpPr>
           <p:spPr>
             <a:xfrm>
-              <a:off x="10972800" y="6451600"/>
+              <a:off x="6705600" y="6654800"/>
               <a:ext cx="203200" cy="203200"/>
             </a:xfrm>
             <a:prstGeom prst="rect">
@@ -6645,7 +6514,7 @@
           </p:nvSpPr>
           <p:spPr>
             <a:xfrm>
-              <a:off x="11379200" y="6451600"/>
+              <a:off x="7112000" y="6654800"/>
               <a:ext cx="203200" cy="203200"/>
             </a:xfrm>
             <a:prstGeom prst="rect">
@@ -6675,7 +6544,7 @@
           </p:nvSpPr>
           <p:spPr>
             <a:xfrm>
-              <a:off x="11785600" y="6451600"/>
+              <a:off x="7518400" y="6654800"/>
               <a:ext cx="203200" cy="203200"/>
             </a:xfrm>
             <a:prstGeom prst="rect">
@@ -6705,7 +6574,7 @@
           </p:nvSpPr>
           <p:spPr>
             <a:xfrm>
-              <a:off x="203200" y="6654800"/>
+              <a:off x="7924800" y="6654800"/>
               <a:ext cx="203200" cy="203200"/>
             </a:xfrm>
             <a:prstGeom prst="rect">
@@ -6735,7 +6604,7 @@
           </p:nvSpPr>
           <p:spPr>
             <a:xfrm>
-              <a:off x="609600" y="6654800"/>
+              <a:off x="8331200" y="6654800"/>
               <a:ext cx="203200" cy="203200"/>
             </a:xfrm>
             <a:prstGeom prst="rect">
@@ -6765,7 +6634,7 @@
           </p:nvSpPr>
           <p:spPr>
             <a:xfrm>
-              <a:off x="1016000" y="6654800"/>
+              <a:off x="8737600" y="6654800"/>
               <a:ext cx="203200" cy="203200"/>
             </a:xfrm>
             <a:prstGeom prst="rect">
@@ -6795,7 +6664,7 @@
           </p:nvSpPr>
           <p:spPr>
             <a:xfrm>
-              <a:off x="1422400" y="6654800"/>
+              <a:off x="9144000" y="6654800"/>
               <a:ext cx="203200" cy="203200"/>
             </a:xfrm>
             <a:prstGeom prst="rect">
@@ -6825,7 +6694,7 @@
           </p:nvSpPr>
           <p:spPr>
             <a:xfrm>
-              <a:off x="1828800" y="6654800"/>
+              <a:off x="9550400" y="6654800"/>
               <a:ext cx="203200" cy="203200"/>
             </a:xfrm>
             <a:prstGeom prst="rect">
@@ -6855,7 +6724,7 @@
           </p:nvSpPr>
           <p:spPr>
             <a:xfrm>
-              <a:off x="2235200" y="6654800"/>
+              <a:off x="9956800" y="6654800"/>
               <a:ext cx="203200" cy="203200"/>
             </a:xfrm>
             <a:prstGeom prst="rect">
@@ -6885,7 +6754,7 @@
           </p:nvSpPr>
           <p:spPr>
             <a:xfrm>
-              <a:off x="2641600" y="6654800"/>
+              <a:off x="10363200" y="6654800"/>
               <a:ext cx="203200" cy="203200"/>
             </a:xfrm>
             <a:prstGeom prst="rect">
@@ -6915,7 +6784,7 @@
           </p:nvSpPr>
           <p:spPr>
             <a:xfrm>
-              <a:off x="3048000" y="6654800"/>
+              <a:off x="10769600" y="6654800"/>
               <a:ext cx="203200" cy="203200"/>
             </a:xfrm>
             <a:prstGeom prst="rect">
@@ -6945,7 +6814,7 @@
           </p:nvSpPr>
           <p:spPr>
             <a:xfrm>
-              <a:off x="3454400" y="6654800"/>
+              <a:off x="11176000" y="6654800"/>
               <a:ext cx="203200" cy="203200"/>
             </a:xfrm>
             <a:prstGeom prst="rect">
@@ -6975,7 +6844,7 @@
           </p:nvSpPr>
           <p:spPr>
             <a:xfrm>
-              <a:off x="3860800" y="6654800"/>
+              <a:off x="11582400" y="6654800"/>
               <a:ext cx="203200" cy="203200"/>
             </a:xfrm>
             <a:prstGeom prst="rect">
@@ -7000,576 +6869,6 @@
         <p:sp>
           <p:nvSpPr>
             <p:cNvPr id="65" name="Rectangle 64"/>
-            <p:cNvSpPr/>
-            <p:nvPr/>
-          </p:nvSpPr>
-          <p:spPr>
-            <a:xfrm>
-              <a:off x="4267200" y="6654800"/>
-              <a:ext cx="203200" cy="203200"/>
-            </a:xfrm>
-            <a:prstGeom prst="rect">
-              <a:avLst/>
-            </a:prstGeom>
-            <a:solidFill>
-              <a:srgbClr val="ED1C24"/>
-            </a:solidFill>
-            <a:ln>
-              <a:noFill/>
-            </a:ln>
-            <a:effectLst/>
-          </p:spPr>
-          <p:txBody>
-            <a:bodyPr rtlCol="0" anchor="ctr"/>
-            <a:lstStyle/>
-            <a:p>
-              <a:pPr algn="ctr"/>
-            </a:p>
-          </p:txBody>
-        </p:sp>
-        <p:sp>
-          <p:nvSpPr>
-            <p:cNvPr id="66" name="Rectangle 65"/>
-            <p:cNvSpPr/>
-            <p:nvPr/>
-          </p:nvSpPr>
-          <p:spPr>
-            <a:xfrm>
-              <a:off x="4673600" y="6654800"/>
-              <a:ext cx="203200" cy="203200"/>
-            </a:xfrm>
-            <a:prstGeom prst="rect">
-              <a:avLst/>
-            </a:prstGeom>
-            <a:solidFill>
-              <a:srgbClr val="ED1C24"/>
-            </a:solidFill>
-            <a:ln>
-              <a:noFill/>
-            </a:ln>
-            <a:effectLst/>
-          </p:spPr>
-          <p:txBody>
-            <a:bodyPr rtlCol="0" anchor="ctr"/>
-            <a:lstStyle/>
-            <a:p>
-              <a:pPr algn="ctr"/>
-            </a:p>
-          </p:txBody>
-        </p:sp>
-        <p:sp>
-          <p:nvSpPr>
-            <p:cNvPr id="67" name="Rectangle 66"/>
-            <p:cNvSpPr/>
-            <p:nvPr/>
-          </p:nvSpPr>
-          <p:spPr>
-            <a:xfrm>
-              <a:off x="5080000" y="6654800"/>
-              <a:ext cx="203200" cy="203200"/>
-            </a:xfrm>
-            <a:prstGeom prst="rect">
-              <a:avLst/>
-            </a:prstGeom>
-            <a:solidFill>
-              <a:srgbClr val="ED1C24"/>
-            </a:solidFill>
-            <a:ln>
-              <a:noFill/>
-            </a:ln>
-            <a:effectLst/>
-          </p:spPr>
-          <p:txBody>
-            <a:bodyPr rtlCol="0" anchor="ctr"/>
-            <a:lstStyle/>
-            <a:p>
-              <a:pPr algn="ctr"/>
-            </a:p>
-          </p:txBody>
-        </p:sp>
-        <p:sp>
-          <p:nvSpPr>
-            <p:cNvPr id="68" name="Rectangle 67"/>
-            <p:cNvSpPr/>
-            <p:nvPr/>
-          </p:nvSpPr>
-          <p:spPr>
-            <a:xfrm>
-              <a:off x="5486400" y="6654800"/>
-              <a:ext cx="203200" cy="203200"/>
-            </a:xfrm>
-            <a:prstGeom prst="rect">
-              <a:avLst/>
-            </a:prstGeom>
-            <a:solidFill>
-              <a:srgbClr val="ED1C24"/>
-            </a:solidFill>
-            <a:ln>
-              <a:noFill/>
-            </a:ln>
-            <a:effectLst/>
-          </p:spPr>
-          <p:txBody>
-            <a:bodyPr rtlCol="0" anchor="ctr"/>
-            <a:lstStyle/>
-            <a:p>
-              <a:pPr algn="ctr"/>
-            </a:p>
-          </p:txBody>
-        </p:sp>
-        <p:sp>
-          <p:nvSpPr>
-            <p:cNvPr id="69" name="Rectangle 68"/>
-            <p:cNvSpPr/>
-            <p:nvPr/>
-          </p:nvSpPr>
-          <p:spPr>
-            <a:xfrm>
-              <a:off x="5892800" y="6654800"/>
-              <a:ext cx="203200" cy="203200"/>
-            </a:xfrm>
-            <a:prstGeom prst="rect">
-              <a:avLst/>
-            </a:prstGeom>
-            <a:solidFill>
-              <a:srgbClr val="ED1C24"/>
-            </a:solidFill>
-            <a:ln>
-              <a:noFill/>
-            </a:ln>
-            <a:effectLst/>
-          </p:spPr>
-          <p:txBody>
-            <a:bodyPr rtlCol="0" anchor="ctr"/>
-            <a:lstStyle/>
-            <a:p>
-              <a:pPr algn="ctr"/>
-            </a:p>
-          </p:txBody>
-        </p:sp>
-        <p:sp>
-          <p:nvSpPr>
-            <p:cNvPr id="70" name="Rectangle 69"/>
-            <p:cNvSpPr/>
-            <p:nvPr/>
-          </p:nvSpPr>
-          <p:spPr>
-            <a:xfrm>
-              <a:off x="6299200" y="6654800"/>
-              <a:ext cx="203200" cy="203200"/>
-            </a:xfrm>
-            <a:prstGeom prst="rect">
-              <a:avLst/>
-            </a:prstGeom>
-            <a:solidFill>
-              <a:srgbClr val="ED1C24"/>
-            </a:solidFill>
-            <a:ln>
-              <a:noFill/>
-            </a:ln>
-            <a:effectLst/>
-          </p:spPr>
-          <p:txBody>
-            <a:bodyPr rtlCol="0" anchor="ctr"/>
-            <a:lstStyle/>
-            <a:p>
-              <a:pPr algn="ctr"/>
-            </a:p>
-          </p:txBody>
-        </p:sp>
-        <p:sp>
-          <p:nvSpPr>
-            <p:cNvPr id="71" name="Rectangle 70"/>
-            <p:cNvSpPr/>
-            <p:nvPr/>
-          </p:nvSpPr>
-          <p:spPr>
-            <a:xfrm>
-              <a:off x="6705600" y="6654800"/>
-              <a:ext cx="203200" cy="203200"/>
-            </a:xfrm>
-            <a:prstGeom prst="rect">
-              <a:avLst/>
-            </a:prstGeom>
-            <a:solidFill>
-              <a:srgbClr val="ED1C24"/>
-            </a:solidFill>
-            <a:ln>
-              <a:noFill/>
-            </a:ln>
-            <a:effectLst/>
-          </p:spPr>
-          <p:txBody>
-            <a:bodyPr rtlCol="0" anchor="ctr"/>
-            <a:lstStyle/>
-            <a:p>
-              <a:pPr algn="ctr"/>
-            </a:p>
-          </p:txBody>
-        </p:sp>
-        <p:sp>
-          <p:nvSpPr>
-            <p:cNvPr id="72" name="Rectangle 71"/>
-            <p:cNvSpPr/>
-            <p:nvPr/>
-          </p:nvSpPr>
-          <p:spPr>
-            <a:xfrm>
-              <a:off x="7112000" y="6654800"/>
-              <a:ext cx="203200" cy="203200"/>
-            </a:xfrm>
-            <a:prstGeom prst="rect">
-              <a:avLst/>
-            </a:prstGeom>
-            <a:solidFill>
-              <a:srgbClr val="ED1C24"/>
-            </a:solidFill>
-            <a:ln>
-              <a:noFill/>
-            </a:ln>
-            <a:effectLst/>
-          </p:spPr>
-          <p:txBody>
-            <a:bodyPr rtlCol="0" anchor="ctr"/>
-            <a:lstStyle/>
-            <a:p>
-              <a:pPr algn="ctr"/>
-            </a:p>
-          </p:txBody>
-        </p:sp>
-        <p:sp>
-          <p:nvSpPr>
-            <p:cNvPr id="73" name="Rectangle 72"/>
-            <p:cNvSpPr/>
-            <p:nvPr/>
-          </p:nvSpPr>
-          <p:spPr>
-            <a:xfrm>
-              <a:off x="7518400" y="6654800"/>
-              <a:ext cx="203200" cy="203200"/>
-            </a:xfrm>
-            <a:prstGeom prst="rect">
-              <a:avLst/>
-            </a:prstGeom>
-            <a:solidFill>
-              <a:srgbClr val="ED1C24"/>
-            </a:solidFill>
-            <a:ln>
-              <a:noFill/>
-            </a:ln>
-            <a:effectLst/>
-          </p:spPr>
-          <p:txBody>
-            <a:bodyPr rtlCol="0" anchor="ctr"/>
-            <a:lstStyle/>
-            <a:p>
-              <a:pPr algn="ctr"/>
-            </a:p>
-          </p:txBody>
-        </p:sp>
-        <p:sp>
-          <p:nvSpPr>
-            <p:cNvPr id="74" name="Rectangle 73"/>
-            <p:cNvSpPr/>
-            <p:nvPr/>
-          </p:nvSpPr>
-          <p:spPr>
-            <a:xfrm>
-              <a:off x="7924800" y="6654800"/>
-              <a:ext cx="203200" cy="203200"/>
-            </a:xfrm>
-            <a:prstGeom prst="rect">
-              <a:avLst/>
-            </a:prstGeom>
-            <a:solidFill>
-              <a:srgbClr val="ED1C24"/>
-            </a:solidFill>
-            <a:ln>
-              <a:noFill/>
-            </a:ln>
-            <a:effectLst/>
-          </p:spPr>
-          <p:txBody>
-            <a:bodyPr rtlCol="0" anchor="ctr"/>
-            <a:lstStyle/>
-            <a:p>
-              <a:pPr algn="ctr"/>
-            </a:p>
-          </p:txBody>
-        </p:sp>
-        <p:sp>
-          <p:nvSpPr>
-            <p:cNvPr id="75" name="Rectangle 74"/>
-            <p:cNvSpPr/>
-            <p:nvPr/>
-          </p:nvSpPr>
-          <p:spPr>
-            <a:xfrm>
-              <a:off x="8331200" y="6654800"/>
-              <a:ext cx="203200" cy="203200"/>
-            </a:xfrm>
-            <a:prstGeom prst="rect">
-              <a:avLst/>
-            </a:prstGeom>
-            <a:solidFill>
-              <a:srgbClr val="ED1C24"/>
-            </a:solidFill>
-            <a:ln>
-              <a:noFill/>
-            </a:ln>
-            <a:effectLst/>
-          </p:spPr>
-          <p:txBody>
-            <a:bodyPr rtlCol="0" anchor="ctr"/>
-            <a:lstStyle/>
-            <a:p>
-              <a:pPr algn="ctr"/>
-            </a:p>
-          </p:txBody>
-        </p:sp>
-        <p:sp>
-          <p:nvSpPr>
-            <p:cNvPr id="76" name="Rectangle 75"/>
-            <p:cNvSpPr/>
-            <p:nvPr/>
-          </p:nvSpPr>
-          <p:spPr>
-            <a:xfrm>
-              <a:off x="8737600" y="6654800"/>
-              <a:ext cx="203200" cy="203200"/>
-            </a:xfrm>
-            <a:prstGeom prst="rect">
-              <a:avLst/>
-            </a:prstGeom>
-            <a:solidFill>
-              <a:srgbClr val="ED1C24"/>
-            </a:solidFill>
-            <a:ln>
-              <a:noFill/>
-            </a:ln>
-            <a:effectLst/>
-          </p:spPr>
-          <p:txBody>
-            <a:bodyPr rtlCol="0" anchor="ctr"/>
-            <a:lstStyle/>
-            <a:p>
-              <a:pPr algn="ctr"/>
-            </a:p>
-          </p:txBody>
-        </p:sp>
-        <p:sp>
-          <p:nvSpPr>
-            <p:cNvPr id="77" name="Rectangle 76"/>
-            <p:cNvSpPr/>
-            <p:nvPr/>
-          </p:nvSpPr>
-          <p:spPr>
-            <a:xfrm>
-              <a:off x="9144000" y="6654800"/>
-              <a:ext cx="203200" cy="203200"/>
-            </a:xfrm>
-            <a:prstGeom prst="rect">
-              <a:avLst/>
-            </a:prstGeom>
-            <a:solidFill>
-              <a:srgbClr val="ED1C24"/>
-            </a:solidFill>
-            <a:ln>
-              <a:noFill/>
-            </a:ln>
-            <a:effectLst/>
-          </p:spPr>
-          <p:txBody>
-            <a:bodyPr rtlCol="0" anchor="ctr"/>
-            <a:lstStyle/>
-            <a:p>
-              <a:pPr algn="ctr"/>
-            </a:p>
-          </p:txBody>
-        </p:sp>
-        <p:sp>
-          <p:nvSpPr>
-            <p:cNvPr id="78" name="Rectangle 77"/>
-            <p:cNvSpPr/>
-            <p:nvPr/>
-          </p:nvSpPr>
-          <p:spPr>
-            <a:xfrm>
-              <a:off x="9550400" y="6654800"/>
-              <a:ext cx="203200" cy="203200"/>
-            </a:xfrm>
-            <a:prstGeom prst="rect">
-              <a:avLst/>
-            </a:prstGeom>
-            <a:solidFill>
-              <a:srgbClr val="ED1C24"/>
-            </a:solidFill>
-            <a:ln>
-              <a:noFill/>
-            </a:ln>
-            <a:effectLst/>
-          </p:spPr>
-          <p:txBody>
-            <a:bodyPr rtlCol="0" anchor="ctr"/>
-            <a:lstStyle/>
-            <a:p>
-              <a:pPr algn="ctr"/>
-            </a:p>
-          </p:txBody>
-        </p:sp>
-        <p:sp>
-          <p:nvSpPr>
-            <p:cNvPr id="79" name="Rectangle 78"/>
-            <p:cNvSpPr/>
-            <p:nvPr/>
-          </p:nvSpPr>
-          <p:spPr>
-            <a:xfrm>
-              <a:off x="9956800" y="6654800"/>
-              <a:ext cx="203200" cy="203200"/>
-            </a:xfrm>
-            <a:prstGeom prst="rect">
-              <a:avLst/>
-            </a:prstGeom>
-            <a:solidFill>
-              <a:srgbClr val="ED1C24"/>
-            </a:solidFill>
-            <a:ln>
-              <a:noFill/>
-            </a:ln>
-            <a:effectLst/>
-          </p:spPr>
-          <p:txBody>
-            <a:bodyPr rtlCol="0" anchor="ctr"/>
-            <a:lstStyle/>
-            <a:p>
-              <a:pPr algn="ctr"/>
-            </a:p>
-          </p:txBody>
-        </p:sp>
-        <p:sp>
-          <p:nvSpPr>
-            <p:cNvPr id="80" name="Rectangle 79"/>
-            <p:cNvSpPr/>
-            <p:nvPr/>
-          </p:nvSpPr>
-          <p:spPr>
-            <a:xfrm>
-              <a:off x="10363200" y="6654800"/>
-              <a:ext cx="203200" cy="203200"/>
-            </a:xfrm>
-            <a:prstGeom prst="rect">
-              <a:avLst/>
-            </a:prstGeom>
-            <a:solidFill>
-              <a:srgbClr val="ED1C24"/>
-            </a:solidFill>
-            <a:ln>
-              <a:noFill/>
-            </a:ln>
-            <a:effectLst/>
-          </p:spPr>
-          <p:txBody>
-            <a:bodyPr rtlCol="0" anchor="ctr"/>
-            <a:lstStyle/>
-            <a:p>
-              <a:pPr algn="ctr"/>
-            </a:p>
-          </p:txBody>
-        </p:sp>
-        <p:sp>
-          <p:nvSpPr>
-            <p:cNvPr id="81" name="Rectangle 80"/>
-            <p:cNvSpPr/>
-            <p:nvPr/>
-          </p:nvSpPr>
-          <p:spPr>
-            <a:xfrm>
-              <a:off x="10769600" y="6654800"/>
-              <a:ext cx="203200" cy="203200"/>
-            </a:xfrm>
-            <a:prstGeom prst="rect">
-              <a:avLst/>
-            </a:prstGeom>
-            <a:solidFill>
-              <a:srgbClr val="ED1C24"/>
-            </a:solidFill>
-            <a:ln>
-              <a:noFill/>
-            </a:ln>
-            <a:effectLst/>
-          </p:spPr>
-          <p:txBody>
-            <a:bodyPr rtlCol="0" anchor="ctr"/>
-            <a:lstStyle/>
-            <a:p>
-              <a:pPr algn="ctr"/>
-            </a:p>
-          </p:txBody>
-        </p:sp>
-        <p:sp>
-          <p:nvSpPr>
-            <p:cNvPr id="82" name="Rectangle 81"/>
-            <p:cNvSpPr/>
-            <p:nvPr/>
-          </p:nvSpPr>
-          <p:spPr>
-            <a:xfrm>
-              <a:off x="11176000" y="6654800"/>
-              <a:ext cx="203200" cy="203200"/>
-            </a:xfrm>
-            <a:prstGeom prst="rect">
-              <a:avLst/>
-            </a:prstGeom>
-            <a:solidFill>
-              <a:srgbClr val="ED1C24"/>
-            </a:solidFill>
-            <a:ln>
-              <a:noFill/>
-            </a:ln>
-            <a:effectLst/>
-          </p:spPr>
-          <p:txBody>
-            <a:bodyPr rtlCol="0" anchor="ctr"/>
-            <a:lstStyle/>
-            <a:p>
-              <a:pPr algn="ctr"/>
-            </a:p>
-          </p:txBody>
-        </p:sp>
-        <p:sp>
-          <p:nvSpPr>
-            <p:cNvPr id="83" name="Rectangle 82"/>
-            <p:cNvSpPr/>
-            <p:nvPr/>
-          </p:nvSpPr>
-          <p:spPr>
-            <a:xfrm>
-              <a:off x="11582400" y="6654800"/>
-              <a:ext cx="203200" cy="203200"/>
-            </a:xfrm>
-            <a:prstGeom prst="rect">
-              <a:avLst/>
-            </a:prstGeom>
-            <a:solidFill>
-              <a:srgbClr val="ED1C24"/>
-            </a:solidFill>
-            <a:ln>
-              <a:noFill/>
-            </a:ln>
-            <a:effectLst/>
-          </p:spPr>
-          <p:txBody>
-            <a:bodyPr rtlCol="0" anchor="ctr"/>
-            <a:lstStyle/>
-            <a:p>
-              <a:pPr algn="ctr"/>
-            </a:p>
-          </p:txBody>
-        </p:sp>
-        <p:sp>
-          <p:nvSpPr>
-            <p:cNvPr id="84" name="Rectangle 83"/>
             <p:cNvSpPr/>
             <p:nvPr/>
           </p:nvSpPr>
@@ -7624,64 +6923,9 @@
         <p:nvPr/>
       </p:nvGrpSpPr>
       <p:grpSpPr/>
-      <p:sp>
-        <p:nvSpPr>
-          <p:cNvPr id="2" name="Title 1"/>
-          <p:cNvSpPr>
-            <a:spLocks noGrp="1"/>
-          </p:cNvSpPr>
-          <p:nvPr>
-            <p:ph type="title"/>
-          </p:nvPr>
-        </p:nvSpPr>
-        <p:spPr>
-          <a:xfrm>
-            <a:off x="548640" y="566928"/>
-            <a:ext cx="5760720" cy="1371600"/>
-          </a:xfrm>
-        </p:spPr>
-        <p:txBody>
-          <a:bodyPr anchor="t" wrap="square" lIns="0" rIns="0" tIns="0" bIns="0">
-            <a:noAutofit/>
-          </a:bodyPr>
-          <a:lstStyle/>
-          <a:p>
-            <a:pPr algn="l">
-              <a:lnSpc>
-                <a:spcPct val="92000"/>
-              </a:lnSpc>
-            </a:pPr>
-            <a:r>
-              <a:rPr sz="4400" b="1">
-                <a:solidFill>
-                  <a:srgbClr val="000000"/>
-                </a:solidFill>
-                <a:latin typeface="Arial"/>
-              </a:rPr>
-              <a:t>Mass Customization</a:t>
-            </a:r>
-          </a:p>
-          <a:p>
-            <a:pPr algn="l">
-              <a:lnSpc>
-                <a:spcPct val="92000"/>
-              </a:lnSpc>
-            </a:pPr>
-            <a:r>
-              <a:rPr sz="4400" b="1">
-                <a:solidFill>
-                  <a:srgbClr val="ED1C24"/>
-                </a:solidFill>
-                <a:latin typeface="Arial"/>
-              </a:rPr>
-              <a:t>&amp; Brand Experience</a:t>
-            </a:r>
-          </a:p>
-        </p:txBody>
-      </p:sp>
       <p:pic>
         <p:nvPicPr>
-          <p:cNvPr id="3" name="Photo free_peanuts" descr="A box of free in-shell peanuts at a Five Guys restaurant"/>
+          <p:cNvPr id="2" name="Photo toppings_burger" descr="Five Guys burger stacked with toppings"/>
           <p:cNvPicPr>
             <a:picLocks noChangeAspect="1"/>
           </p:cNvPicPr>
@@ -7689,56 +6933,26 @@
         </p:nvPicPr>
         <p:blipFill>
           <a:blip r:embed="rId2"/>
-          <a:srcRect t="19925" b="9925"/>
+          <a:srcRect l="3368" r="3368"/>
           <a:stretch>
             <a:fillRect/>
           </a:stretch>
         </p:blipFill>
         <p:spPr>
           <a:xfrm>
-            <a:off x="6675120" y="0"/>
-            <a:ext cx="5516880" cy="3154680"/>
+            <a:off x="457200" y="411480"/>
+            <a:ext cx="5547360" cy="5674360"/>
           </a:xfrm>
-          <a:prstGeom prst="rect">
-            <a:avLst/>
+          <a:prstGeom prst="roundRect">
+            <a:avLst>
+              <a:gd name="adj" fmla="val 2307"/>
+            </a:avLst>
           </a:prstGeom>
         </p:spPr>
       </p:pic>
-      <p:sp>
-        <p:nvSpPr>
-          <p:cNvPr id="4" name="Stat Free Toppings"/>
-          <p:cNvSpPr/>
-          <p:nvPr/>
-        </p:nvSpPr>
-        <p:spPr>
-          <a:xfrm>
-            <a:off x="548640" y="3474720"/>
-            <a:ext cx="2743200" cy="2651760"/>
-          </a:xfrm>
-          <a:prstGeom prst="roundRect">
-            <a:avLst>
-              <a:gd name="adj" fmla="val 5172"/>
-            </a:avLst>
-          </a:prstGeom>
-          <a:solidFill>
-            <a:srgbClr val="F2F2F2"/>
-          </a:solidFill>
-          <a:ln>
-            <a:noFill/>
-          </a:ln>
-          <a:effectLst/>
-        </p:spPr>
-        <p:txBody>
-          <a:bodyPr rtlCol="0" anchor="ctr"/>
-          <a:lstStyle/>
-          <a:p>
-            <a:pPr algn="ctr"/>
-          </a:p>
-        </p:txBody>
-      </p:sp>
       <p:pic>
         <p:nvPicPr>
-          <p:cNvPr id="5" name="Icon burger" descr="burger icon"/>
+          <p:cNvPr id="3" name="Photo free_peanuts" descr="A box of free in-shell peanuts at a Five Guys"/>
           <p:cNvPicPr>
             <a:picLocks noChangeAspect="1"/>
           </p:cNvPicPr>
@@ -7746,386 +6960,26 @@
         </p:nvPicPr>
         <p:blipFill>
           <a:blip r:embed="rId3"/>
+          <a:srcRect l="5155" r="15155"/>
           <a:stretch>
             <a:fillRect/>
           </a:stretch>
         </p:blipFill>
         <p:spPr>
           <a:xfrm>
-            <a:off x="822960" y="3794760"/>
-            <a:ext cx="502920" cy="502920"/>
+            <a:off x="6187440" y="411480"/>
+            <a:ext cx="5547360" cy="5674360"/>
           </a:xfrm>
-          <a:prstGeom prst="rect">
-            <a:avLst/>
+          <a:prstGeom prst="roundRect">
+            <a:avLst>
+              <a:gd name="adj" fmla="val 2307"/>
+            </a:avLst>
           </a:prstGeom>
         </p:spPr>
       </p:pic>
-      <p:sp>
-        <p:nvSpPr>
-          <p:cNvPr id="6" name="TextBox 5"/>
-          <p:cNvSpPr txBox="1"/>
-          <p:nvPr/>
-        </p:nvSpPr>
-        <p:spPr>
-          <a:xfrm>
-            <a:off x="795528" y="4370832"/>
-            <a:ext cx="2377440" cy="1051560"/>
-          </a:xfrm>
-          <a:prstGeom prst="rect">
-            <a:avLst/>
-          </a:prstGeom>
-          <a:noFill/>
-        </p:spPr>
-        <p:txBody>
-          <a:bodyPr wrap="square" anchor="t" lIns="0" rIns="0" tIns="0" bIns="0">
-            <a:noAutofit/>
-          </a:bodyPr>
-          <a:lstStyle/>
-          <a:p>
-            <a:pPr algn="l"/>
-            <a:r>
-              <a:rPr sz="7200" b="1">
-                <a:solidFill>
-                  <a:srgbClr val="ED1C24"/>
-                </a:solidFill>
-                <a:latin typeface="Arial"/>
-              </a:rPr>
-              <a:t>15</a:t>
-            </a:r>
-          </a:p>
-        </p:txBody>
-      </p:sp>
-      <p:sp>
-        <p:nvSpPr>
-          <p:cNvPr id="7" name="TextBox 6"/>
-          <p:cNvSpPr txBox="1"/>
-          <p:nvPr/>
-        </p:nvSpPr>
-        <p:spPr>
-          <a:xfrm>
-            <a:off x="822960" y="5486400"/>
-            <a:ext cx="2377440" cy="411480"/>
-          </a:xfrm>
-          <a:prstGeom prst="rect">
-            <a:avLst/>
-          </a:prstGeom>
-          <a:noFill/>
-        </p:spPr>
-        <p:txBody>
-          <a:bodyPr wrap="square" anchor="t" lIns="0" rIns="0" tIns="0" bIns="0">
-            <a:noAutofit/>
-          </a:bodyPr>
-          <a:lstStyle/>
-          <a:p>
-            <a:pPr algn="l"/>
-            <a:r>
-              <a:rPr sz="2400" b="1">
-                <a:solidFill>
-                  <a:srgbClr val="000000"/>
-                </a:solidFill>
-                <a:latin typeface="Arial"/>
-              </a:rPr>
-              <a:t>Free Toppings</a:t>
-            </a:r>
-          </a:p>
-        </p:txBody>
-      </p:sp>
-      <p:sp>
-        <p:nvSpPr>
-          <p:cNvPr id="8" name="Stat Combinations"/>
-          <p:cNvSpPr/>
-          <p:nvPr/>
-        </p:nvSpPr>
-        <p:spPr>
-          <a:xfrm>
-            <a:off x="3566160" y="3474720"/>
-            <a:ext cx="4572000" cy="2651760"/>
-          </a:xfrm>
-          <a:prstGeom prst="roundRect">
-            <a:avLst>
-              <a:gd name="adj" fmla="val 5172"/>
-            </a:avLst>
-          </a:prstGeom>
-          <a:solidFill>
-            <a:srgbClr val="F2F2F2"/>
-          </a:solidFill>
-          <a:ln>
-            <a:noFill/>
-          </a:ln>
-          <a:effectLst/>
-        </p:spPr>
-        <p:txBody>
-          <a:bodyPr rtlCol="0" anchor="ctr"/>
-          <a:lstStyle/>
-          <a:p>
-            <a:pPr algn="ctr"/>
-          </a:p>
-        </p:txBody>
-      </p:sp>
-      <p:pic>
-        <p:nvPicPr>
-          <p:cNvPr id="9" name="Icon arrows-shuffle" descr="arrows shuffle icon"/>
-          <p:cNvPicPr>
-            <a:picLocks noChangeAspect="1"/>
-          </p:cNvPicPr>
-          <p:nvPr/>
-        </p:nvPicPr>
-        <p:blipFill>
-          <a:blip r:embed="rId4"/>
-          <a:stretch>
-            <a:fillRect/>
-          </a:stretch>
-        </p:blipFill>
-        <p:spPr>
-          <a:xfrm>
-            <a:off x="3840480" y="3794760"/>
-            <a:ext cx="502920" cy="502920"/>
-          </a:xfrm>
-          <a:prstGeom prst="rect">
-            <a:avLst/>
-          </a:prstGeom>
-        </p:spPr>
-      </p:pic>
-      <p:sp>
-        <p:nvSpPr>
-          <p:cNvPr id="10" name="TextBox 9"/>
-          <p:cNvSpPr txBox="1"/>
-          <p:nvPr/>
-        </p:nvSpPr>
-        <p:spPr>
-          <a:xfrm>
-            <a:off x="3813048" y="4370832"/>
-            <a:ext cx="4206240" cy="1051560"/>
-          </a:xfrm>
-          <a:prstGeom prst="rect">
-            <a:avLst/>
-          </a:prstGeom>
-          <a:noFill/>
-        </p:spPr>
-        <p:txBody>
-          <a:bodyPr wrap="square" anchor="t" lIns="0" rIns="0" tIns="0" bIns="0">
-            <a:noAutofit/>
-          </a:bodyPr>
-          <a:lstStyle/>
-          <a:p>
-            <a:pPr algn="l"/>
-            <a:r>
-              <a:rPr sz="7200" b="1">
-                <a:solidFill>
-                  <a:srgbClr val="ED1C24"/>
-                </a:solidFill>
-                <a:latin typeface="Arial"/>
-              </a:rPr>
-              <a:t>250,000+</a:t>
-            </a:r>
-          </a:p>
-        </p:txBody>
-      </p:sp>
-      <p:sp>
-        <p:nvSpPr>
-          <p:cNvPr id="11" name="TextBox 10"/>
-          <p:cNvSpPr txBox="1"/>
-          <p:nvPr/>
-        </p:nvSpPr>
-        <p:spPr>
-          <a:xfrm>
-            <a:off x="3840480" y="5486400"/>
-            <a:ext cx="4206240" cy="411480"/>
-          </a:xfrm>
-          <a:prstGeom prst="rect">
-            <a:avLst/>
-          </a:prstGeom>
-          <a:noFill/>
-        </p:spPr>
-        <p:txBody>
-          <a:bodyPr wrap="square" anchor="t" lIns="0" rIns="0" tIns="0" bIns="0">
-            <a:noAutofit/>
-          </a:bodyPr>
-          <a:lstStyle/>
-          <a:p>
-            <a:pPr algn="l"/>
-            <a:r>
-              <a:rPr sz="2400" b="1">
-                <a:solidFill>
-                  <a:srgbClr val="000000"/>
-                </a:solidFill>
-                <a:latin typeface="Arial"/>
-              </a:rPr>
-              <a:t>Combinations</a:t>
-            </a:r>
-          </a:p>
-        </p:txBody>
-      </p:sp>
-      <p:sp>
-        <p:nvSpPr>
-          <p:cNvPr id="12" name="Stat Peanuts"/>
-          <p:cNvSpPr/>
-          <p:nvPr/>
-        </p:nvSpPr>
-        <p:spPr>
-          <a:xfrm>
-            <a:off x="8412480" y="3474720"/>
-            <a:ext cx="3230880" cy="2651760"/>
-          </a:xfrm>
-          <a:prstGeom prst="roundRect">
-            <a:avLst>
-              <a:gd name="adj" fmla="val 5172"/>
-            </a:avLst>
-          </a:prstGeom>
-          <a:solidFill>
-            <a:srgbClr val="ED1C24"/>
-          </a:solidFill>
-          <a:ln>
-            <a:noFill/>
-          </a:ln>
-          <a:effectLst/>
-        </p:spPr>
-        <p:txBody>
-          <a:bodyPr rtlCol="0" anchor="ctr"/>
-          <a:lstStyle/>
-          <a:p>
-            <a:pPr algn="ctr"/>
-          </a:p>
-        </p:txBody>
-      </p:sp>
-      <p:pic>
-        <p:nvPicPr>
-          <p:cNvPr id="13" name="Icon gift" descr="gift icon"/>
-          <p:cNvPicPr>
-            <a:picLocks noChangeAspect="1"/>
-          </p:cNvPicPr>
-          <p:nvPr/>
-        </p:nvPicPr>
-        <p:blipFill>
-          <a:blip r:embed="rId5"/>
-          <a:stretch>
-            <a:fillRect/>
-          </a:stretch>
-        </p:blipFill>
-        <p:spPr>
-          <a:xfrm>
-            <a:off x="8686800" y="3794760"/>
-            <a:ext cx="502920" cy="502920"/>
-          </a:xfrm>
-          <a:prstGeom prst="rect">
-            <a:avLst/>
-          </a:prstGeom>
-        </p:spPr>
-      </p:pic>
-      <p:sp>
-        <p:nvSpPr>
-          <p:cNvPr id="14" name="TextBox 13"/>
-          <p:cNvSpPr txBox="1"/>
-          <p:nvPr/>
-        </p:nvSpPr>
-        <p:spPr>
-          <a:xfrm>
-            <a:off x="8659368" y="4370832"/>
-            <a:ext cx="2865120" cy="1051560"/>
-          </a:xfrm>
-          <a:prstGeom prst="rect">
-            <a:avLst/>
-          </a:prstGeom>
-          <a:noFill/>
-        </p:spPr>
-        <p:txBody>
-          <a:bodyPr wrap="square" anchor="t" lIns="0" rIns="0" tIns="0" bIns="0">
-            <a:noAutofit/>
-          </a:bodyPr>
-          <a:lstStyle/>
-          <a:p>
-            <a:pPr algn="l"/>
-            <a:r>
-              <a:rPr sz="7200" b="1">
-                <a:solidFill>
-                  <a:srgbClr val="FFFFFF"/>
-                </a:solidFill>
-                <a:latin typeface="Arial"/>
-              </a:rPr>
-              <a:t>FREE</a:t>
-            </a:r>
-          </a:p>
-        </p:txBody>
-      </p:sp>
-      <p:sp>
-        <p:nvSpPr>
-          <p:cNvPr id="15" name="TextBox 14"/>
-          <p:cNvSpPr txBox="1"/>
-          <p:nvPr/>
-        </p:nvSpPr>
-        <p:spPr>
-          <a:xfrm>
-            <a:off x="8686800" y="5486400"/>
-            <a:ext cx="2865120" cy="411480"/>
-          </a:xfrm>
-          <a:prstGeom prst="rect">
-            <a:avLst/>
-          </a:prstGeom>
-          <a:noFill/>
-        </p:spPr>
-        <p:txBody>
-          <a:bodyPr wrap="square" anchor="t" lIns="0" rIns="0" tIns="0" bIns="0">
-            <a:noAutofit/>
-          </a:bodyPr>
-          <a:lstStyle/>
-          <a:p>
-            <a:pPr algn="l"/>
-            <a:r>
-              <a:rPr sz="2400" b="1">
-                <a:solidFill>
-                  <a:srgbClr val="FFFFFF"/>
-                </a:solidFill>
-                <a:latin typeface="Arial"/>
-              </a:rPr>
-              <a:t>Peanuts</a:t>
-            </a:r>
-          </a:p>
-        </p:txBody>
-      </p:sp>
-      <p:sp>
-        <p:nvSpPr>
-          <p:cNvPr id="16" name="Arrow badge"/>
-          <p:cNvSpPr/>
-          <p:nvPr/>
-        </p:nvSpPr>
-        <p:spPr>
-          <a:xfrm>
-            <a:off x="3163824" y="4535424"/>
-            <a:ext cx="530352" cy="530352"/>
-          </a:xfrm>
-          <a:prstGeom prst="ellipse">
-            <a:avLst/>
-          </a:prstGeom>
-          <a:solidFill>
-            <a:srgbClr val="000000"/>
-          </a:solidFill>
-          <a:ln>
-            <a:noFill/>
-          </a:ln>
-          <a:effectLst/>
-        </p:spPr>
-        <p:txBody>
-          <a:bodyPr rtlCol="0" anchor="ctr" wrap="square" lIns="0" rIns="0" tIns="0" bIns="0">
-            <a:noAutofit/>
-          </a:bodyPr>
-          <a:lstStyle/>
-          <a:p>
-            <a:pPr algn="ctr"/>
-            <a:r>
-              <a:rPr sz="2000" b="1">
-                <a:solidFill>
-                  <a:srgbClr val="FFFFFF"/>
-                </a:solidFill>
-                <a:latin typeface="Arial"/>
-              </a:rPr>
-              <a:t>→</a:t>
-            </a:r>
-          </a:p>
-        </p:txBody>
-      </p:sp>
       <p:grpSp>
         <p:nvGrpSpPr>
-          <p:cNvPr id="17" name="Checker band"/>
+          <p:cNvPr id="4" name="Checker band"/>
           <p:cNvGrpSpPr/>
           <p:nvPr/>
         </p:nvGrpSpPr>
@@ -8139,7 +6993,7 @@
         </p:grpSpPr>
         <p:sp>
           <p:nvSpPr>
-            <p:cNvPr id="18" name="Rectangle 17"/>
+            <p:cNvPr id="5" name="Rectangle 4"/>
             <p:cNvSpPr/>
             <p:nvPr/>
           </p:nvSpPr>
@@ -8169,13 +7023,403 @@
         </p:sp>
         <p:sp>
           <p:nvSpPr>
+            <p:cNvPr id="6" name="Rectangle 5"/>
+            <p:cNvSpPr/>
+            <p:nvPr/>
+          </p:nvSpPr>
+          <p:spPr>
+            <a:xfrm>
+              <a:off x="0" y="6451600"/>
+              <a:ext cx="203200" cy="203200"/>
+            </a:xfrm>
+            <a:prstGeom prst="rect">
+              <a:avLst/>
+            </a:prstGeom>
+            <a:solidFill>
+              <a:srgbClr val="ED1C24"/>
+            </a:solidFill>
+            <a:ln>
+              <a:noFill/>
+            </a:ln>
+            <a:effectLst/>
+          </p:spPr>
+          <p:txBody>
+            <a:bodyPr rtlCol="0" anchor="ctr"/>
+            <a:lstStyle/>
+            <a:p>
+              <a:pPr algn="ctr"/>
+            </a:p>
+          </p:txBody>
+        </p:sp>
+        <p:sp>
+          <p:nvSpPr>
+            <p:cNvPr id="7" name="Rectangle 6"/>
+            <p:cNvSpPr/>
+            <p:nvPr/>
+          </p:nvSpPr>
+          <p:spPr>
+            <a:xfrm>
+              <a:off x="406400" y="6451600"/>
+              <a:ext cx="203200" cy="203200"/>
+            </a:xfrm>
+            <a:prstGeom prst="rect">
+              <a:avLst/>
+            </a:prstGeom>
+            <a:solidFill>
+              <a:srgbClr val="ED1C24"/>
+            </a:solidFill>
+            <a:ln>
+              <a:noFill/>
+            </a:ln>
+            <a:effectLst/>
+          </p:spPr>
+          <p:txBody>
+            <a:bodyPr rtlCol="0" anchor="ctr"/>
+            <a:lstStyle/>
+            <a:p>
+              <a:pPr algn="ctr"/>
+            </a:p>
+          </p:txBody>
+        </p:sp>
+        <p:sp>
+          <p:nvSpPr>
+            <p:cNvPr id="8" name="Rectangle 7"/>
+            <p:cNvSpPr/>
+            <p:nvPr/>
+          </p:nvSpPr>
+          <p:spPr>
+            <a:xfrm>
+              <a:off x="812800" y="6451600"/>
+              <a:ext cx="203200" cy="203200"/>
+            </a:xfrm>
+            <a:prstGeom prst="rect">
+              <a:avLst/>
+            </a:prstGeom>
+            <a:solidFill>
+              <a:srgbClr val="ED1C24"/>
+            </a:solidFill>
+            <a:ln>
+              <a:noFill/>
+            </a:ln>
+            <a:effectLst/>
+          </p:spPr>
+          <p:txBody>
+            <a:bodyPr rtlCol="0" anchor="ctr"/>
+            <a:lstStyle/>
+            <a:p>
+              <a:pPr algn="ctr"/>
+            </a:p>
+          </p:txBody>
+        </p:sp>
+        <p:sp>
+          <p:nvSpPr>
+            <p:cNvPr id="9" name="Rectangle 8"/>
+            <p:cNvSpPr/>
+            <p:nvPr/>
+          </p:nvSpPr>
+          <p:spPr>
+            <a:xfrm>
+              <a:off x="1219200" y="6451600"/>
+              <a:ext cx="203200" cy="203200"/>
+            </a:xfrm>
+            <a:prstGeom prst="rect">
+              <a:avLst/>
+            </a:prstGeom>
+            <a:solidFill>
+              <a:srgbClr val="ED1C24"/>
+            </a:solidFill>
+            <a:ln>
+              <a:noFill/>
+            </a:ln>
+            <a:effectLst/>
+          </p:spPr>
+          <p:txBody>
+            <a:bodyPr rtlCol="0" anchor="ctr"/>
+            <a:lstStyle/>
+            <a:p>
+              <a:pPr algn="ctr"/>
+            </a:p>
+          </p:txBody>
+        </p:sp>
+        <p:sp>
+          <p:nvSpPr>
+            <p:cNvPr id="10" name="Rectangle 9"/>
+            <p:cNvSpPr/>
+            <p:nvPr/>
+          </p:nvSpPr>
+          <p:spPr>
+            <a:xfrm>
+              <a:off x="1625600" y="6451600"/>
+              <a:ext cx="203200" cy="203200"/>
+            </a:xfrm>
+            <a:prstGeom prst="rect">
+              <a:avLst/>
+            </a:prstGeom>
+            <a:solidFill>
+              <a:srgbClr val="ED1C24"/>
+            </a:solidFill>
+            <a:ln>
+              <a:noFill/>
+            </a:ln>
+            <a:effectLst/>
+          </p:spPr>
+          <p:txBody>
+            <a:bodyPr rtlCol="0" anchor="ctr"/>
+            <a:lstStyle/>
+            <a:p>
+              <a:pPr algn="ctr"/>
+            </a:p>
+          </p:txBody>
+        </p:sp>
+        <p:sp>
+          <p:nvSpPr>
+            <p:cNvPr id="11" name="Rectangle 10"/>
+            <p:cNvSpPr/>
+            <p:nvPr/>
+          </p:nvSpPr>
+          <p:spPr>
+            <a:xfrm>
+              <a:off x="2032000" y="6451600"/>
+              <a:ext cx="203200" cy="203200"/>
+            </a:xfrm>
+            <a:prstGeom prst="rect">
+              <a:avLst/>
+            </a:prstGeom>
+            <a:solidFill>
+              <a:srgbClr val="ED1C24"/>
+            </a:solidFill>
+            <a:ln>
+              <a:noFill/>
+            </a:ln>
+            <a:effectLst/>
+          </p:spPr>
+          <p:txBody>
+            <a:bodyPr rtlCol="0" anchor="ctr"/>
+            <a:lstStyle/>
+            <a:p>
+              <a:pPr algn="ctr"/>
+            </a:p>
+          </p:txBody>
+        </p:sp>
+        <p:sp>
+          <p:nvSpPr>
+            <p:cNvPr id="12" name="Rectangle 11"/>
+            <p:cNvSpPr/>
+            <p:nvPr/>
+          </p:nvSpPr>
+          <p:spPr>
+            <a:xfrm>
+              <a:off x="2438400" y="6451600"/>
+              <a:ext cx="203200" cy="203200"/>
+            </a:xfrm>
+            <a:prstGeom prst="rect">
+              <a:avLst/>
+            </a:prstGeom>
+            <a:solidFill>
+              <a:srgbClr val="ED1C24"/>
+            </a:solidFill>
+            <a:ln>
+              <a:noFill/>
+            </a:ln>
+            <a:effectLst/>
+          </p:spPr>
+          <p:txBody>
+            <a:bodyPr rtlCol="0" anchor="ctr"/>
+            <a:lstStyle/>
+            <a:p>
+              <a:pPr algn="ctr"/>
+            </a:p>
+          </p:txBody>
+        </p:sp>
+        <p:sp>
+          <p:nvSpPr>
+            <p:cNvPr id="13" name="Rectangle 12"/>
+            <p:cNvSpPr/>
+            <p:nvPr/>
+          </p:nvSpPr>
+          <p:spPr>
+            <a:xfrm>
+              <a:off x="2844800" y="6451600"/>
+              <a:ext cx="203200" cy="203200"/>
+            </a:xfrm>
+            <a:prstGeom prst="rect">
+              <a:avLst/>
+            </a:prstGeom>
+            <a:solidFill>
+              <a:srgbClr val="ED1C24"/>
+            </a:solidFill>
+            <a:ln>
+              <a:noFill/>
+            </a:ln>
+            <a:effectLst/>
+          </p:spPr>
+          <p:txBody>
+            <a:bodyPr rtlCol="0" anchor="ctr"/>
+            <a:lstStyle/>
+            <a:p>
+              <a:pPr algn="ctr"/>
+            </a:p>
+          </p:txBody>
+        </p:sp>
+        <p:sp>
+          <p:nvSpPr>
+            <p:cNvPr id="14" name="Rectangle 13"/>
+            <p:cNvSpPr/>
+            <p:nvPr/>
+          </p:nvSpPr>
+          <p:spPr>
+            <a:xfrm>
+              <a:off x="3251200" y="6451600"/>
+              <a:ext cx="203200" cy="203200"/>
+            </a:xfrm>
+            <a:prstGeom prst="rect">
+              <a:avLst/>
+            </a:prstGeom>
+            <a:solidFill>
+              <a:srgbClr val="ED1C24"/>
+            </a:solidFill>
+            <a:ln>
+              <a:noFill/>
+            </a:ln>
+            <a:effectLst/>
+          </p:spPr>
+          <p:txBody>
+            <a:bodyPr rtlCol="0" anchor="ctr"/>
+            <a:lstStyle/>
+            <a:p>
+              <a:pPr algn="ctr"/>
+            </a:p>
+          </p:txBody>
+        </p:sp>
+        <p:sp>
+          <p:nvSpPr>
+            <p:cNvPr id="15" name="Rectangle 14"/>
+            <p:cNvSpPr/>
+            <p:nvPr/>
+          </p:nvSpPr>
+          <p:spPr>
+            <a:xfrm>
+              <a:off x="3657600" y="6451600"/>
+              <a:ext cx="203200" cy="203200"/>
+            </a:xfrm>
+            <a:prstGeom prst="rect">
+              <a:avLst/>
+            </a:prstGeom>
+            <a:solidFill>
+              <a:srgbClr val="ED1C24"/>
+            </a:solidFill>
+            <a:ln>
+              <a:noFill/>
+            </a:ln>
+            <a:effectLst/>
+          </p:spPr>
+          <p:txBody>
+            <a:bodyPr rtlCol="0" anchor="ctr"/>
+            <a:lstStyle/>
+            <a:p>
+              <a:pPr algn="ctr"/>
+            </a:p>
+          </p:txBody>
+        </p:sp>
+        <p:sp>
+          <p:nvSpPr>
+            <p:cNvPr id="16" name="Rectangle 15"/>
+            <p:cNvSpPr/>
+            <p:nvPr/>
+          </p:nvSpPr>
+          <p:spPr>
+            <a:xfrm>
+              <a:off x="4064000" y="6451600"/>
+              <a:ext cx="203200" cy="203200"/>
+            </a:xfrm>
+            <a:prstGeom prst="rect">
+              <a:avLst/>
+            </a:prstGeom>
+            <a:solidFill>
+              <a:srgbClr val="ED1C24"/>
+            </a:solidFill>
+            <a:ln>
+              <a:noFill/>
+            </a:ln>
+            <a:effectLst/>
+          </p:spPr>
+          <p:txBody>
+            <a:bodyPr rtlCol="0" anchor="ctr"/>
+            <a:lstStyle/>
+            <a:p>
+              <a:pPr algn="ctr"/>
+            </a:p>
+          </p:txBody>
+        </p:sp>
+        <p:sp>
+          <p:nvSpPr>
+            <p:cNvPr id="17" name="Rectangle 16"/>
+            <p:cNvSpPr/>
+            <p:nvPr/>
+          </p:nvSpPr>
+          <p:spPr>
+            <a:xfrm>
+              <a:off x="4470400" y="6451600"/>
+              <a:ext cx="203200" cy="203200"/>
+            </a:xfrm>
+            <a:prstGeom prst="rect">
+              <a:avLst/>
+            </a:prstGeom>
+            <a:solidFill>
+              <a:srgbClr val="ED1C24"/>
+            </a:solidFill>
+            <a:ln>
+              <a:noFill/>
+            </a:ln>
+            <a:effectLst/>
+          </p:spPr>
+          <p:txBody>
+            <a:bodyPr rtlCol="0" anchor="ctr"/>
+            <a:lstStyle/>
+            <a:p>
+              <a:pPr algn="ctr"/>
+            </a:p>
+          </p:txBody>
+        </p:sp>
+        <p:sp>
+          <p:nvSpPr>
+            <p:cNvPr id="18" name="Rectangle 17"/>
+            <p:cNvSpPr/>
+            <p:nvPr/>
+          </p:nvSpPr>
+          <p:spPr>
+            <a:xfrm>
+              <a:off x="4876800" y="6451600"/>
+              <a:ext cx="203200" cy="203200"/>
+            </a:xfrm>
+            <a:prstGeom prst="rect">
+              <a:avLst/>
+            </a:prstGeom>
+            <a:solidFill>
+              <a:srgbClr val="ED1C24"/>
+            </a:solidFill>
+            <a:ln>
+              <a:noFill/>
+            </a:ln>
+            <a:effectLst/>
+          </p:spPr>
+          <p:txBody>
+            <a:bodyPr rtlCol="0" anchor="ctr"/>
+            <a:lstStyle/>
+            <a:p>
+              <a:pPr algn="ctr"/>
+            </a:p>
+          </p:txBody>
+        </p:sp>
+        <p:sp>
+          <p:nvSpPr>
             <p:cNvPr id="19" name="Rectangle 18"/>
             <p:cNvSpPr/>
             <p:nvPr/>
           </p:nvSpPr>
           <p:spPr>
             <a:xfrm>
-              <a:off x="0" y="6451600"/>
+              <a:off x="5283200" y="6451600"/>
               <a:ext cx="203200" cy="203200"/>
             </a:xfrm>
             <a:prstGeom prst="rect">
@@ -8205,7 +7449,7 @@
           </p:nvSpPr>
           <p:spPr>
             <a:xfrm>
-              <a:off x="406400" y="6451600"/>
+              <a:off x="5689600" y="6451600"/>
               <a:ext cx="203200" cy="203200"/>
             </a:xfrm>
             <a:prstGeom prst="rect">
@@ -8235,7 +7479,7 @@
           </p:nvSpPr>
           <p:spPr>
             <a:xfrm>
-              <a:off x="812800" y="6451600"/>
+              <a:off x="6096000" y="6451600"/>
               <a:ext cx="203200" cy="203200"/>
             </a:xfrm>
             <a:prstGeom prst="rect">
@@ -8265,7 +7509,7 @@
           </p:nvSpPr>
           <p:spPr>
             <a:xfrm>
-              <a:off x="1219200" y="6451600"/>
+              <a:off x="6502400" y="6451600"/>
               <a:ext cx="203200" cy="203200"/>
             </a:xfrm>
             <a:prstGeom prst="rect">
@@ -8295,7 +7539,7 @@
           </p:nvSpPr>
           <p:spPr>
             <a:xfrm>
-              <a:off x="1625600" y="6451600"/>
+              <a:off x="6908800" y="6451600"/>
               <a:ext cx="203200" cy="203200"/>
             </a:xfrm>
             <a:prstGeom prst="rect">
@@ -8325,7 +7569,7 @@
           </p:nvSpPr>
           <p:spPr>
             <a:xfrm>
-              <a:off x="2032000" y="6451600"/>
+              <a:off x="7315200" y="6451600"/>
               <a:ext cx="203200" cy="203200"/>
             </a:xfrm>
             <a:prstGeom prst="rect">
@@ -8355,7 +7599,7 @@
           </p:nvSpPr>
           <p:spPr>
             <a:xfrm>
-              <a:off x="2438400" y="6451600"/>
+              <a:off x="7721600" y="6451600"/>
               <a:ext cx="203200" cy="203200"/>
             </a:xfrm>
             <a:prstGeom prst="rect">
@@ -8385,7 +7629,7 @@
           </p:nvSpPr>
           <p:spPr>
             <a:xfrm>
-              <a:off x="2844800" y="6451600"/>
+              <a:off x="8128000" y="6451600"/>
               <a:ext cx="203200" cy="203200"/>
             </a:xfrm>
             <a:prstGeom prst="rect">
@@ -8415,7 +7659,7 @@
           </p:nvSpPr>
           <p:spPr>
             <a:xfrm>
-              <a:off x="3251200" y="6451600"/>
+              <a:off x="8534400" y="6451600"/>
               <a:ext cx="203200" cy="203200"/>
             </a:xfrm>
             <a:prstGeom prst="rect">
@@ -8445,7 +7689,7 @@
           </p:nvSpPr>
           <p:spPr>
             <a:xfrm>
-              <a:off x="3657600" y="6451600"/>
+              <a:off x="8940800" y="6451600"/>
               <a:ext cx="203200" cy="203200"/>
             </a:xfrm>
             <a:prstGeom prst="rect">
@@ -8475,7 +7719,7 @@
           </p:nvSpPr>
           <p:spPr>
             <a:xfrm>
-              <a:off x="4064000" y="6451600"/>
+              <a:off x="9347200" y="6451600"/>
               <a:ext cx="203200" cy="203200"/>
             </a:xfrm>
             <a:prstGeom prst="rect">
@@ -8505,7 +7749,7 @@
           </p:nvSpPr>
           <p:spPr>
             <a:xfrm>
-              <a:off x="4470400" y="6451600"/>
+              <a:off x="9753600" y="6451600"/>
               <a:ext cx="203200" cy="203200"/>
             </a:xfrm>
             <a:prstGeom prst="rect">
@@ -8535,7 +7779,7 @@
           </p:nvSpPr>
           <p:spPr>
             <a:xfrm>
-              <a:off x="4876800" y="6451600"/>
+              <a:off x="10160000" y="6451600"/>
               <a:ext cx="203200" cy="203200"/>
             </a:xfrm>
             <a:prstGeom prst="rect">
@@ -8565,7 +7809,7 @@
           </p:nvSpPr>
           <p:spPr>
             <a:xfrm>
-              <a:off x="5283200" y="6451600"/>
+              <a:off x="10566400" y="6451600"/>
               <a:ext cx="203200" cy="203200"/>
             </a:xfrm>
             <a:prstGeom prst="rect">
@@ -8595,7 +7839,7 @@
           </p:nvSpPr>
           <p:spPr>
             <a:xfrm>
-              <a:off x="5689600" y="6451600"/>
+              <a:off x="10972800" y="6451600"/>
               <a:ext cx="203200" cy="203200"/>
             </a:xfrm>
             <a:prstGeom prst="rect">
@@ -8625,7 +7869,7 @@
           </p:nvSpPr>
           <p:spPr>
             <a:xfrm>
-              <a:off x="6096000" y="6451600"/>
+              <a:off x="11379200" y="6451600"/>
               <a:ext cx="203200" cy="203200"/>
             </a:xfrm>
             <a:prstGeom prst="rect">
@@ -8655,7 +7899,7 @@
           </p:nvSpPr>
           <p:spPr>
             <a:xfrm>
-              <a:off x="6502400" y="6451600"/>
+              <a:off x="11785600" y="6451600"/>
               <a:ext cx="203200" cy="203200"/>
             </a:xfrm>
             <a:prstGeom prst="rect">
@@ -8685,7 +7929,7 @@
           </p:nvSpPr>
           <p:spPr>
             <a:xfrm>
-              <a:off x="6908800" y="6451600"/>
+              <a:off x="203200" y="6654800"/>
               <a:ext cx="203200" cy="203200"/>
             </a:xfrm>
             <a:prstGeom prst="rect">
@@ -8715,7 +7959,7 @@
           </p:nvSpPr>
           <p:spPr>
             <a:xfrm>
-              <a:off x="7315200" y="6451600"/>
+              <a:off x="609600" y="6654800"/>
               <a:ext cx="203200" cy="203200"/>
             </a:xfrm>
             <a:prstGeom prst="rect">
@@ -8745,7 +7989,7 @@
           </p:nvSpPr>
           <p:spPr>
             <a:xfrm>
-              <a:off x="7721600" y="6451600"/>
+              <a:off x="1016000" y="6654800"/>
               <a:ext cx="203200" cy="203200"/>
             </a:xfrm>
             <a:prstGeom prst="rect">
@@ -8775,7 +8019,7 @@
           </p:nvSpPr>
           <p:spPr>
             <a:xfrm>
-              <a:off x="8128000" y="6451600"/>
+              <a:off x="1422400" y="6654800"/>
               <a:ext cx="203200" cy="203200"/>
             </a:xfrm>
             <a:prstGeom prst="rect">
@@ -8805,7 +8049,7 @@
           </p:nvSpPr>
           <p:spPr>
             <a:xfrm>
-              <a:off x="8534400" y="6451600"/>
+              <a:off x="1828800" y="6654800"/>
               <a:ext cx="203200" cy="203200"/>
             </a:xfrm>
             <a:prstGeom prst="rect">
@@ -8835,7 +8079,7 @@
           </p:nvSpPr>
           <p:spPr>
             <a:xfrm>
-              <a:off x="8940800" y="6451600"/>
+              <a:off x="2235200" y="6654800"/>
               <a:ext cx="203200" cy="203200"/>
             </a:xfrm>
             <a:prstGeom prst="rect">
@@ -8865,7 +8109,7 @@
           </p:nvSpPr>
           <p:spPr>
             <a:xfrm>
-              <a:off x="9347200" y="6451600"/>
+              <a:off x="2641600" y="6654800"/>
               <a:ext cx="203200" cy="203200"/>
             </a:xfrm>
             <a:prstGeom prst="rect">
@@ -8895,7 +8139,7 @@
           </p:nvSpPr>
           <p:spPr>
             <a:xfrm>
-              <a:off x="9753600" y="6451600"/>
+              <a:off x="3048000" y="6654800"/>
               <a:ext cx="203200" cy="203200"/>
             </a:xfrm>
             <a:prstGeom prst="rect">
@@ -8925,7 +8169,7 @@
           </p:nvSpPr>
           <p:spPr>
             <a:xfrm>
-              <a:off x="10160000" y="6451600"/>
+              <a:off x="3454400" y="6654800"/>
               <a:ext cx="203200" cy="203200"/>
             </a:xfrm>
             <a:prstGeom prst="rect">
@@ -8955,7 +8199,7 @@
           </p:nvSpPr>
           <p:spPr>
             <a:xfrm>
-              <a:off x="10566400" y="6451600"/>
+              <a:off x="3860800" y="6654800"/>
               <a:ext cx="203200" cy="203200"/>
             </a:xfrm>
             <a:prstGeom prst="rect">
@@ -8985,7 +8229,7 @@
           </p:nvSpPr>
           <p:spPr>
             <a:xfrm>
-              <a:off x="10972800" y="6451600"/>
+              <a:off x="4267200" y="6654800"/>
               <a:ext cx="203200" cy="203200"/>
             </a:xfrm>
             <a:prstGeom prst="rect">
@@ -9015,7 +8259,7 @@
           </p:nvSpPr>
           <p:spPr>
             <a:xfrm>
-              <a:off x="11379200" y="6451600"/>
+              <a:off x="4673600" y="6654800"/>
               <a:ext cx="203200" cy="203200"/>
             </a:xfrm>
             <a:prstGeom prst="rect">
@@ -9045,7 +8289,7 @@
           </p:nvSpPr>
           <p:spPr>
             <a:xfrm>
-              <a:off x="11785600" y="6451600"/>
+              <a:off x="5080000" y="6654800"/>
               <a:ext cx="203200" cy="203200"/>
             </a:xfrm>
             <a:prstGeom prst="rect">
@@ -9075,7 +8319,7 @@
           </p:nvSpPr>
           <p:spPr>
             <a:xfrm>
-              <a:off x="203200" y="6654800"/>
+              <a:off x="5486400" y="6654800"/>
               <a:ext cx="203200" cy="203200"/>
             </a:xfrm>
             <a:prstGeom prst="rect">
@@ -9105,7 +8349,7 @@
           </p:nvSpPr>
           <p:spPr>
             <a:xfrm>
-              <a:off x="609600" y="6654800"/>
+              <a:off x="5892800" y="6654800"/>
               <a:ext cx="203200" cy="203200"/>
             </a:xfrm>
             <a:prstGeom prst="rect">
@@ -9135,7 +8379,7 @@
           </p:nvSpPr>
           <p:spPr>
             <a:xfrm>
-              <a:off x="1016000" y="6654800"/>
+              <a:off x="6299200" y="6654800"/>
               <a:ext cx="203200" cy="203200"/>
             </a:xfrm>
             <a:prstGeom prst="rect">
@@ -9165,7 +8409,7 @@
           </p:nvSpPr>
           <p:spPr>
             <a:xfrm>
-              <a:off x="1422400" y="6654800"/>
+              <a:off x="6705600" y="6654800"/>
               <a:ext cx="203200" cy="203200"/>
             </a:xfrm>
             <a:prstGeom prst="rect">
@@ -9195,7 +8439,7 @@
           </p:nvSpPr>
           <p:spPr>
             <a:xfrm>
-              <a:off x="1828800" y="6654800"/>
+              <a:off x="7112000" y="6654800"/>
               <a:ext cx="203200" cy="203200"/>
             </a:xfrm>
             <a:prstGeom prst="rect">
@@ -9225,7 +8469,7 @@
           </p:nvSpPr>
           <p:spPr>
             <a:xfrm>
-              <a:off x="2235200" y="6654800"/>
+              <a:off x="7518400" y="6654800"/>
               <a:ext cx="203200" cy="203200"/>
             </a:xfrm>
             <a:prstGeom prst="rect">
@@ -9255,7 +8499,7 @@
           </p:nvSpPr>
           <p:spPr>
             <a:xfrm>
-              <a:off x="2641600" y="6654800"/>
+              <a:off x="7924800" y="6654800"/>
               <a:ext cx="203200" cy="203200"/>
             </a:xfrm>
             <a:prstGeom prst="rect">
@@ -9285,7 +8529,7 @@
           </p:nvSpPr>
           <p:spPr>
             <a:xfrm>
-              <a:off x="3048000" y="6654800"/>
+              <a:off x="8331200" y="6654800"/>
               <a:ext cx="203200" cy="203200"/>
             </a:xfrm>
             <a:prstGeom prst="rect">
@@ -9315,7 +8559,7 @@
           </p:nvSpPr>
           <p:spPr>
             <a:xfrm>
-              <a:off x="3454400" y="6654800"/>
+              <a:off x="8737600" y="6654800"/>
               <a:ext cx="203200" cy="203200"/>
             </a:xfrm>
             <a:prstGeom prst="rect">
@@ -9345,7 +8589,7 @@
           </p:nvSpPr>
           <p:spPr>
             <a:xfrm>
-              <a:off x="3860800" y="6654800"/>
+              <a:off x="9144000" y="6654800"/>
               <a:ext cx="203200" cy="203200"/>
             </a:xfrm>
             <a:prstGeom prst="rect">
@@ -9375,7 +8619,7 @@
           </p:nvSpPr>
           <p:spPr>
             <a:xfrm>
-              <a:off x="4267200" y="6654800"/>
+              <a:off x="9550400" y="6654800"/>
               <a:ext cx="203200" cy="203200"/>
             </a:xfrm>
             <a:prstGeom prst="rect">
@@ -9405,7 +8649,7 @@
           </p:nvSpPr>
           <p:spPr>
             <a:xfrm>
-              <a:off x="4673600" y="6654800"/>
+              <a:off x="9956800" y="6654800"/>
               <a:ext cx="203200" cy="203200"/>
             </a:xfrm>
             <a:prstGeom prst="rect">
@@ -9435,7 +8679,7 @@
           </p:nvSpPr>
           <p:spPr>
             <a:xfrm>
-              <a:off x="5080000" y="6654800"/>
+              <a:off x="10363200" y="6654800"/>
               <a:ext cx="203200" cy="203200"/>
             </a:xfrm>
             <a:prstGeom prst="rect">
@@ -9465,7 +8709,7 @@
           </p:nvSpPr>
           <p:spPr>
             <a:xfrm>
-              <a:off x="5486400" y="6654800"/>
+              <a:off x="10769600" y="6654800"/>
               <a:ext cx="203200" cy="203200"/>
             </a:xfrm>
             <a:prstGeom prst="rect">
@@ -9495,7 +8739,7 @@
           </p:nvSpPr>
           <p:spPr>
             <a:xfrm>
-              <a:off x="5892800" y="6654800"/>
+              <a:off x="11176000" y="6654800"/>
               <a:ext cx="203200" cy="203200"/>
             </a:xfrm>
             <a:prstGeom prst="rect">
@@ -9525,7 +8769,7 @@
           </p:nvSpPr>
           <p:spPr>
             <a:xfrm>
-              <a:off x="6299200" y="6654800"/>
+              <a:off x="11582400" y="6654800"/>
               <a:ext cx="203200" cy="203200"/>
             </a:xfrm>
             <a:prstGeom prst="rect">
@@ -9550,396 +8794,6 @@
         <p:sp>
           <p:nvSpPr>
             <p:cNvPr id="65" name="Rectangle 64"/>
-            <p:cNvSpPr/>
-            <p:nvPr/>
-          </p:nvSpPr>
-          <p:spPr>
-            <a:xfrm>
-              <a:off x="6705600" y="6654800"/>
-              <a:ext cx="203200" cy="203200"/>
-            </a:xfrm>
-            <a:prstGeom prst="rect">
-              <a:avLst/>
-            </a:prstGeom>
-            <a:solidFill>
-              <a:srgbClr val="ED1C24"/>
-            </a:solidFill>
-            <a:ln>
-              <a:noFill/>
-            </a:ln>
-            <a:effectLst/>
-          </p:spPr>
-          <p:txBody>
-            <a:bodyPr rtlCol="0" anchor="ctr"/>
-            <a:lstStyle/>
-            <a:p>
-              <a:pPr algn="ctr"/>
-            </a:p>
-          </p:txBody>
-        </p:sp>
-        <p:sp>
-          <p:nvSpPr>
-            <p:cNvPr id="66" name="Rectangle 65"/>
-            <p:cNvSpPr/>
-            <p:nvPr/>
-          </p:nvSpPr>
-          <p:spPr>
-            <a:xfrm>
-              <a:off x="7112000" y="6654800"/>
-              <a:ext cx="203200" cy="203200"/>
-            </a:xfrm>
-            <a:prstGeom prst="rect">
-              <a:avLst/>
-            </a:prstGeom>
-            <a:solidFill>
-              <a:srgbClr val="ED1C24"/>
-            </a:solidFill>
-            <a:ln>
-              <a:noFill/>
-            </a:ln>
-            <a:effectLst/>
-          </p:spPr>
-          <p:txBody>
-            <a:bodyPr rtlCol="0" anchor="ctr"/>
-            <a:lstStyle/>
-            <a:p>
-              <a:pPr algn="ctr"/>
-            </a:p>
-          </p:txBody>
-        </p:sp>
-        <p:sp>
-          <p:nvSpPr>
-            <p:cNvPr id="67" name="Rectangle 66"/>
-            <p:cNvSpPr/>
-            <p:nvPr/>
-          </p:nvSpPr>
-          <p:spPr>
-            <a:xfrm>
-              <a:off x="7518400" y="6654800"/>
-              <a:ext cx="203200" cy="203200"/>
-            </a:xfrm>
-            <a:prstGeom prst="rect">
-              <a:avLst/>
-            </a:prstGeom>
-            <a:solidFill>
-              <a:srgbClr val="ED1C24"/>
-            </a:solidFill>
-            <a:ln>
-              <a:noFill/>
-            </a:ln>
-            <a:effectLst/>
-          </p:spPr>
-          <p:txBody>
-            <a:bodyPr rtlCol="0" anchor="ctr"/>
-            <a:lstStyle/>
-            <a:p>
-              <a:pPr algn="ctr"/>
-            </a:p>
-          </p:txBody>
-        </p:sp>
-        <p:sp>
-          <p:nvSpPr>
-            <p:cNvPr id="68" name="Rectangle 67"/>
-            <p:cNvSpPr/>
-            <p:nvPr/>
-          </p:nvSpPr>
-          <p:spPr>
-            <a:xfrm>
-              <a:off x="7924800" y="6654800"/>
-              <a:ext cx="203200" cy="203200"/>
-            </a:xfrm>
-            <a:prstGeom prst="rect">
-              <a:avLst/>
-            </a:prstGeom>
-            <a:solidFill>
-              <a:srgbClr val="ED1C24"/>
-            </a:solidFill>
-            <a:ln>
-              <a:noFill/>
-            </a:ln>
-            <a:effectLst/>
-          </p:spPr>
-          <p:txBody>
-            <a:bodyPr rtlCol="0" anchor="ctr"/>
-            <a:lstStyle/>
-            <a:p>
-              <a:pPr algn="ctr"/>
-            </a:p>
-          </p:txBody>
-        </p:sp>
-        <p:sp>
-          <p:nvSpPr>
-            <p:cNvPr id="69" name="Rectangle 68"/>
-            <p:cNvSpPr/>
-            <p:nvPr/>
-          </p:nvSpPr>
-          <p:spPr>
-            <a:xfrm>
-              <a:off x="8331200" y="6654800"/>
-              <a:ext cx="203200" cy="203200"/>
-            </a:xfrm>
-            <a:prstGeom prst="rect">
-              <a:avLst/>
-            </a:prstGeom>
-            <a:solidFill>
-              <a:srgbClr val="ED1C24"/>
-            </a:solidFill>
-            <a:ln>
-              <a:noFill/>
-            </a:ln>
-            <a:effectLst/>
-          </p:spPr>
-          <p:txBody>
-            <a:bodyPr rtlCol="0" anchor="ctr"/>
-            <a:lstStyle/>
-            <a:p>
-              <a:pPr algn="ctr"/>
-            </a:p>
-          </p:txBody>
-        </p:sp>
-        <p:sp>
-          <p:nvSpPr>
-            <p:cNvPr id="70" name="Rectangle 69"/>
-            <p:cNvSpPr/>
-            <p:nvPr/>
-          </p:nvSpPr>
-          <p:spPr>
-            <a:xfrm>
-              <a:off x="8737600" y="6654800"/>
-              <a:ext cx="203200" cy="203200"/>
-            </a:xfrm>
-            <a:prstGeom prst="rect">
-              <a:avLst/>
-            </a:prstGeom>
-            <a:solidFill>
-              <a:srgbClr val="ED1C24"/>
-            </a:solidFill>
-            <a:ln>
-              <a:noFill/>
-            </a:ln>
-            <a:effectLst/>
-          </p:spPr>
-          <p:txBody>
-            <a:bodyPr rtlCol="0" anchor="ctr"/>
-            <a:lstStyle/>
-            <a:p>
-              <a:pPr algn="ctr"/>
-            </a:p>
-          </p:txBody>
-        </p:sp>
-        <p:sp>
-          <p:nvSpPr>
-            <p:cNvPr id="71" name="Rectangle 70"/>
-            <p:cNvSpPr/>
-            <p:nvPr/>
-          </p:nvSpPr>
-          <p:spPr>
-            <a:xfrm>
-              <a:off x="9144000" y="6654800"/>
-              <a:ext cx="203200" cy="203200"/>
-            </a:xfrm>
-            <a:prstGeom prst="rect">
-              <a:avLst/>
-            </a:prstGeom>
-            <a:solidFill>
-              <a:srgbClr val="ED1C24"/>
-            </a:solidFill>
-            <a:ln>
-              <a:noFill/>
-            </a:ln>
-            <a:effectLst/>
-          </p:spPr>
-          <p:txBody>
-            <a:bodyPr rtlCol="0" anchor="ctr"/>
-            <a:lstStyle/>
-            <a:p>
-              <a:pPr algn="ctr"/>
-            </a:p>
-          </p:txBody>
-        </p:sp>
-        <p:sp>
-          <p:nvSpPr>
-            <p:cNvPr id="72" name="Rectangle 71"/>
-            <p:cNvSpPr/>
-            <p:nvPr/>
-          </p:nvSpPr>
-          <p:spPr>
-            <a:xfrm>
-              <a:off x="9550400" y="6654800"/>
-              <a:ext cx="203200" cy="203200"/>
-            </a:xfrm>
-            <a:prstGeom prst="rect">
-              <a:avLst/>
-            </a:prstGeom>
-            <a:solidFill>
-              <a:srgbClr val="ED1C24"/>
-            </a:solidFill>
-            <a:ln>
-              <a:noFill/>
-            </a:ln>
-            <a:effectLst/>
-          </p:spPr>
-          <p:txBody>
-            <a:bodyPr rtlCol="0" anchor="ctr"/>
-            <a:lstStyle/>
-            <a:p>
-              <a:pPr algn="ctr"/>
-            </a:p>
-          </p:txBody>
-        </p:sp>
-        <p:sp>
-          <p:nvSpPr>
-            <p:cNvPr id="73" name="Rectangle 72"/>
-            <p:cNvSpPr/>
-            <p:nvPr/>
-          </p:nvSpPr>
-          <p:spPr>
-            <a:xfrm>
-              <a:off x="9956800" y="6654800"/>
-              <a:ext cx="203200" cy="203200"/>
-            </a:xfrm>
-            <a:prstGeom prst="rect">
-              <a:avLst/>
-            </a:prstGeom>
-            <a:solidFill>
-              <a:srgbClr val="ED1C24"/>
-            </a:solidFill>
-            <a:ln>
-              <a:noFill/>
-            </a:ln>
-            <a:effectLst/>
-          </p:spPr>
-          <p:txBody>
-            <a:bodyPr rtlCol="0" anchor="ctr"/>
-            <a:lstStyle/>
-            <a:p>
-              <a:pPr algn="ctr"/>
-            </a:p>
-          </p:txBody>
-        </p:sp>
-        <p:sp>
-          <p:nvSpPr>
-            <p:cNvPr id="74" name="Rectangle 73"/>
-            <p:cNvSpPr/>
-            <p:nvPr/>
-          </p:nvSpPr>
-          <p:spPr>
-            <a:xfrm>
-              <a:off x="10363200" y="6654800"/>
-              <a:ext cx="203200" cy="203200"/>
-            </a:xfrm>
-            <a:prstGeom prst="rect">
-              <a:avLst/>
-            </a:prstGeom>
-            <a:solidFill>
-              <a:srgbClr val="ED1C24"/>
-            </a:solidFill>
-            <a:ln>
-              <a:noFill/>
-            </a:ln>
-            <a:effectLst/>
-          </p:spPr>
-          <p:txBody>
-            <a:bodyPr rtlCol="0" anchor="ctr"/>
-            <a:lstStyle/>
-            <a:p>
-              <a:pPr algn="ctr"/>
-            </a:p>
-          </p:txBody>
-        </p:sp>
-        <p:sp>
-          <p:nvSpPr>
-            <p:cNvPr id="75" name="Rectangle 74"/>
-            <p:cNvSpPr/>
-            <p:nvPr/>
-          </p:nvSpPr>
-          <p:spPr>
-            <a:xfrm>
-              <a:off x="10769600" y="6654800"/>
-              <a:ext cx="203200" cy="203200"/>
-            </a:xfrm>
-            <a:prstGeom prst="rect">
-              <a:avLst/>
-            </a:prstGeom>
-            <a:solidFill>
-              <a:srgbClr val="ED1C24"/>
-            </a:solidFill>
-            <a:ln>
-              <a:noFill/>
-            </a:ln>
-            <a:effectLst/>
-          </p:spPr>
-          <p:txBody>
-            <a:bodyPr rtlCol="0" anchor="ctr"/>
-            <a:lstStyle/>
-            <a:p>
-              <a:pPr algn="ctr"/>
-            </a:p>
-          </p:txBody>
-        </p:sp>
-        <p:sp>
-          <p:nvSpPr>
-            <p:cNvPr id="76" name="Rectangle 75"/>
-            <p:cNvSpPr/>
-            <p:nvPr/>
-          </p:nvSpPr>
-          <p:spPr>
-            <a:xfrm>
-              <a:off x="11176000" y="6654800"/>
-              <a:ext cx="203200" cy="203200"/>
-            </a:xfrm>
-            <a:prstGeom prst="rect">
-              <a:avLst/>
-            </a:prstGeom>
-            <a:solidFill>
-              <a:srgbClr val="ED1C24"/>
-            </a:solidFill>
-            <a:ln>
-              <a:noFill/>
-            </a:ln>
-            <a:effectLst/>
-          </p:spPr>
-          <p:txBody>
-            <a:bodyPr rtlCol="0" anchor="ctr"/>
-            <a:lstStyle/>
-            <a:p>
-              <a:pPr algn="ctr"/>
-            </a:p>
-          </p:txBody>
-        </p:sp>
-        <p:sp>
-          <p:nvSpPr>
-            <p:cNvPr id="77" name="Rectangle 76"/>
-            <p:cNvSpPr/>
-            <p:nvPr/>
-          </p:nvSpPr>
-          <p:spPr>
-            <a:xfrm>
-              <a:off x="11582400" y="6654800"/>
-              <a:ext cx="203200" cy="203200"/>
-            </a:xfrm>
-            <a:prstGeom prst="rect">
-              <a:avLst/>
-            </a:prstGeom>
-            <a:solidFill>
-              <a:srgbClr val="ED1C24"/>
-            </a:solidFill>
-            <a:ln>
-              <a:noFill/>
-            </a:ln>
-            <a:effectLst/>
-          </p:spPr>
-          <p:txBody>
-            <a:bodyPr rtlCol="0" anchor="ctr"/>
-            <a:lstStyle/>
-            <a:p>
-              <a:pPr algn="ctr"/>
-            </a:p>
-          </p:txBody>
-        </p:sp>
-        <p:sp>
-          <p:nvSpPr>
-            <p:cNvPr id="78" name="Rectangle 77"/>
             <p:cNvSpPr/>
             <p:nvPr/>
           </p:nvSpPr>
@@ -9994,64 +8848,9 @@
         <p:nvPr/>
       </p:nvGrpSpPr>
       <p:grpSpPr/>
-      <p:sp>
-        <p:nvSpPr>
-          <p:cNvPr id="2" name="Title 1"/>
-          <p:cNvSpPr>
-            <a:spLocks noGrp="1"/>
-          </p:cNvSpPr>
-          <p:nvPr>
-            <p:ph type="title"/>
-          </p:nvPr>
-        </p:nvSpPr>
-        <p:spPr>
-          <a:xfrm>
-            <a:off x="548640" y="566928"/>
-            <a:ext cx="5760720" cy="1371600"/>
-          </a:xfrm>
-        </p:spPr>
-        <p:txBody>
-          <a:bodyPr anchor="t" wrap="square" lIns="0" rIns="0" tIns="0" bIns="0">
-            <a:noAutofit/>
-          </a:bodyPr>
-          <a:lstStyle/>
-          <a:p>
-            <a:pPr algn="l">
-              <a:lnSpc>
-                <a:spcPct val="92000"/>
-              </a:lnSpc>
-            </a:pPr>
-            <a:r>
-              <a:rPr sz="4400" b="1">
-                <a:solidFill>
-                  <a:srgbClr val="FFFFFF"/>
-                </a:solidFill>
-                <a:latin typeface="Arial"/>
-              </a:rPr>
-              <a:t>Bacon</a:t>
-            </a:r>
-          </a:p>
-          <a:p>
-            <a:pPr algn="l">
-              <a:lnSpc>
-                <a:spcPct val="92000"/>
-              </a:lnSpc>
-            </a:pPr>
-            <a:r>
-              <a:rPr sz="4400" b="1">
-                <a:solidFill>
-                  <a:srgbClr val="ED1C24"/>
-                </a:solidFill>
-                <a:latin typeface="Arial"/>
-              </a:rPr>
-              <a:t>Cheeseburger</a:t>
-            </a:r>
-          </a:p>
-        </p:txBody>
-      </p:sp>
       <p:pic>
         <p:nvPicPr>
-          <p:cNvPr id="3" name="Photo bacon_cheeseburger" descr="Five Guys bacon cheeseburger"/>
+          <p:cNvPr id="2" name="Photo bacon_cheeseburger" descr="Five Guys bacon cheeseburger"/>
           <p:cNvPicPr>
             <a:picLocks noChangeAspect="1"/>
           </p:cNvPicPr>
@@ -10059,258 +8858,107 @@
         </p:nvPicPr>
         <p:blipFill>
           <a:blip r:embed="rId2"/>
-          <a:srcRect l="13681" r="13681"/>
+          <a:srcRect l="2261" r="2261"/>
           <a:stretch>
             <a:fillRect/>
           </a:stretch>
         </p:blipFill>
         <p:spPr>
           <a:xfrm>
-            <a:off x="5943600" y="0"/>
-            <a:ext cx="6248400" cy="6451600"/>
+            <a:off x="457200" y="411480"/>
+            <a:ext cx="7223760" cy="5674360"/>
           </a:xfrm>
-          <a:prstGeom prst="rect">
-            <a:avLst/>
+          <a:prstGeom prst="roundRect">
+            <a:avLst>
+              <a:gd name="adj" fmla="val 2256"/>
+            </a:avLst>
           </a:prstGeom>
         </p:spPr>
       </p:pic>
-      <p:sp>
-        <p:nvSpPr>
-          <p:cNvPr id="4" name="Photo fade"/>
-          <p:cNvSpPr/>
+      <p:pic>
+        <p:nvPicPr>
+          <p:cNvPr id="3" name="Photo sear_patties_grill" descr="Burger patties searing on a flat grill"/>
+          <p:cNvPicPr>
+            <a:picLocks noChangeAspect="1"/>
+          </p:cNvPicPr>
           <p:nvPr/>
-        </p:nvSpPr>
+        </p:nvPicPr>
+        <p:blipFill>
+          <a:blip r:embed="rId3"/>
+          <a:srcRect t="15702" b="15702"/>
+          <a:stretch>
+            <a:fillRect/>
+          </a:stretch>
+        </p:blipFill>
         <p:spPr>
           <a:xfrm>
-            <a:off x="5925312" y="0"/>
-            <a:ext cx="1828800" cy="6451600"/>
+            <a:off x="7863840" y="411480"/>
+            <a:ext cx="3870960" cy="1769533"/>
           </a:xfrm>
-          <a:prstGeom prst="rect">
-            <a:avLst/>
+          <a:prstGeom prst="roundRect">
+            <a:avLst>
+              <a:gd name="adj" fmla="val 7234"/>
+            </a:avLst>
           </a:prstGeom>
-          <a:gradFill rotWithShape="1">
-            <a:gsLst>
-              <a:gs pos="0">
-                <a:srgbClr val="000000">
-                  <a:alpha val="100000"/>
-                </a:srgbClr>
-              </a:gs>
-              <a:gs pos="100000">
-                <a:srgbClr val="000000">
-                  <a:alpha val="0"/>
-                </a:srgbClr>
-              </a:gs>
-            </a:gsLst>
-            <a:lin ang="0" scaled="0"/>
-          </a:gradFill>
-          <a:ln>
-            <a:noFill/>
-          </a:ln>
-          <a:effectLst/>
         </p:spPr>
-        <p:txBody>
-          <a:bodyPr rtlCol="0" anchor="ctr"/>
-          <a:lstStyle/>
-          <a:p>
-            <a:pPr algn="ctr"/>
-          </a:p>
-        </p:txBody>
-      </p:sp>
-      <p:sp>
-        <p:nvSpPr>
-          <p:cNvPr id="5" name="Culinary term"/>
-          <p:cNvSpPr txBox="1"/>
+      </p:pic>
+      <p:pic>
+        <p:nvPicPr>
+          <p:cNvPr id="4" name="Photo caramelized_onions" descr="Onions caramelizing in a pan"/>
+          <p:cNvPicPr>
+            <a:picLocks noChangeAspect="1"/>
+          </p:cNvPicPr>
           <p:nvPr/>
-        </p:nvSpPr>
+        </p:nvPicPr>
+        <p:blipFill>
+          <a:blip r:embed="rId4"/>
+          <a:srcRect t="9366" b="9366"/>
+          <a:stretch>
+            <a:fillRect/>
+          </a:stretch>
+        </p:blipFill>
         <p:spPr>
           <a:xfrm>
-            <a:off x="548640" y="2631440"/>
-            <a:ext cx="5303520" cy="777240"/>
+            <a:off x="7863840" y="2363893"/>
+            <a:ext cx="3870960" cy="1769533"/>
           </a:xfrm>
-          <a:prstGeom prst="rect">
-            <a:avLst/>
+          <a:prstGeom prst="roundRect">
+            <a:avLst>
+              <a:gd name="adj" fmla="val 7234"/>
+            </a:avLst>
           </a:prstGeom>
-          <a:noFill/>
         </p:spPr>
-        <p:txBody>
-          <a:bodyPr wrap="square" anchor="ctr" lIns="0" rIns="0" tIns="0" bIns="0">
-            <a:noAutofit/>
-          </a:bodyPr>
-          <a:lstStyle/>
-          <a:p>
-            <a:pPr algn="l"/>
-            <a:r>
-              <a:rPr sz="2600" b="1">
-                <a:solidFill>
-                  <a:srgbClr val="FFFFFF"/>
-                </a:solidFill>
-                <a:latin typeface="Arial"/>
-              </a:rPr>
-              <a:t>High-heat </a:t>
-            </a:r>
-            <a:r>
-              <a:rPr sz="4200" b="1">
-                <a:solidFill>
-                  <a:srgbClr val="ED1C24"/>
-                </a:solidFill>
-                <a:latin typeface="Arial"/>
-              </a:rPr>
-              <a:t>SEAR</a:t>
-            </a:r>
-          </a:p>
-        </p:txBody>
-      </p:sp>
-      <p:sp>
-        <p:nvSpPr>
-          <p:cNvPr id="6" name="Divider"/>
-          <p:cNvSpPr/>
+      </p:pic>
+      <p:pic>
+        <p:nvPicPr>
+          <p:cNvPr id="5" name="Photo sauteed_mushrooms" descr="Sauteed mushrooms"/>
+          <p:cNvPicPr>
+            <a:picLocks noChangeAspect="1"/>
+          </p:cNvPicPr>
           <p:nvPr/>
-        </p:nvSpPr>
+        </p:nvPicPr>
+        <p:blipFill>
+          <a:blip r:embed="rId5"/>
+          <a:srcRect t="19525" b="19525"/>
+          <a:stretch>
+            <a:fillRect/>
+          </a:stretch>
+        </p:blipFill>
         <p:spPr>
           <a:xfrm>
-            <a:off x="548640" y="3614420"/>
-            <a:ext cx="4937760" cy="12802"/>
+            <a:off x="7863840" y="4316307"/>
+            <a:ext cx="3870960" cy="1769533"/>
           </a:xfrm>
-          <a:prstGeom prst="rect">
-            <a:avLst/>
+          <a:prstGeom prst="roundRect">
+            <a:avLst>
+              <a:gd name="adj" fmla="val 7234"/>
+            </a:avLst>
           </a:prstGeom>
-          <a:solidFill>
-            <a:srgbClr val="3A3A3A"/>
-          </a:solidFill>
-          <a:ln>
-            <a:noFill/>
-          </a:ln>
-          <a:effectLst/>
         </p:spPr>
-        <p:txBody>
-          <a:bodyPr rtlCol="0" anchor="ctr"/>
-          <a:lstStyle/>
-          <a:p>
-            <a:pPr algn="ctr"/>
-          </a:p>
-        </p:txBody>
-      </p:sp>
-      <p:sp>
-        <p:nvSpPr>
-          <p:cNvPr id="7" name="Culinary term"/>
-          <p:cNvSpPr txBox="1"/>
-          <p:nvPr/>
-        </p:nvSpPr>
-        <p:spPr>
-          <a:xfrm>
-            <a:off x="548640" y="3820160"/>
-            <a:ext cx="5303520" cy="777240"/>
-          </a:xfrm>
-          <a:prstGeom prst="rect">
-            <a:avLst/>
-          </a:prstGeom>
-          <a:noFill/>
-        </p:spPr>
-        <p:txBody>
-          <a:bodyPr wrap="square" anchor="ctr" lIns="0" rIns="0" tIns="0" bIns="0">
-            <a:noAutofit/>
-          </a:bodyPr>
-          <a:lstStyle/>
-          <a:p>
-            <a:pPr algn="l"/>
-            <a:r>
-              <a:rPr sz="4200" b="1">
-                <a:solidFill>
-                  <a:srgbClr val="ED1C24"/>
-                </a:solidFill>
-                <a:latin typeface="Arial"/>
-              </a:rPr>
-              <a:t>CARAMELIZED</a:t>
-            </a:r>
-            <a:r>
-              <a:rPr sz="2600" b="1">
-                <a:solidFill>
-                  <a:srgbClr val="FFFFFF"/>
-                </a:solidFill>
-                <a:latin typeface="Arial"/>
-              </a:rPr>
-              <a:t> Onions</a:t>
-            </a:r>
-          </a:p>
-        </p:txBody>
-      </p:sp>
-      <p:sp>
-        <p:nvSpPr>
-          <p:cNvPr id="8" name="Divider"/>
-          <p:cNvSpPr/>
-          <p:nvPr/>
-        </p:nvSpPr>
-        <p:spPr>
-          <a:xfrm>
-            <a:off x="548640" y="4803140"/>
-            <a:ext cx="4937760" cy="12802"/>
-          </a:xfrm>
-          <a:prstGeom prst="rect">
-            <a:avLst/>
-          </a:prstGeom>
-          <a:solidFill>
-            <a:srgbClr val="3A3A3A"/>
-          </a:solidFill>
-          <a:ln>
-            <a:noFill/>
-          </a:ln>
-          <a:effectLst/>
-        </p:spPr>
-        <p:txBody>
-          <a:bodyPr rtlCol="0" anchor="ctr"/>
-          <a:lstStyle/>
-          <a:p>
-            <a:pPr algn="ctr"/>
-          </a:p>
-        </p:txBody>
-      </p:sp>
-      <p:sp>
-        <p:nvSpPr>
-          <p:cNvPr id="9" name="Culinary term"/>
-          <p:cNvSpPr txBox="1"/>
-          <p:nvPr/>
-        </p:nvSpPr>
-        <p:spPr>
-          <a:xfrm>
-            <a:off x="548640" y="5008880"/>
-            <a:ext cx="5303520" cy="777240"/>
-          </a:xfrm>
-          <a:prstGeom prst="rect">
-            <a:avLst/>
-          </a:prstGeom>
-          <a:noFill/>
-        </p:spPr>
-        <p:txBody>
-          <a:bodyPr wrap="square" anchor="ctr" lIns="0" rIns="0" tIns="0" bIns="0">
-            <a:noAutofit/>
-          </a:bodyPr>
-          <a:lstStyle/>
-          <a:p>
-            <a:pPr algn="l"/>
-            <a:r>
-              <a:rPr sz="4200" b="1">
-                <a:solidFill>
-                  <a:srgbClr val="ED1C24"/>
-                </a:solidFill>
-                <a:latin typeface="Arial"/>
-              </a:rPr>
-              <a:t>SAUTÉED</a:t>
-            </a:r>
-            <a:r>
-              <a:rPr sz="2600" b="1">
-                <a:solidFill>
-                  <a:srgbClr val="FFFFFF"/>
-                </a:solidFill>
-                <a:latin typeface="Arial"/>
-              </a:rPr>
-              <a:t> Mushrooms</a:t>
-            </a:r>
-          </a:p>
-        </p:txBody>
-      </p:sp>
+      </p:pic>
       <p:grpSp>
         <p:nvGrpSpPr>
-          <p:cNvPr id="10" name="Checker band"/>
+          <p:cNvPr id="6" name="Checker band"/>
           <p:cNvGrpSpPr/>
           <p:nvPr/>
         </p:nvGrpSpPr>
@@ -10324,7 +8972,7 @@
         </p:grpSpPr>
         <p:sp>
           <p:nvSpPr>
-            <p:cNvPr id="11" name="Rectangle 10"/>
+            <p:cNvPr id="7" name="Rectangle 6"/>
             <p:cNvSpPr/>
             <p:nvPr/>
           </p:nvSpPr>
@@ -10354,13 +9002,133 @@
         </p:sp>
         <p:sp>
           <p:nvSpPr>
+            <p:cNvPr id="8" name="Rectangle 7"/>
+            <p:cNvSpPr/>
+            <p:nvPr/>
+          </p:nvSpPr>
+          <p:spPr>
+            <a:xfrm>
+              <a:off x="0" y="6451600"/>
+              <a:ext cx="203200" cy="203200"/>
+            </a:xfrm>
+            <a:prstGeom prst="rect">
+              <a:avLst/>
+            </a:prstGeom>
+            <a:solidFill>
+              <a:srgbClr val="ED1C24"/>
+            </a:solidFill>
+            <a:ln>
+              <a:noFill/>
+            </a:ln>
+            <a:effectLst/>
+          </p:spPr>
+          <p:txBody>
+            <a:bodyPr rtlCol="0" anchor="ctr"/>
+            <a:lstStyle/>
+            <a:p>
+              <a:pPr algn="ctr"/>
+            </a:p>
+          </p:txBody>
+        </p:sp>
+        <p:sp>
+          <p:nvSpPr>
+            <p:cNvPr id="9" name="Rectangle 8"/>
+            <p:cNvSpPr/>
+            <p:nvPr/>
+          </p:nvSpPr>
+          <p:spPr>
+            <a:xfrm>
+              <a:off x="406400" y="6451600"/>
+              <a:ext cx="203200" cy="203200"/>
+            </a:xfrm>
+            <a:prstGeom prst="rect">
+              <a:avLst/>
+            </a:prstGeom>
+            <a:solidFill>
+              <a:srgbClr val="ED1C24"/>
+            </a:solidFill>
+            <a:ln>
+              <a:noFill/>
+            </a:ln>
+            <a:effectLst/>
+          </p:spPr>
+          <p:txBody>
+            <a:bodyPr rtlCol="0" anchor="ctr"/>
+            <a:lstStyle/>
+            <a:p>
+              <a:pPr algn="ctr"/>
+            </a:p>
+          </p:txBody>
+        </p:sp>
+        <p:sp>
+          <p:nvSpPr>
+            <p:cNvPr id="10" name="Rectangle 9"/>
+            <p:cNvSpPr/>
+            <p:nvPr/>
+          </p:nvSpPr>
+          <p:spPr>
+            <a:xfrm>
+              <a:off x="812800" y="6451600"/>
+              <a:ext cx="203200" cy="203200"/>
+            </a:xfrm>
+            <a:prstGeom prst="rect">
+              <a:avLst/>
+            </a:prstGeom>
+            <a:solidFill>
+              <a:srgbClr val="ED1C24"/>
+            </a:solidFill>
+            <a:ln>
+              <a:noFill/>
+            </a:ln>
+            <a:effectLst/>
+          </p:spPr>
+          <p:txBody>
+            <a:bodyPr rtlCol="0" anchor="ctr"/>
+            <a:lstStyle/>
+            <a:p>
+              <a:pPr algn="ctr"/>
+            </a:p>
+          </p:txBody>
+        </p:sp>
+        <p:sp>
+          <p:nvSpPr>
+            <p:cNvPr id="11" name="Rectangle 10"/>
+            <p:cNvSpPr/>
+            <p:nvPr/>
+          </p:nvSpPr>
+          <p:spPr>
+            <a:xfrm>
+              <a:off x="1219200" y="6451600"/>
+              <a:ext cx="203200" cy="203200"/>
+            </a:xfrm>
+            <a:prstGeom prst="rect">
+              <a:avLst/>
+            </a:prstGeom>
+            <a:solidFill>
+              <a:srgbClr val="ED1C24"/>
+            </a:solidFill>
+            <a:ln>
+              <a:noFill/>
+            </a:ln>
+            <a:effectLst/>
+          </p:spPr>
+          <p:txBody>
+            <a:bodyPr rtlCol="0" anchor="ctr"/>
+            <a:lstStyle/>
+            <a:p>
+              <a:pPr algn="ctr"/>
+            </a:p>
+          </p:txBody>
+        </p:sp>
+        <p:sp>
+          <p:nvSpPr>
             <p:cNvPr id="12" name="Rectangle 11"/>
             <p:cNvSpPr/>
             <p:nvPr/>
           </p:nvSpPr>
           <p:spPr>
             <a:xfrm>
-              <a:off x="0" y="6451600"/>
+              <a:off x="1625600" y="6451600"/>
               <a:ext cx="203200" cy="203200"/>
             </a:xfrm>
             <a:prstGeom prst="rect">
@@ -10390,7 +9158,7 @@
           </p:nvSpPr>
           <p:spPr>
             <a:xfrm>
-              <a:off x="406400" y="6451600"/>
+              <a:off x="2032000" y="6451600"/>
               <a:ext cx="203200" cy="203200"/>
             </a:xfrm>
             <a:prstGeom prst="rect">
@@ -10420,7 +9188,7 @@
           </p:nvSpPr>
           <p:spPr>
             <a:xfrm>
-              <a:off x="812800" y="6451600"/>
+              <a:off x="2438400" y="6451600"/>
               <a:ext cx="203200" cy="203200"/>
             </a:xfrm>
             <a:prstGeom prst="rect">
@@ -10450,7 +9218,7 @@
           </p:nvSpPr>
           <p:spPr>
             <a:xfrm>
-              <a:off x="1219200" y="6451600"/>
+              <a:off x="2844800" y="6451600"/>
               <a:ext cx="203200" cy="203200"/>
             </a:xfrm>
             <a:prstGeom prst="rect">
@@ -10480,7 +9248,7 @@
           </p:nvSpPr>
           <p:spPr>
             <a:xfrm>
-              <a:off x="1625600" y="6451600"/>
+              <a:off x="3251200" y="6451600"/>
               <a:ext cx="203200" cy="203200"/>
             </a:xfrm>
             <a:prstGeom prst="rect">
@@ -10510,7 +9278,7 @@
           </p:nvSpPr>
           <p:spPr>
             <a:xfrm>
-              <a:off x="2032000" y="6451600"/>
+              <a:off x="3657600" y="6451600"/>
               <a:ext cx="203200" cy="203200"/>
             </a:xfrm>
             <a:prstGeom prst="rect">
@@ -10540,7 +9308,7 @@
           </p:nvSpPr>
           <p:spPr>
             <a:xfrm>
-              <a:off x="2438400" y="6451600"/>
+              <a:off x="4064000" y="6451600"/>
               <a:ext cx="203200" cy="203200"/>
             </a:xfrm>
             <a:prstGeom prst="rect">
@@ -10570,7 +9338,7 @@
           </p:nvSpPr>
           <p:spPr>
             <a:xfrm>
-              <a:off x="2844800" y="6451600"/>
+              <a:off x="4470400" y="6451600"/>
               <a:ext cx="203200" cy="203200"/>
             </a:xfrm>
             <a:prstGeom prst="rect">
@@ -10600,7 +9368,7 @@
           </p:nvSpPr>
           <p:spPr>
             <a:xfrm>
-              <a:off x="3251200" y="6451600"/>
+              <a:off x="4876800" y="6451600"/>
               <a:ext cx="203200" cy="203200"/>
             </a:xfrm>
             <a:prstGeom prst="rect">
@@ -10630,7 +9398,7 @@
           </p:nvSpPr>
           <p:spPr>
             <a:xfrm>
-              <a:off x="3657600" y="6451600"/>
+              <a:off x="5283200" y="6451600"/>
               <a:ext cx="203200" cy="203200"/>
             </a:xfrm>
             <a:prstGeom prst="rect">
@@ -10660,7 +9428,7 @@
           </p:nvSpPr>
           <p:spPr>
             <a:xfrm>
-              <a:off x="4064000" y="6451600"/>
+              <a:off x="5689600" y="6451600"/>
               <a:ext cx="203200" cy="203200"/>
             </a:xfrm>
             <a:prstGeom prst="rect">
@@ -10690,7 +9458,7 @@
           </p:nvSpPr>
           <p:spPr>
             <a:xfrm>
-              <a:off x="4470400" y="6451600"/>
+              <a:off x="6096000" y="6451600"/>
               <a:ext cx="203200" cy="203200"/>
             </a:xfrm>
             <a:prstGeom prst="rect">
@@ -10720,7 +9488,7 @@
           </p:nvSpPr>
           <p:spPr>
             <a:xfrm>
-              <a:off x="4876800" y="6451600"/>
+              <a:off x="6502400" y="6451600"/>
               <a:ext cx="203200" cy="203200"/>
             </a:xfrm>
             <a:prstGeom prst="rect">
@@ -10750,7 +9518,7 @@
           </p:nvSpPr>
           <p:spPr>
             <a:xfrm>
-              <a:off x="5283200" y="6451600"/>
+              <a:off x="6908800" y="6451600"/>
               <a:ext cx="203200" cy="203200"/>
             </a:xfrm>
             <a:prstGeom prst="rect">
@@ -10780,7 +9548,7 @@
           </p:nvSpPr>
           <p:spPr>
             <a:xfrm>
-              <a:off x="5689600" y="6451600"/>
+              <a:off x="7315200" y="6451600"/>
               <a:ext cx="203200" cy="203200"/>
             </a:xfrm>
             <a:prstGeom prst="rect">
@@ -10810,7 +9578,7 @@
           </p:nvSpPr>
           <p:spPr>
             <a:xfrm>
-              <a:off x="6096000" y="6451600"/>
+              <a:off x="7721600" y="6451600"/>
               <a:ext cx="203200" cy="203200"/>
             </a:xfrm>
             <a:prstGeom prst="rect">
@@ -10840,7 +9608,7 @@
           </p:nvSpPr>
           <p:spPr>
             <a:xfrm>
-              <a:off x="6502400" y="6451600"/>
+              <a:off x="8128000" y="6451600"/>
               <a:ext cx="203200" cy="203200"/>
             </a:xfrm>
             <a:prstGeom prst="rect">
@@ -10870,7 +9638,7 @@
           </p:nvSpPr>
           <p:spPr>
             <a:xfrm>
-              <a:off x="6908800" y="6451600"/>
+              <a:off x="8534400" y="6451600"/>
               <a:ext cx="203200" cy="203200"/>
             </a:xfrm>
             <a:prstGeom prst="rect">
@@ -10900,7 +9668,7 @@
           </p:nvSpPr>
           <p:spPr>
             <a:xfrm>
-              <a:off x="7315200" y="6451600"/>
+              <a:off x="8940800" y="6451600"/>
               <a:ext cx="203200" cy="203200"/>
             </a:xfrm>
             <a:prstGeom prst="rect">
@@ -10930,7 +9698,7 @@
           </p:nvSpPr>
           <p:spPr>
             <a:xfrm>
-              <a:off x="7721600" y="6451600"/>
+              <a:off x="9347200" y="6451600"/>
               <a:ext cx="203200" cy="203200"/>
             </a:xfrm>
             <a:prstGeom prst="rect">
@@ -10960,7 +9728,7 @@
           </p:nvSpPr>
           <p:spPr>
             <a:xfrm>
-              <a:off x="8128000" y="6451600"/>
+              <a:off x="9753600" y="6451600"/>
               <a:ext cx="203200" cy="203200"/>
             </a:xfrm>
             <a:prstGeom prst="rect">
@@ -10990,7 +9758,7 @@
           </p:nvSpPr>
           <p:spPr>
             <a:xfrm>
-              <a:off x="8534400" y="6451600"/>
+              <a:off x="10160000" y="6451600"/>
               <a:ext cx="203200" cy="203200"/>
             </a:xfrm>
             <a:prstGeom prst="rect">
@@ -11020,7 +9788,7 @@
           </p:nvSpPr>
           <p:spPr>
             <a:xfrm>
-              <a:off x="8940800" y="6451600"/>
+              <a:off x="10566400" y="6451600"/>
               <a:ext cx="203200" cy="203200"/>
             </a:xfrm>
             <a:prstGeom prst="rect">
@@ -11050,7 +9818,7 @@
           </p:nvSpPr>
           <p:spPr>
             <a:xfrm>
-              <a:off x="9347200" y="6451600"/>
+              <a:off x="10972800" y="6451600"/>
               <a:ext cx="203200" cy="203200"/>
             </a:xfrm>
             <a:prstGeom prst="rect">
@@ -11080,7 +9848,7 @@
           </p:nvSpPr>
           <p:spPr>
             <a:xfrm>
-              <a:off x="9753600" y="6451600"/>
+              <a:off x="11379200" y="6451600"/>
               <a:ext cx="203200" cy="203200"/>
             </a:xfrm>
             <a:prstGeom prst="rect">
@@ -11110,7 +9878,7 @@
           </p:nvSpPr>
           <p:spPr>
             <a:xfrm>
-              <a:off x="10160000" y="6451600"/>
+              <a:off x="11785600" y="6451600"/>
               <a:ext cx="203200" cy="203200"/>
             </a:xfrm>
             <a:prstGeom prst="rect">
@@ -11140,7 +9908,7 @@
           </p:nvSpPr>
           <p:spPr>
             <a:xfrm>
-              <a:off x="10566400" y="6451600"/>
+              <a:off x="203200" y="6654800"/>
               <a:ext cx="203200" cy="203200"/>
             </a:xfrm>
             <a:prstGeom prst="rect">
@@ -11170,7 +9938,7 @@
           </p:nvSpPr>
           <p:spPr>
             <a:xfrm>
-              <a:off x="10972800" y="6451600"/>
+              <a:off x="609600" y="6654800"/>
               <a:ext cx="203200" cy="203200"/>
             </a:xfrm>
             <a:prstGeom prst="rect">
@@ -11200,7 +9968,7 @@
           </p:nvSpPr>
           <p:spPr>
             <a:xfrm>
-              <a:off x="11379200" y="6451600"/>
+              <a:off x="1016000" y="6654800"/>
               <a:ext cx="203200" cy="203200"/>
             </a:xfrm>
             <a:prstGeom prst="rect">
@@ -11230,7 +9998,7 @@
           </p:nvSpPr>
           <p:spPr>
             <a:xfrm>
-              <a:off x="11785600" y="6451600"/>
+              <a:off x="1422400" y="6654800"/>
               <a:ext cx="203200" cy="203200"/>
             </a:xfrm>
             <a:prstGeom prst="rect">
@@ -11260,7 +10028,7 @@
           </p:nvSpPr>
           <p:spPr>
             <a:xfrm>
-              <a:off x="203200" y="6654800"/>
+              <a:off x="1828800" y="6654800"/>
               <a:ext cx="203200" cy="203200"/>
             </a:xfrm>
             <a:prstGeom prst="rect">
@@ -11290,7 +10058,7 @@
           </p:nvSpPr>
           <p:spPr>
             <a:xfrm>
-              <a:off x="609600" y="6654800"/>
+              <a:off x="2235200" y="6654800"/>
               <a:ext cx="203200" cy="203200"/>
             </a:xfrm>
             <a:prstGeom prst="rect">
@@ -11320,7 +10088,7 @@
           </p:nvSpPr>
           <p:spPr>
             <a:xfrm>
-              <a:off x="1016000" y="6654800"/>
+              <a:off x="2641600" y="6654800"/>
               <a:ext cx="203200" cy="203200"/>
             </a:xfrm>
             <a:prstGeom prst="rect">
@@ -11350,7 +10118,7 @@
           </p:nvSpPr>
           <p:spPr>
             <a:xfrm>
-              <a:off x="1422400" y="6654800"/>
+              <a:off x="3048000" y="6654800"/>
               <a:ext cx="203200" cy="203200"/>
             </a:xfrm>
             <a:prstGeom prst="rect">
@@ -11380,7 +10148,7 @@
           </p:nvSpPr>
           <p:spPr>
             <a:xfrm>
-              <a:off x="1828800" y="6654800"/>
+              <a:off x="3454400" y="6654800"/>
               <a:ext cx="203200" cy="203200"/>
             </a:xfrm>
             <a:prstGeom prst="rect">
@@ -11410,7 +10178,7 @@
           </p:nvSpPr>
           <p:spPr>
             <a:xfrm>
-              <a:off x="2235200" y="6654800"/>
+              <a:off x="3860800" y="6654800"/>
               <a:ext cx="203200" cy="203200"/>
             </a:xfrm>
             <a:prstGeom prst="rect">
@@ -11440,7 +10208,7 @@
           </p:nvSpPr>
           <p:spPr>
             <a:xfrm>
-              <a:off x="2641600" y="6654800"/>
+              <a:off x="4267200" y="6654800"/>
               <a:ext cx="203200" cy="203200"/>
             </a:xfrm>
             <a:prstGeom prst="rect">
@@ -11470,7 +10238,7 @@
           </p:nvSpPr>
           <p:spPr>
             <a:xfrm>
-              <a:off x="3048000" y="6654800"/>
+              <a:off x="4673600" y="6654800"/>
               <a:ext cx="203200" cy="203200"/>
             </a:xfrm>
             <a:prstGeom prst="rect">
@@ -11500,7 +10268,7 @@
           </p:nvSpPr>
           <p:spPr>
             <a:xfrm>
-              <a:off x="3454400" y="6654800"/>
+              <a:off x="5080000" y="6654800"/>
               <a:ext cx="203200" cy="203200"/>
             </a:xfrm>
             <a:prstGeom prst="rect">
@@ -11530,7 +10298,7 @@
           </p:nvSpPr>
           <p:spPr>
             <a:xfrm>
-              <a:off x="3860800" y="6654800"/>
+              <a:off x="5486400" y="6654800"/>
               <a:ext cx="203200" cy="203200"/>
             </a:xfrm>
             <a:prstGeom prst="rect">
@@ -11560,7 +10328,7 @@
           </p:nvSpPr>
           <p:spPr>
             <a:xfrm>
-              <a:off x="4267200" y="6654800"/>
+              <a:off x="5892800" y="6654800"/>
               <a:ext cx="203200" cy="203200"/>
             </a:xfrm>
             <a:prstGeom prst="rect">
@@ -11590,7 +10358,7 @@
           </p:nvSpPr>
           <p:spPr>
             <a:xfrm>
-              <a:off x="4673600" y="6654800"/>
+              <a:off x="6299200" y="6654800"/>
               <a:ext cx="203200" cy="203200"/>
             </a:xfrm>
             <a:prstGeom prst="rect">
@@ -11620,7 +10388,7 @@
           </p:nvSpPr>
           <p:spPr>
             <a:xfrm>
-              <a:off x="5080000" y="6654800"/>
+              <a:off x="6705600" y="6654800"/>
               <a:ext cx="203200" cy="203200"/>
             </a:xfrm>
             <a:prstGeom prst="rect">
@@ -11650,7 +10418,7 @@
           </p:nvSpPr>
           <p:spPr>
             <a:xfrm>
-              <a:off x="5486400" y="6654800"/>
+              <a:off x="7112000" y="6654800"/>
               <a:ext cx="203200" cy="203200"/>
             </a:xfrm>
             <a:prstGeom prst="rect">
@@ -11680,7 +10448,7 @@
           </p:nvSpPr>
           <p:spPr>
             <a:xfrm>
-              <a:off x="5892800" y="6654800"/>
+              <a:off x="7518400" y="6654800"/>
               <a:ext cx="203200" cy="203200"/>
             </a:xfrm>
             <a:prstGeom prst="rect">
@@ -11710,7 +10478,7 @@
           </p:nvSpPr>
           <p:spPr>
             <a:xfrm>
-              <a:off x="6299200" y="6654800"/>
+              <a:off x="7924800" y="6654800"/>
               <a:ext cx="203200" cy="203200"/>
             </a:xfrm>
             <a:prstGeom prst="rect">
@@ -11740,7 +10508,7 @@
           </p:nvSpPr>
           <p:spPr>
             <a:xfrm>
-              <a:off x="6705600" y="6654800"/>
+              <a:off x="8331200" y="6654800"/>
               <a:ext cx="203200" cy="203200"/>
             </a:xfrm>
             <a:prstGeom prst="rect">
@@ -11770,7 +10538,7 @@
           </p:nvSpPr>
           <p:spPr>
             <a:xfrm>
-              <a:off x="7112000" y="6654800"/>
+              <a:off x="8737600" y="6654800"/>
               <a:ext cx="203200" cy="203200"/>
             </a:xfrm>
             <a:prstGeom prst="rect">
@@ -11800,7 +10568,7 @@
           </p:nvSpPr>
           <p:spPr>
             <a:xfrm>
-              <a:off x="7518400" y="6654800"/>
+              <a:off x="9144000" y="6654800"/>
               <a:ext cx="203200" cy="203200"/>
             </a:xfrm>
             <a:prstGeom prst="rect">
@@ -11830,7 +10598,7 @@
           </p:nvSpPr>
           <p:spPr>
             <a:xfrm>
-              <a:off x="7924800" y="6654800"/>
+              <a:off x="9550400" y="6654800"/>
               <a:ext cx="203200" cy="203200"/>
             </a:xfrm>
             <a:prstGeom prst="rect">
@@ -11860,7 +10628,7 @@
           </p:nvSpPr>
           <p:spPr>
             <a:xfrm>
-              <a:off x="8331200" y="6654800"/>
+              <a:off x="9956800" y="6654800"/>
               <a:ext cx="203200" cy="203200"/>
             </a:xfrm>
             <a:prstGeom prst="rect">
@@ -11890,7 +10658,7 @@
           </p:nvSpPr>
           <p:spPr>
             <a:xfrm>
-              <a:off x="8737600" y="6654800"/>
+              <a:off x="10363200" y="6654800"/>
               <a:ext cx="203200" cy="203200"/>
             </a:xfrm>
             <a:prstGeom prst="rect">
@@ -11920,7 +10688,7 @@
           </p:nvSpPr>
           <p:spPr>
             <a:xfrm>
-              <a:off x="9144000" y="6654800"/>
+              <a:off x="10769600" y="6654800"/>
               <a:ext cx="203200" cy="203200"/>
             </a:xfrm>
             <a:prstGeom prst="rect">
@@ -11950,7 +10718,7 @@
           </p:nvSpPr>
           <p:spPr>
             <a:xfrm>
-              <a:off x="9550400" y="6654800"/>
+              <a:off x="11176000" y="6654800"/>
               <a:ext cx="203200" cy="203200"/>
             </a:xfrm>
             <a:prstGeom prst="rect">
@@ -11980,7 +10748,7 @@
           </p:nvSpPr>
           <p:spPr>
             <a:xfrm>
-              <a:off x="9956800" y="6654800"/>
+              <a:off x="11582400" y="6654800"/>
               <a:ext cx="203200" cy="203200"/>
             </a:xfrm>
             <a:prstGeom prst="rect">
@@ -12005,126 +10773,6 @@
         <p:sp>
           <p:nvSpPr>
             <p:cNvPr id="67" name="Rectangle 66"/>
-            <p:cNvSpPr/>
-            <p:nvPr/>
-          </p:nvSpPr>
-          <p:spPr>
-            <a:xfrm>
-              <a:off x="10363200" y="6654800"/>
-              <a:ext cx="203200" cy="203200"/>
-            </a:xfrm>
-            <a:prstGeom prst="rect">
-              <a:avLst/>
-            </a:prstGeom>
-            <a:solidFill>
-              <a:srgbClr val="ED1C24"/>
-            </a:solidFill>
-            <a:ln>
-              <a:noFill/>
-            </a:ln>
-            <a:effectLst/>
-          </p:spPr>
-          <p:txBody>
-            <a:bodyPr rtlCol="0" anchor="ctr"/>
-            <a:lstStyle/>
-            <a:p>
-              <a:pPr algn="ctr"/>
-            </a:p>
-          </p:txBody>
-        </p:sp>
-        <p:sp>
-          <p:nvSpPr>
-            <p:cNvPr id="68" name="Rectangle 67"/>
-            <p:cNvSpPr/>
-            <p:nvPr/>
-          </p:nvSpPr>
-          <p:spPr>
-            <a:xfrm>
-              <a:off x="10769600" y="6654800"/>
-              <a:ext cx="203200" cy="203200"/>
-            </a:xfrm>
-            <a:prstGeom prst="rect">
-              <a:avLst/>
-            </a:prstGeom>
-            <a:solidFill>
-              <a:srgbClr val="ED1C24"/>
-            </a:solidFill>
-            <a:ln>
-              <a:noFill/>
-            </a:ln>
-            <a:effectLst/>
-          </p:spPr>
-          <p:txBody>
-            <a:bodyPr rtlCol="0" anchor="ctr"/>
-            <a:lstStyle/>
-            <a:p>
-              <a:pPr algn="ctr"/>
-            </a:p>
-          </p:txBody>
-        </p:sp>
-        <p:sp>
-          <p:nvSpPr>
-            <p:cNvPr id="69" name="Rectangle 68"/>
-            <p:cNvSpPr/>
-            <p:nvPr/>
-          </p:nvSpPr>
-          <p:spPr>
-            <a:xfrm>
-              <a:off x="11176000" y="6654800"/>
-              <a:ext cx="203200" cy="203200"/>
-            </a:xfrm>
-            <a:prstGeom prst="rect">
-              <a:avLst/>
-            </a:prstGeom>
-            <a:solidFill>
-              <a:srgbClr val="ED1C24"/>
-            </a:solidFill>
-            <a:ln>
-              <a:noFill/>
-            </a:ln>
-            <a:effectLst/>
-          </p:spPr>
-          <p:txBody>
-            <a:bodyPr rtlCol="0" anchor="ctr"/>
-            <a:lstStyle/>
-            <a:p>
-              <a:pPr algn="ctr"/>
-            </a:p>
-          </p:txBody>
-        </p:sp>
-        <p:sp>
-          <p:nvSpPr>
-            <p:cNvPr id="70" name="Rectangle 69"/>
-            <p:cNvSpPr/>
-            <p:nvPr/>
-          </p:nvSpPr>
-          <p:spPr>
-            <a:xfrm>
-              <a:off x="11582400" y="6654800"/>
-              <a:ext cx="203200" cy="203200"/>
-            </a:xfrm>
-            <a:prstGeom prst="rect">
-              <a:avLst/>
-            </a:prstGeom>
-            <a:solidFill>
-              <a:srgbClr val="ED1C24"/>
-            </a:solidFill>
-            <a:ln>
-              <a:noFill/>
-            </a:ln>
-            <a:effectLst/>
-          </p:spPr>
-          <p:txBody>
-            <a:bodyPr rtlCol="0" anchor="ctr"/>
-            <a:lstStyle/>
-            <a:p>
-              <a:pPr algn="ctr"/>
-            </a:p>
-          </p:txBody>
-        </p:sp>
-        <p:sp>
-          <p:nvSpPr>
-            <p:cNvPr id="71" name="Rectangle 70"/>
             <p:cNvSpPr/>
             <p:nvPr/>
           </p:nvSpPr>
@@ -12179,64 +10827,9 @@
         <p:nvPr/>
       </p:nvGrpSpPr>
       <p:grpSpPr/>
-      <p:sp>
-        <p:nvSpPr>
-          <p:cNvPr id="2" name="Title 1"/>
-          <p:cNvSpPr>
-            <a:spLocks noGrp="1"/>
-          </p:cNvSpPr>
-          <p:nvPr>
-            <p:ph type="title"/>
-          </p:nvPr>
-        </p:nvSpPr>
-        <p:spPr>
-          <a:xfrm>
-            <a:off x="548640" y="566928"/>
-            <a:ext cx="5760720" cy="1371600"/>
-          </a:xfrm>
-        </p:spPr>
-        <p:txBody>
-          <a:bodyPr anchor="t" wrap="square" lIns="0" rIns="0" tIns="0" bIns="0">
-            <a:noAutofit/>
-          </a:bodyPr>
-          <a:lstStyle/>
-          <a:p>
-            <a:pPr algn="l">
-              <a:lnSpc>
-                <a:spcPct val="92000"/>
-              </a:lnSpc>
-            </a:pPr>
-            <a:r>
-              <a:rPr sz="4400" b="1">
-                <a:solidFill>
-                  <a:srgbClr val="FFFFFF"/>
-                </a:solidFill>
-                <a:latin typeface="Arial"/>
-              </a:rPr>
-              <a:t>Cajun Fries</a:t>
-            </a:r>
-          </a:p>
-          <a:p>
-            <a:pPr algn="l">
-              <a:lnSpc>
-                <a:spcPct val="92000"/>
-              </a:lnSpc>
-            </a:pPr>
-            <a:r>
-              <a:rPr sz="4400" b="1">
-                <a:solidFill>
-                  <a:srgbClr val="ED1C24"/>
-                </a:solidFill>
-                <a:latin typeface="Arial"/>
-              </a:rPr>
-              <a:t>&amp; Conclusion</a:t>
-            </a:r>
-          </a:p>
-        </p:txBody>
-      </p:sp>
       <p:pic>
         <p:nvPicPr>
-          <p:cNvPr id="3" name="Photo cajun_fries" descr="Five Guys Cajun fries in a white cup"/>
+          <p:cNvPr id="2" name="Photo fries_frying" descr="Hand-cut fries frying in hot oil"/>
           <p:cNvPicPr>
             <a:picLocks noChangeAspect="1"/>
           </p:cNvPicPr>
@@ -12244,35 +10837,37 @@
         </p:nvPicPr>
         <p:blipFill>
           <a:blip r:embed="rId2"/>
-          <a:srcRect l="14379" r="34379"/>
+          <a:srcRect t="12229" b="12229"/>
           <a:stretch>
             <a:fillRect/>
           </a:stretch>
         </p:blipFill>
         <p:spPr>
           <a:xfrm>
-            <a:off x="6309360" y="0"/>
-            <a:ext cx="5882640" cy="6451600"/>
+            <a:off x="457200" y="411480"/>
+            <a:ext cx="4846320" cy="2745740"/>
           </a:xfrm>
-          <a:prstGeom prst="rect">
-            <a:avLst/>
+          <a:prstGeom prst="roundRect">
+            <a:avLst>
+              <a:gd name="adj" fmla="val 4662"/>
+            </a:avLst>
           </a:prstGeom>
         </p:spPr>
       </p:pic>
       <p:sp>
         <p:nvSpPr>
-          <p:cNvPr id="4" name="Keyword peanut oil"/>
+          <p:cNvPr id="3" name="Map panel"/>
           <p:cNvSpPr/>
           <p:nvPr/>
         </p:nvSpPr>
         <p:spPr>
           <a:xfrm>
-            <a:off x="548640" y="2240280"/>
-            <a:ext cx="4846320" cy="914400"/>
+            <a:off x="457200" y="3340100"/>
+            <a:ext cx="4846320" cy="2745740"/>
           </a:xfrm>
           <a:prstGeom prst="roundRect">
             <a:avLst>
-              <a:gd name="adj" fmla="val 14000"/>
+              <a:gd name="adj" fmla="val 4662"/>
             </a:avLst>
           </a:prstGeom>
           <a:solidFill>
@@ -12291,39 +10886,9 @@
           </a:p>
         </p:txBody>
       </p:sp>
-      <p:sp>
-        <p:nvSpPr>
-          <p:cNvPr id="5" name="Badge droplet"/>
-          <p:cNvSpPr/>
-          <p:nvPr/>
-        </p:nvSpPr>
-        <p:spPr>
-          <a:xfrm>
-            <a:off x="713232" y="2395728"/>
-            <a:ext cx="603504" cy="603504"/>
-          </a:xfrm>
-          <a:prstGeom prst="ellipse">
-            <a:avLst/>
-          </a:prstGeom>
-          <a:solidFill>
-            <a:srgbClr val="ED1C24"/>
-          </a:solidFill>
-          <a:ln>
-            <a:noFill/>
-          </a:ln>
-          <a:effectLst/>
-        </p:spPr>
-        <p:txBody>
-          <a:bodyPr rtlCol="0" anchor="ctr"/>
-          <a:lstStyle/>
-          <a:p>
-            <a:pPr algn="ctr"/>
-          </a:p>
-        </p:txBody>
-      </p:sp>
       <p:pic>
         <p:nvPicPr>
-          <p:cNvPr id="6" name="Icon droplet" descr="droplet icon"/>
+          <p:cNvPr id="4" name="Photo five_guys_world_map" descr="World map with the countries that have Five Guys restaurants in red"/>
           <p:cNvPicPr>
             <a:picLocks noChangeAspect="1"/>
           </p:cNvPicPr>
@@ -12337,182 +10902,44 @@
         </p:blipFill>
         <p:spPr>
           <a:xfrm>
-            <a:off x="846003" y="2528499"/>
-            <a:ext cx="337962" cy="337962"/>
+            <a:off x="640080" y="3575328"/>
+            <a:ext cx="4480560" cy="2275284"/>
           </a:xfrm>
           <a:prstGeom prst="rect">
             <a:avLst/>
           </a:prstGeom>
         </p:spPr>
       </p:pic>
-      <p:sp>
-        <p:nvSpPr>
-          <p:cNvPr id="7" name="TextBox 6"/>
-          <p:cNvSpPr txBox="1"/>
+      <p:pic>
+        <p:nvPicPr>
+          <p:cNvPr id="5" name="Photo cajun_fries" descr="Five Guys Cajun fries in a white cup"/>
+          <p:cNvPicPr>
+            <a:picLocks noChangeAspect="1"/>
+          </p:cNvPicPr>
           <p:nvPr/>
-        </p:nvSpPr>
+        </p:nvPicPr>
+        <p:blipFill>
+          <a:blip r:embed="rId4"/>
+          <a:srcRect l="11058" r="27058"/>
+          <a:stretch>
+            <a:fillRect/>
+          </a:stretch>
+        </p:blipFill>
         <p:spPr>
           <a:xfrm>
-            <a:off x="1536192" y="2240280"/>
-            <a:ext cx="3749040" cy="914400"/>
-          </a:xfrm>
-          <a:prstGeom prst="rect">
-            <a:avLst/>
-          </a:prstGeom>
-          <a:noFill/>
-        </p:spPr>
-        <p:txBody>
-          <a:bodyPr wrap="square" anchor="ctr" lIns="0" rIns="0" tIns="0" bIns="0">
-            <a:noAutofit/>
-          </a:bodyPr>
-          <a:lstStyle/>
-          <a:p>
-            <a:pPr algn="l"/>
-            <a:r>
-              <a:rPr sz="2800" b="1">
-                <a:solidFill>
-                  <a:srgbClr val="FFFFFF"/>
-                </a:solidFill>
-                <a:latin typeface="Arial"/>
-              </a:rPr>
-              <a:t>100% Peanut Oil</a:t>
-            </a:r>
-          </a:p>
-        </p:txBody>
-      </p:sp>
-      <p:sp>
-        <p:nvSpPr>
-          <p:cNvPr id="8" name="Step blanch"/>
-          <p:cNvSpPr/>
-          <p:nvPr/>
-        </p:nvSpPr>
-        <p:spPr>
-          <a:xfrm>
-            <a:off x="548640" y="3474720"/>
-            <a:ext cx="4846320" cy="868680"/>
+            <a:off x="5486400" y="411480"/>
+            <a:ext cx="6248400" cy="5674360"/>
           </a:xfrm>
           <a:prstGeom prst="roundRect">
             <a:avLst>
-              <a:gd name="adj" fmla="val 14736"/>
+              <a:gd name="adj" fmla="val 2256"/>
             </a:avLst>
           </a:prstGeom>
-          <a:solidFill>
-            <a:srgbClr val="ED1C24"/>
-          </a:solidFill>
-          <a:ln>
-            <a:noFill/>
-          </a:ln>
-          <a:effectLst/>
         </p:spPr>
-        <p:txBody>
-          <a:bodyPr rtlCol="0" anchor="ctr" wrap="square" lIns="0" rIns="0" tIns="0" bIns="0">
-            <a:noAutofit/>
-          </a:bodyPr>
-          <a:lstStyle/>
-          <a:p>
-            <a:pPr algn="ctr"/>
-            <a:r>
-              <a:rPr sz="3600" b="1">
-                <a:solidFill>
-                  <a:srgbClr val="FFFFFF"/>
-                </a:solidFill>
-                <a:latin typeface="Arial"/>
-              </a:rPr>
-              <a:t>BLANCH</a:t>
-            </a:r>
-          </a:p>
-        </p:txBody>
-      </p:sp>
-      <p:sp>
-        <p:nvSpPr>
-          <p:cNvPr id="9" name="TextBox 8"/>
-          <p:cNvSpPr txBox="1"/>
-          <p:nvPr/>
-        </p:nvSpPr>
-        <p:spPr>
-          <a:xfrm>
-            <a:off x="548640" y="4361688"/>
-            <a:ext cx="4846320" cy="548640"/>
-          </a:xfrm>
-          <a:prstGeom prst="rect">
-            <a:avLst/>
-          </a:prstGeom>
-          <a:noFill/>
-        </p:spPr>
-        <p:txBody>
-          <a:bodyPr wrap="square" anchor="ctr" lIns="0" rIns="0" tIns="0" bIns="0">
-            <a:noAutofit/>
-          </a:bodyPr>
-          <a:lstStyle/>
-          <a:p>
-            <a:pPr algn="ctr"/>
-            <a:r>
-              <a:rPr sz="3000" b="1">
-                <a:solidFill>
-                  <a:srgbClr val="FFFFFF"/>
-                </a:solidFill>
-                <a:latin typeface="Arial"/>
-              </a:rPr>
-              <a:t>↓</a:t>
-            </a:r>
-          </a:p>
-        </p:txBody>
-      </p:sp>
-      <p:sp>
-        <p:nvSpPr>
-          <p:cNvPr id="10" name="Step deep-fry"/>
-          <p:cNvSpPr/>
-          <p:nvPr/>
-        </p:nvSpPr>
-        <p:spPr>
-          <a:xfrm>
-            <a:off x="548640" y="4937760"/>
-            <a:ext cx="4846320" cy="868680"/>
-          </a:xfrm>
-          <a:prstGeom prst="roundRect">
-            <a:avLst>
-              <a:gd name="adj" fmla="val 14736"/>
-            </a:avLst>
-          </a:prstGeom>
-          <a:solidFill>
-            <a:srgbClr val="ED1C24"/>
-          </a:solidFill>
-          <a:ln>
-            <a:noFill/>
-          </a:ln>
-          <a:effectLst/>
-        </p:spPr>
-        <p:txBody>
-          <a:bodyPr rtlCol="0" anchor="ctr" wrap="square" lIns="0" rIns="0" tIns="0" bIns="0">
-            <a:noAutofit/>
-          </a:bodyPr>
-          <a:lstStyle/>
-          <a:p>
-            <a:pPr algn="ctr"/>
-            <a:r>
-              <a:rPr sz="2400" b="0">
-                <a:solidFill>
-                  <a:srgbClr val="FFFFFF"/>
-                </a:solidFill>
-                <a:latin typeface="Arial"/>
-              </a:rPr>
-              <a:t>Double </a:t>
-            </a:r>
-            <a:r>
-              <a:rPr sz="3600" b="1">
-                <a:solidFill>
-                  <a:srgbClr val="FFFFFF"/>
-                </a:solidFill>
-                <a:latin typeface="Arial"/>
-              </a:rPr>
-              <a:t>DEEP-FRY</a:t>
-            </a:r>
-          </a:p>
-        </p:txBody>
-      </p:sp>
+      </p:pic>
       <p:grpSp>
         <p:nvGrpSpPr>
-          <p:cNvPr id="11" name="Checker band"/>
+          <p:cNvPr id="6" name="Checker band"/>
           <p:cNvGrpSpPr/>
           <p:nvPr/>
         </p:nvGrpSpPr>
@@ -12526,7 +10953,7 @@
         </p:grpSpPr>
         <p:sp>
           <p:nvSpPr>
-            <p:cNvPr id="12" name="Rectangle 11"/>
+            <p:cNvPr id="7" name="Rectangle 6"/>
             <p:cNvSpPr/>
             <p:nvPr/>
           </p:nvSpPr>
@@ -12556,13 +10983,163 @@
         </p:sp>
         <p:sp>
           <p:nvSpPr>
+            <p:cNvPr id="8" name="Rectangle 7"/>
+            <p:cNvSpPr/>
+            <p:nvPr/>
+          </p:nvSpPr>
+          <p:spPr>
+            <a:xfrm>
+              <a:off x="0" y="6451600"/>
+              <a:ext cx="203200" cy="203200"/>
+            </a:xfrm>
+            <a:prstGeom prst="rect">
+              <a:avLst/>
+            </a:prstGeom>
+            <a:solidFill>
+              <a:srgbClr val="ED1C24"/>
+            </a:solidFill>
+            <a:ln>
+              <a:noFill/>
+            </a:ln>
+            <a:effectLst/>
+          </p:spPr>
+          <p:txBody>
+            <a:bodyPr rtlCol="0" anchor="ctr"/>
+            <a:lstStyle/>
+            <a:p>
+              <a:pPr algn="ctr"/>
+            </a:p>
+          </p:txBody>
+        </p:sp>
+        <p:sp>
+          <p:nvSpPr>
+            <p:cNvPr id="9" name="Rectangle 8"/>
+            <p:cNvSpPr/>
+            <p:nvPr/>
+          </p:nvSpPr>
+          <p:spPr>
+            <a:xfrm>
+              <a:off x="406400" y="6451600"/>
+              <a:ext cx="203200" cy="203200"/>
+            </a:xfrm>
+            <a:prstGeom prst="rect">
+              <a:avLst/>
+            </a:prstGeom>
+            <a:solidFill>
+              <a:srgbClr val="ED1C24"/>
+            </a:solidFill>
+            <a:ln>
+              <a:noFill/>
+            </a:ln>
+            <a:effectLst/>
+          </p:spPr>
+          <p:txBody>
+            <a:bodyPr rtlCol="0" anchor="ctr"/>
+            <a:lstStyle/>
+            <a:p>
+              <a:pPr algn="ctr"/>
+            </a:p>
+          </p:txBody>
+        </p:sp>
+        <p:sp>
+          <p:nvSpPr>
+            <p:cNvPr id="10" name="Rectangle 9"/>
+            <p:cNvSpPr/>
+            <p:nvPr/>
+          </p:nvSpPr>
+          <p:spPr>
+            <a:xfrm>
+              <a:off x="812800" y="6451600"/>
+              <a:ext cx="203200" cy="203200"/>
+            </a:xfrm>
+            <a:prstGeom prst="rect">
+              <a:avLst/>
+            </a:prstGeom>
+            <a:solidFill>
+              <a:srgbClr val="ED1C24"/>
+            </a:solidFill>
+            <a:ln>
+              <a:noFill/>
+            </a:ln>
+            <a:effectLst/>
+          </p:spPr>
+          <p:txBody>
+            <a:bodyPr rtlCol="0" anchor="ctr"/>
+            <a:lstStyle/>
+            <a:p>
+              <a:pPr algn="ctr"/>
+            </a:p>
+          </p:txBody>
+        </p:sp>
+        <p:sp>
+          <p:nvSpPr>
+            <p:cNvPr id="11" name="Rectangle 10"/>
+            <p:cNvSpPr/>
+            <p:nvPr/>
+          </p:nvSpPr>
+          <p:spPr>
+            <a:xfrm>
+              <a:off x="1219200" y="6451600"/>
+              <a:ext cx="203200" cy="203200"/>
+            </a:xfrm>
+            <a:prstGeom prst="rect">
+              <a:avLst/>
+            </a:prstGeom>
+            <a:solidFill>
+              <a:srgbClr val="ED1C24"/>
+            </a:solidFill>
+            <a:ln>
+              <a:noFill/>
+            </a:ln>
+            <a:effectLst/>
+          </p:spPr>
+          <p:txBody>
+            <a:bodyPr rtlCol="0" anchor="ctr"/>
+            <a:lstStyle/>
+            <a:p>
+              <a:pPr algn="ctr"/>
+            </a:p>
+          </p:txBody>
+        </p:sp>
+        <p:sp>
+          <p:nvSpPr>
+            <p:cNvPr id="12" name="Rectangle 11"/>
+            <p:cNvSpPr/>
+            <p:nvPr/>
+          </p:nvSpPr>
+          <p:spPr>
+            <a:xfrm>
+              <a:off x="1625600" y="6451600"/>
+              <a:ext cx="203200" cy="203200"/>
+            </a:xfrm>
+            <a:prstGeom prst="rect">
+              <a:avLst/>
+            </a:prstGeom>
+            <a:solidFill>
+              <a:srgbClr val="ED1C24"/>
+            </a:solidFill>
+            <a:ln>
+              <a:noFill/>
+            </a:ln>
+            <a:effectLst/>
+          </p:spPr>
+          <p:txBody>
+            <a:bodyPr rtlCol="0" anchor="ctr"/>
+            <a:lstStyle/>
+            <a:p>
+              <a:pPr algn="ctr"/>
+            </a:p>
+          </p:txBody>
+        </p:sp>
+        <p:sp>
+          <p:nvSpPr>
             <p:cNvPr id="13" name="Rectangle 12"/>
             <p:cNvSpPr/>
             <p:nvPr/>
           </p:nvSpPr>
           <p:spPr>
             <a:xfrm>
-              <a:off x="0" y="6451600"/>
+              <a:off x="2032000" y="6451600"/>
               <a:ext cx="203200" cy="203200"/>
             </a:xfrm>
             <a:prstGeom prst="rect">
@@ -12592,7 +11169,7 @@
           </p:nvSpPr>
           <p:spPr>
             <a:xfrm>
-              <a:off x="406400" y="6451600"/>
+              <a:off x="2438400" y="6451600"/>
               <a:ext cx="203200" cy="203200"/>
             </a:xfrm>
             <a:prstGeom prst="rect">
@@ -12622,7 +11199,7 @@
           </p:nvSpPr>
           <p:spPr>
             <a:xfrm>
-              <a:off x="812800" y="6451600"/>
+              <a:off x="2844800" y="6451600"/>
               <a:ext cx="203200" cy="203200"/>
             </a:xfrm>
             <a:prstGeom prst="rect">
@@ -12652,7 +11229,7 @@
           </p:nvSpPr>
           <p:spPr>
             <a:xfrm>
-              <a:off x="1219200" y="6451600"/>
+              <a:off x="3251200" y="6451600"/>
               <a:ext cx="203200" cy="203200"/>
             </a:xfrm>
             <a:prstGeom prst="rect">
@@ -12682,7 +11259,7 @@
           </p:nvSpPr>
           <p:spPr>
             <a:xfrm>
-              <a:off x="1625600" y="6451600"/>
+              <a:off x="3657600" y="6451600"/>
               <a:ext cx="203200" cy="203200"/>
             </a:xfrm>
             <a:prstGeom prst="rect">
@@ -12712,7 +11289,7 @@
           </p:nvSpPr>
           <p:spPr>
             <a:xfrm>
-              <a:off x="2032000" y="6451600"/>
+              <a:off x="4064000" y="6451600"/>
               <a:ext cx="203200" cy="203200"/>
             </a:xfrm>
             <a:prstGeom prst="rect">
@@ -12742,7 +11319,7 @@
           </p:nvSpPr>
           <p:spPr>
             <a:xfrm>
-              <a:off x="2438400" y="6451600"/>
+              <a:off x="4470400" y="6451600"/>
               <a:ext cx="203200" cy="203200"/>
             </a:xfrm>
             <a:prstGeom prst="rect">
@@ -12772,7 +11349,7 @@
           </p:nvSpPr>
           <p:spPr>
             <a:xfrm>
-              <a:off x="2844800" y="6451600"/>
+              <a:off x="4876800" y="6451600"/>
               <a:ext cx="203200" cy="203200"/>
             </a:xfrm>
             <a:prstGeom prst="rect">
@@ -12802,7 +11379,7 @@
           </p:nvSpPr>
           <p:spPr>
             <a:xfrm>
-              <a:off x="3251200" y="6451600"/>
+              <a:off x="5283200" y="6451600"/>
               <a:ext cx="203200" cy="203200"/>
             </a:xfrm>
             <a:prstGeom prst="rect">
@@ -12832,7 +11409,7 @@
           </p:nvSpPr>
           <p:spPr>
             <a:xfrm>
-              <a:off x="3657600" y="6451600"/>
+              <a:off x="5689600" y="6451600"/>
               <a:ext cx="203200" cy="203200"/>
             </a:xfrm>
             <a:prstGeom prst="rect">
@@ -12862,7 +11439,7 @@
           </p:nvSpPr>
           <p:spPr>
             <a:xfrm>
-              <a:off x="4064000" y="6451600"/>
+              <a:off x="6096000" y="6451600"/>
               <a:ext cx="203200" cy="203200"/>
             </a:xfrm>
             <a:prstGeom prst="rect">
@@ -12892,7 +11469,7 @@
           </p:nvSpPr>
           <p:spPr>
             <a:xfrm>
-              <a:off x="4470400" y="6451600"/>
+              <a:off x="6502400" y="6451600"/>
               <a:ext cx="203200" cy="203200"/>
             </a:xfrm>
             <a:prstGeom prst="rect">
@@ -12922,7 +11499,7 @@
           </p:nvSpPr>
           <p:spPr>
             <a:xfrm>
-              <a:off x="4876800" y="6451600"/>
+              <a:off x="6908800" y="6451600"/>
               <a:ext cx="203200" cy="203200"/>
             </a:xfrm>
             <a:prstGeom prst="rect">
@@ -12952,7 +11529,7 @@
           </p:nvSpPr>
           <p:spPr>
             <a:xfrm>
-              <a:off x="5283200" y="6451600"/>
+              <a:off x="7315200" y="6451600"/>
               <a:ext cx="203200" cy="203200"/>
             </a:xfrm>
             <a:prstGeom prst="rect">
@@ -12982,7 +11559,7 @@
           </p:nvSpPr>
           <p:spPr>
             <a:xfrm>
-              <a:off x="5689600" y="6451600"/>
+              <a:off x="7721600" y="6451600"/>
               <a:ext cx="203200" cy="203200"/>
             </a:xfrm>
             <a:prstGeom prst="rect">
@@ -13012,7 +11589,7 @@
           </p:nvSpPr>
           <p:spPr>
             <a:xfrm>
-              <a:off x="6096000" y="6451600"/>
+              <a:off x="8128000" y="6451600"/>
               <a:ext cx="203200" cy="203200"/>
             </a:xfrm>
             <a:prstGeom prst="rect">
@@ -13042,7 +11619,7 @@
           </p:nvSpPr>
           <p:spPr>
             <a:xfrm>
-              <a:off x="6502400" y="6451600"/>
+              <a:off x="8534400" y="6451600"/>
               <a:ext cx="203200" cy="203200"/>
             </a:xfrm>
             <a:prstGeom prst="rect">
@@ -13072,7 +11649,7 @@
           </p:nvSpPr>
           <p:spPr>
             <a:xfrm>
-              <a:off x="6908800" y="6451600"/>
+              <a:off x="8940800" y="6451600"/>
               <a:ext cx="203200" cy="203200"/>
             </a:xfrm>
             <a:prstGeom prst="rect">
@@ -13102,7 +11679,7 @@
           </p:nvSpPr>
           <p:spPr>
             <a:xfrm>
-              <a:off x="7315200" y="6451600"/>
+              <a:off x="9347200" y="6451600"/>
               <a:ext cx="203200" cy="203200"/>
             </a:xfrm>
             <a:prstGeom prst="rect">
@@ -13132,7 +11709,7 @@
           </p:nvSpPr>
           <p:spPr>
             <a:xfrm>
-              <a:off x="7721600" y="6451600"/>
+              <a:off x="9753600" y="6451600"/>
               <a:ext cx="203200" cy="203200"/>
             </a:xfrm>
             <a:prstGeom prst="rect">
@@ -13162,7 +11739,7 @@
           </p:nvSpPr>
           <p:spPr>
             <a:xfrm>
-              <a:off x="8128000" y="6451600"/>
+              <a:off x="10160000" y="6451600"/>
               <a:ext cx="203200" cy="203200"/>
             </a:xfrm>
             <a:prstGeom prst="rect">
@@ -13192,7 +11769,7 @@
           </p:nvSpPr>
           <p:spPr>
             <a:xfrm>
-              <a:off x="8534400" y="6451600"/>
+              <a:off x="10566400" y="6451600"/>
               <a:ext cx="203200" cy="203200"/>
             </a:xfrm>
             <a:prstGeom prst="rect">
@@ -13222,7 +11799,7 @@
           </p:nvSpPr>
           <p:spPr>
             <a:xfrm>
-              <a:off x="8940800" y="6451600"/>
+              <a:off x="10972800" y="6451600"/>
               <a:ext cx="203200" cy="203200"/>
             </a:xfrm>
             <a:prstGeom prst="rect">
@@ -13252,7 +11829,7 @@
           </p:nvSpPr>
           <p:spPr>
             <a:xfrm>
-              <a:off x="9347200" y="6451600"/>
+              <a:off x="11379200" y="6451600"/>
               <a:ext cx="203200" cy="203200"/>
             </a:xfrm>
             <a:prstGeom prst="rect">
@@ -13282,7 +11859,7 @@
           </p:nvSpPr>
           <p:spPr>
             <a:xfrm>
-              <a:off x="9753600" y="6451600"/>
+              <a:off x="11785600" y="6451600"/>
               <a:ext cx="203200" cy="203200"/>
             </a:xfrm>
             <a:prstGeom prst="rect">
@@ -13312,7 +11889,7 @@
           </p:nvSpPr>
           <p:spPr>
             <a:xfrm>
-              <a:off x="10160000" y="6451600"/>
+              <a:off x="203200" y="6654800"/>
               <a:ext cx="203200" cy="203200"/>
             </a:xfrm>
             <a:prstGeom prst="rect">
@@ -13342,7 +11919,7 @@
           </p:nvSpPr>
           <p:spPr>
             <a:xfrm>
-              <a:off x="10566400" y="6451600"/>
+              <a:off x="609600" y="6654800"/>
               <a:ext cx="203200" cy="203200"/>
             </a:xfrm>
             <a:prstGeom prst="rect">
@@ -13372,7 +11949,7 @@
           </p:nvSpPr>
           <p:spPr>
             <a:xfrm>
-              <a:off x="10972800" y="6451600"/>
+              <a:off x="1016000" y="6654800"/>
               <a:ext cx="203200" cy="203200"/>
             </a:xfrm>
             <a:prstGeom prst="rect">
@@ -13402,7 +11979,7 @@
           </p:nvSpPr>
           <p:spPr>
             <a:xfrm>
-              <a:off x="11379200" y="6451600"/>
+              <a:off x="1422400" y="6654800"/>
               <a:ext cx="203200" cy="203200"/>
             </a:xfrm>
             <a:prstGeom prst="rect">
@@ -13432,7 +12009,7 @@
           </p:nvSpPr>
           <p:spPr>
             <a:xfrm>
-              <a:off x="11785600" y="6451600"/>
+              <a:off x="1828800" y="6654800"/>
               <a:ext cx="203200" cy="203200"/>
             </a:xfrm>
             <a:prstGeom prst="rect">
@@ -13462,7 +12039,7 @@
           </p:nvSpPr>
           <p:spPr>
             <a:xfrm>
-              <a:off x="203200" y="6654800"/>
+              <a:off x="2235200" y="6654800"/>
               <a:ext cx="203200" cy="203200"/>
             </a:xfrm>
             <a:prstGeom prst="rect">
@@ -13492,7 +12069,7 @@
           </p:nvSpPr>
           <p:spPr>
             <a:xfrm>
-              <a:off x="609600" y="6654800"/>
+              <a:off x="2641600" y="6654800"/>
               <a:ext cx="203200" cy="203200"/>
             </a:xfrm>
             <a:prstGeom prst="rect">
@@ -13522,7 +12099,7 @@
           </p:nvSpPr>
           <p:spPr>
             <a:xfrm>
-              <a:off x="1016000" y="6654800"/>
+              <a:off x="3048000" y="6654800"/>
               <a:ext cx="203200" cy="203200"/>
             </a:xfrm>
             <a:prstGeom prst="rect">
@@ -13552,7 +12129,7 @@
           </p:nvSpPr>
           <p:spPr>
             <a:xfrm>
-              <a:off x="1422400" y="6654800"/>
+              <a:off x="3454400" y="6654800"/>
               <a:ext cx="203200" cy="203200"/>
             </a:xfrm>
             <a:prstGeom prst="rect">
@@ -13582,7 +12159,7 @@
           </p:nvSpPr>
           <p:spPr>
             <a:xfrm>
-              <a:off x="1828800" y="6654800"/>
+              <a:off x="3860800" y="6654800"/>
               <a:ext cx="203200" cy="203200"/>
             </a:xfrm>
             <a:prstGeom prst="rect">
@@ -13612,7 +12189,7 @@
           </p:nvSpPr>
           <p:spPr>
             <a:xfrm>
-              <a:off x="2235200" y="6654800"/>
+              <a:off x="4267200" y="6654800"/>
               <a:ext cx="203200" cy="203200"/>
             </a:xfrm>
             <a:prstGeom prst="rect">
@@ -13642,7 +12219,7 @@
           </p:nvSpPr>
           <p:spPr>
             <a:xfrm>
-              <a:off x="2641600" y="6654800"/>
+              <a:off x="4673600" y="6654800"/>
               <a:ext cx="203200" cy="203200"/>
             </a:xfrm>
             <a:prstGeom prst="rect">
@@ -13672,7 +12249,7 @@
           </p:nvSpPr>
           <p:spPr>
             <a:xfrm>
-              <a:off x="3048000" y="6654800"/>
+              <a:off x="5080000" y="6654800"/>
               <a:ext cx="203200" cy="203200"/>
             </a:xfrm>
             <a:prstGeom prst="rect">
@@ -13702,7 +12279,7 @@
           </p:nvSpPr>
           <p:spPr>
             <a:xfrm>
-              <a:off x="3454400" y="6654800"/>
+              <a:off x="5486400" y="6654800"/>
               <a:ext cx="203200" cy="203200"/>
             </a:xfrm>
             <a:prstGeom prst="rect">
@@ -13732,7 +12309,7 @@
           </p:nvSpPr>
           <p:spPr>
             <a:xfrm>
-              <a:off x="3860800" y="6654800"/>
+              <a:off x="5892800" y="6654800"/>
               <a:ext cx="203200" cy="203200"/>
             </a:xfrm>
             <a:prstGeom prst="rect">
@@ -13762,7 +12339,7 @@
           </p:nvSpPr>
           <p:spPr>
             <a:xfrm>
-              <a:off x="4267200" y="6654800"/>
+              <a:off x="6299200" y="6654800"/>
               <a:ext cx="203200" cy="203200"/>
             </a:xfrm>
             <a:prstGeom prst="rect">
@@ -13792,7 +12369,7 @@
           </p:nvSpPr>
           <p:spPr>
             <a:xfrm>
-              <a:off x="4673600" y="6654800"/>
+              <a:off x="6705600" y="6654800"/>
               <a:ext cx="203200" cy="203200"/>
             </a:xfrm>
             <a:prstGeom prst="rect">
@@ -13822,7 +12399,7 @@
           </p:nvSpPr>
           <p:spPr>
             <a:xfrm>
-              <a:off x="5080000" y="6654800"/>
+              <a:off x="7112000" y="6654800"/>
               <a:ext cx="203200" cy="203200"/>
             </a:xfrm>
             <a:prstGeom prst="rect">
@@ -13852,7 +12429,7 @@
           </p:nvSpPr>
           <p:spPr>
             <a:xfrm>
-              <a:off x="5486400" y="6654800"/>
+              <a:off x="7518400" y="6654800"/>
               <a:ext cx="203200" cy="203200"/>
             </a:xfrm>
             <a:prstGeom prst="rect">
@@ -13882,7 +12459,7 @@
           </p:nvSpPr>
           <p:spPr>
             <a:xfrm>
-              <a:off x="5892800" y="6654800"/>
+              <a:off x="7924800" y="6654800"/>
               <a:ext cx="203200" cy="203200"/>
             </a:xfrm>
             <a:prstGeom prst="rect">
@@ -13912,7 +12489,7 @@
           </p:nvSpPr>
           <p:spPr>
             <a:xfrm>
-              <a:off x="6299200" y="6654800"/>
+              <a:off x="8331200" y="6654800"/>
               <a:ext cx="203200" cy="203200"/>
             </a:xfrm>
             <a:prstGeom prst="rect">
@@ -13942,7 +12519,7 @@
           </p:nvSpPr>
           <p:spPr>
             <a:xfrm>
-              <a:off x="6705600" y="6654800"/>
+              <a:off x="8737600" y="6654800"/>
               <a:ext cx="203200" cy="203200"/>
             </a:xfrm>
             <a:prstGeom prst="rect">
@@ -13972,7 +12549,7 @@
           </p:nvSpPr>
           <p:spPr>
             <a:xfrm>
-              <a:off x="7112000" y="6654800"/>
+              <a:off x="9144000" y="6654800"/>
               <a:ext cx="203200" cy="203200"/>
             </a:xfrm>
             <a:prstGeom prst="rect">
@@ -14002,7 +12579,7 @@
           </p:nvSpPr>
           <p:spPr>
             <a:xfrm>
-              <a:off x="7518400" y="6654800"/>
+              <a:off x="9550400" y="6654800"/>
               <a:ext cx="203200" cy="203200"/>
             </a:xfrm>
             <a:prstGeom prst="rect">
@@ -14032,7 +12609,7 @@
           </p:nvSpPr>
           <p:spPr>
             <a:xfrm>
-              <a:off x="7924800" y="6654800"/>
+              <a:off x="9956800" y="6654800"/>
               <a:ext cx="203200" cy="203200"/>
             </a:xfrm>
             <a:prstGeom prst="rect">
@@ -14062,7 +12639,7 @@
           </p:nvSpPr>
           <p:spPr>
             <a:xfrm>
-              <a:off x="8331200" y="6654800"/>
+              <a:off x="10363200" y="6654800"/>
               <a:ext cx="203200" cy="203200"/>
             </a:xfrm>
             <a:prstGeom prst="rect">
@@ -14092,7 +12669,7 @@
           </p:nvSpPr>
           <p:spPr>
             <a:xfrm>
-              <a:off x="8737600" y="6654800"/>
+              <a:off x="10769600" y="6654800"/>
               <a:ext cx="203200" cy="203200"/>
             </a:xfrm>
             <a:prstGeom prst="rect">
@@ -14122,7 +12699,7 @@
           </p:nvSpPr>
           <p:spPr>
             <a:xfrm>
-              <a:off x="9144000" y="6654800"/>
+              <a:off x="11176000" y="6654800"/>
               <a:ext cx="203200" cy="203200"/>
             </a:xfrm>
             <a:prstGeom prst="rect">
@@ -14152,7 +12729,7 @@
           </p:nvSpPr>
           <p:spPr>
             <a:xfrm>
-              <a:off x="9550400" y="6654800"/>
+              <a:off x="11582400" y="6654800"/>
               <a:ext cx="203200" cy="203200"/>
             </a:xfrm>
             <a:prstGeom prst="rect">
@@ -14177,156 +12754,6 @@
         <p:sp>
           <p:nvSpPr>
             <p:cNvPr id="67" name="Rectangle 66"/>
-            <p:cNvSpPr/>
-            <p:nvPr/>
-          </p:nvSpPr>
-          <p:spPr>
-            <a:xfrm>
-              <a:off x="9956800" y="6654800"/>
-              <a:ext cx="203200" cy="203200"/>
-            </a:xfrm>
-            <a:prstGeom prst="rect">
-              <a:avLst/>
-            </a:prstGeom>
-            <a:solidFill>
-              <a:srgbClr val="ED1C24"/>
-            </a:solidFill>
-            <a:ln>
-              <a:noFill/>
-            </a:ln>
-            <a:effectLst/>
-          </p:spPr>
-          <p:txBody>
-            <a:bodyPr rtlCol="0" anchor="ctr"/>
-            <a:lstStyle/>
-            <a:p>
-              <a:pPr algn="ctr"/>
-            </a:p>
-          </p:txBody>
-        </p:sp>
-        <p:sp>
-          <p:nvSpPr>
-            <p:cNvPr id="68" name="Rectangle 67"/>
-            <p:cNvSpPr/>
-            <p:nvPr/>
-          </p:nvSpPr>
-          <p:spPr>
-            <a:xfrm>
-              <a:off x="10363200" y="6654800"/>
-              <a:ext cx="203200" cy="203200"/>
-            </a:xfrm>
-            <a:prstGeom prst="rect">
-              <a:avLst/>
-            </a:prstGeom>
-            <a:solidFill>
-              <a:srgbClr val="ED1C24"/>
-            </a:solidFill>
-            <a:ln>
-              <a:noFill/>
-            </a:ln>
-            <a:effectLst/>
-          </p:spPr>
-          <p:txBody>
-            <a:bodyPr rtlCol="0" anchor="ctr"/>
-            <a:lstStyle/>
-            <a:p>
-              <a:pPr algn="ctr"/>
-            </a:p>
-          </p:txBody>
-        </p:sp>
-        <p:sp>
-          <p:nvSpPr>
-            <p:cNvPr id="69" name="Rectangle 68"/>
-            <p:cNvSpPr/>
-            <p:nvPr/>
-          </p:nvSpPr>
-          <p:spPr>
-            <a:xfrm>
-              <a:off x="10769600" y="6654800"/>
-              <a:ext cx="203200" cy="203200"/>
-            </a:xfrm>
-            <a:prstGeom prst="rect">
-              <a:avLst/>
-            </a:prstGeom>
-            <a:solidFill>
-              <a:srgbClr val="ED1C24"/>
-            </a:solidFill>
-            <a:ln>
-              <a:noFill/>
-            </a:ln>
-            <a:effectLst/>
-          </p:spPr>
-          <p:txBody>
-            <a:bodyPr rtlCol="0" anchor="ctr"/>
-            <a:lstStyle/>
-            <a:p>
-              <a:pPr algn="ctr"/>
-            </a:p>
-          </p:txBody>
-        </p:sp>
-        <p:sp>
-          <p:nvSpPr>
-            <p:cNvPr id="70" name="Rectangle 69"/>
-            <p:cNvSpPr/>
-            <p:nvPr/>
-          </p:nvSpPr>
-          <p:spPr>
-            <a:xfrm>
-              <a:off x="11176000" y="6654800"/>
-              <a:ext cx="203200" cy="203200"/>
-            </a:xfrm>
-            <a:prstGeom prst="rect">
-              <a:avLst/>
-            </a:prstGeom>
-            <a:solidFill>
-              <a:srgbClr val="ED1C24"/>
-            </a:solidFill>
-            <a:ln>
-              <a:noFill/>
-            </a:ln>
-            <a:effectLst/>
-          </p:spPr>
-          <p:txBody>
-            <a:bodyPr rtlCol="0" anchor="ctr"/>
-            <a:lstStyle/>
-            <a:p>
-              <a:pPr algn="ctr"/>
-            </a:p>
-          </p:txBody>
-        </p:sp>
-        <p:sp>
-          <p:nvSpPr>
-            <p:cNvPr id="71" name="Rectangle 70"/>
-            <p:cNvSpPr/>
-            <p:nvPr/>
-          </p:nvSpPr>
-          <p:spPr>
-            <a:xfrm>
-              <a:off x="11582400" y="6654800"/>
-              <a:ext cx="203200" cy="203200"/>
-            </a:xfrm>
-            <a:prstGeom prst="rect">
-              <a:avLst/>
-            </a:prstGeom>
-            <a:solidFill>
-              <a:srgbClr val="ED1C24"/>
-            </a:solidFill>
-            <a:ln>
-              <a:noFill/>
-            </a:ln>
-            <a:effectLst/>
-          </p:spPr>
-          <p:txBody>
-            <a:bodyPr rtlCol="0" anchor="ctr"/>
-            <a:lstStyle/>
-            <a:p>
-              <a:pPr algn="ctr"/>
-            </a:p>
-          </p:txBody>
-        </p:sp>
-        <p:sp>
-          <p:nvSpPr>
-            <p:cNvPr id="72" name="Rectangle 71"/>
             <p:cNvSpPr/>
             <p:nvPr/>
           </p:nvSpPr>

--- a/FiveGuys_Presentation.pptx
+++ b/FiveGuys_Presentation.pptx
@@ -6960,7 +6960,7 @@
         </p:nvPicPr>
         <p:blipFill>
           <a:blip r:embed="rId3"/>
-          <a:srcRect l="5155" r="15155"/>
+          <a:srcRect l="5081" r="15081"/>
           <a:stretch>
             <a:fillRect/>
           </a:stretch>

--- a/FiveGuys_Presentation.pptx
+++ b/FiveGuys_Presentation.pptx
@@ -6933,7 +6933,7 @@
         </p:nvPicPr>
         <p:blipFill>
           <a:blip r:embed="rId2"/>
-          <a:srcRect l="3368" r="3368"/>
+          <a:srcRect l="13339" r="13339"/>
           <a:stretch>
             <a:fillRect/>
           </a:stretch>
@@ -8858,7 +8858,7 @@
         </p:nvPicPr>
         <p:blipFill>
           <a:blip r:embed="rId2"/>
-          <a:srcRect l="2261" r="2261"/>
+          <a:srcRect t="8831" b="8831"/>
           <a:stretch>
             <a:fillRect/>
           </a:stretch>

--- a/FiveGuys_Presentation.pptx
+++ b/FiveGuys_Presentation.pptx
@@ -8885,7 +8885,7 @@
         </p:nvPicPr>
         <p:blipFill>
           <a:blip r:embed="rId3"/>
-          <a:srcRect t="15702" b="15702"/>
+          <a:srcRect t="31404"/>
           <a:stretch>
             <a:fillRect/>
           </a:stretch>

--- a/FiveGuys_Presentation.pptx
+++ b/FiveGuys_Presentation.pptx
@@ -10837,7 +10837,7 @@
         </p:nvPicPr>
         <p:blipFill>
           <a:blip r:embed="rId2"/>
-          <a:srcRect t="12229" b="12229"/>
+          <a:srcRect l="16000" r="12000" t="30805" b="14805"/>
           <a:stretch>
             <a:fillRect/>
           </a:stretch>

--- a/FiveGuys_Presentation.pptx
+++ b/FiveGuys_Presentation.pptx
@@ -5008,7 +5008,7 @@
         </p:nvPicPr>
         <p:blipFill>
           <a:blip r:embed="rId2"/>
-          <a:srcRect r="8530"/>
+          <a:srcRect t="8316" b="24316"/>
           <a:stretch>
             <a:fillRect/>
           </a:stretch>
@@ -5016,7 +5016,7 @@
         <p:spPr>
           <a:xfrm>
             <a:off x="457200" y="411480"/>
-            <a:ext cx="6949440" cy="5674360"/>
+            <a:ext cx="11277600" cy="5674360"/>
           </a:xfrm>
           <a:prstGeom prst="roundRect">
             <a:avLst>
@@ -5025,36 +5025,9 @@
           </a:prstGeom>
         </p:spPr>
       </p:pic>
-      <p:pic>
-        <p:nvPicPr>
-          <p:cNvPr id="3" name="Photo fresh_potatoes_peanuts" descr="Sacks of fresh potatoes and boxes of peanuts inside a Five Guys"/>
-          <p:cNvPicPr>
-            <a:picLocks noChangeAspect="1"/>
-          </p:cNvPicPr>
-          <p:nvPr/>
-        </p:nvPicPr>
-        <p:blipFill>
-          <a:blip r:embed="rId3"/>
-          <a:srcRect l="17982" r="17982"/>
-          <a:stretch>
-            <a:fillRect/>
-          </a:stretch>
-        </p:blipFill>
-        <p:spPr>
-          <a:xfrm>
-            <a:off x="7589520" y="411480"/>
-            <a:ext cx="4145280" cy="5674360"/>
-          </a:xfrm>
-          <a:prstGeom prst="roundRect">
-            <a:avLst>
-              <a:gd name="adj" fmla="val 3088"/>
-            </a:avLst>
-          </a:prstGeom>
-        </p:spPr>
-      </p:pic>
       <p:grpSp>
         <p:nvGrpSpPr>
-          <p:cNvPr id="4" name="Checker band"/>
+          <p:cNvPr id="3" name="Checker band"/>
           <p:cNvGrpSpPr/>
           <p:nvPr/>
         </p:nvGrpSpPr>
@@ -5068,7 +5041,7 @@
         </p:grpSpPr>
         <p:sp>
           <p:nvSpPr>
-            <p:cNvPr id="5" name="Rectangle 4"/>
+            <p:cNvPr id="4" name="Rectangle 3"/>
             <p:cNvSpPr/>
             <p:nvPr/>
           </p:nvSpPr>
@@ -5098,13 +5071,43 @@
         </p:sp>
         <p:sp>
           <p:nvSpPr>
+            <p:cNvPr id="5" name="Rectangle 4"/>
+            <p:cNvSpPr/>
+            <p:nvPr/>
+          </p:nvSpPr>
+          <p:spPr>
+            <a:xfrm>
+              <a:off x="0" y="6451600"/>
+              <a:ext cx="203200" cy="203200"/>
+            </a:xfrm>
+            <a:prstGeom prst="rect">
+              <a:avLst/>
+            </a:prstGeom>
+            <a:solidFill>
+              <a:srgbClr val="ED1C24"/>
+            </a:solidFill>
+            <a:ln>
+              <a:noFill/>
+            </a:ln>
+            <a:effectLst/>
+          </p:spPr>
+          <p:txBody>
+            <a:bodyPr rtlCol="0" anchor="ctr"/>
+            <a:lstStyle/>
+            <a:p>
+              <a:pPr algn="ctr"/>
+            </a:p>
+          </p:txBody>
+        </p:sp>
+        <p:sp>
+          <p:nvSpPr>
             <p:cNvPr id="6" name="Rectangle 5"/>
             <p:cNvSpPr/>
             <p:nvPr/>
           </p:nvSpPr>
           <p:spPr>
             <a:xfrm>
-              <a:off x="0" y="6451600"/>
+              <a:off x="406400" y="6451600"/>
               <a:ext cx="203200" cy="203200"/>
             </a:xfrm>
             <a:prstGeom prst="rect">
@@ -5134,7 +5137,7 @@
           </p:nvSpPr>
           <p:spPr>
             <a:xfrm>
-              <a:off x="406400" y="6451600"/>
+              <a:off x="812800" y="6451600"/>
               <a:ext cx="203200" cy="203200"/>
             </a:xfrm>
             <a:prstGeom prst="rect">
@@ -5164,7 +5167,7 @@
           </p:nvSpPr>
           <p:spPr>
             <a:xfrm>
-              <a:off x="812800" y="6451600"/>
+              <a:off x="1219200" y="6451600"/>
               <a:ext cx="203200" cy="203200"/>
             </a:xfrm>
             <a:prstGeom prst="rect">
@@ -5194,7 +5197,7 @@
           </p:nvSpPr>
           <p:spPr>
             <a:xfrm>
-              <a:off x="1219200" y="6451600"/>
+              <a:off x="1625600" y="6451600"/>
               <a:ext cx="203200" cy="203200"/>
             </a:xfrm>
             <a:prstGeom prst="rect">
@@ -5224,7 +5227,7 @@
           </p:nvSpPr>
           <p:spPr>
             <a:xfrm>
-              <a:off x="1625600" y="6451600"/>
+              <a:off x="2032000" y="6451600"/>
               <a:ext cx="203200" cy="203200"/>
             </a:xfrm>
             <a:prstGeom prst="rect">
@@ -5254,7 +5257,7 @@
           </p:nvSpPr>
           <p:spPr>
             <a:xfrm>
-              <a:off x="2032000" y="6451600"/>
+              <a:off x="2438400" y="6451600"/>
               <a:ext cx="203200" cy="203200"/>
             </a:xfrm>
             <a:prstGeom prst="rect">
@@ -5284,7 +5287,7 @@
           </p:nvSpPr>
           <p:spPr>
             <a:xfrm>
-              <a:off x="2438400" y="6451600"/>
+              <a:off x="2844800" y="6451600"/>
               <a:ext cx="203200" cy="203200"/>
             </a:xfrm>
             <a:prstGeom prst="rect">
@@ -5314,7 +5317,7 @@
           </p:nvSpPr>
           <p:spPr>
             <a:xfrm>
-              <a:off x="2844800" y="6451600"/>
+              <a:off x="3251200" y="6451600"/>
               <a:ext cx="203200" cy="203200"/>
             </a:xfrm>
             <a:prstGeom prst="rect">
@@ -5344,7 +5347,7 @@
           </p:nvSpPr>
           <p:spPr>
             <a:xfrm>
-              <a:off x="3251200" y="6451600"/>
+              <a:off x="3657600" y="6451600"/>
               <a:ext cx="203200" cy="203200"/>
             </a:xfrm>
             <a:prstGeom prst="rect">
@@ -5374,7 +5377,7 @@
           </p:nvSpPr>
           <p:spPr>
             <a:xfrm>
-              <a:off x="3657600" y="6451600"/>
+              <a:off x="4064000" y="6451600"/>
               <a:ext cx="203200" cy="203200"/>
             </a:xfrm>
             <a:prstGeom prst="rect">
@@ -5404,7 +5407,7 @@
           </p:nvSpPr>
           <p:spPr>
             <a:xfrm>
-              <a:off x="4064000" y="6451600"/>
+              <a:off x="4470400" y="6451600"/>
               <a:ext cx="203200" cy="203200"/>
             </a:xfrm>
             <a:prstGeom prst="rect">
@@ -5434,7 +5437,7 @@
           </p:nvSpPr>
           <p:spPr>
             <a:xfrm>
-              <a:off x="4470400" y="6451600"/>
+              <a:off x="4876800" y="6451600"/>
               <a:ext cx="203200" cy="203200"/>
             </a:xfrm>
             <a:prstGeom prst="rect">
@@ -5464,7 +5467,7 @@
           </p:nvSpPr>
           <p:spPr>
             <a:xfrm>
-              <a:off x="4876800" y="6451600"/>
+              <a:off x="5283200" y="6451600"/>
               <a:ext cx="203200" cy="203200"/>
             </a:xfrm>
             <a:prstGeom prst="rect">
@@ -5494,7 +5497,7 @@
           </p:nvSpPr>
           <p:spPr>
             <a:xfrm>
-              <a:off x="5283200" y="6451600"/>
+              <a:off x="5689600" y="6451600"/>
               <a:ext cx="203200" cy="203200"/>
             </a:xfrm>
             <a:prstGeom prst="rect">
@@ -5524,7 +5527,7 @@
           </p:nvSpPr>
           <p:spPr>
             <a:xfrm>
-              <a:off x="5689600" y="6451600"/>
+              <a:off x="6096000" y="6451600"/>
               <a:ext cx="203200" cy="203200"/>
             </a:xfrm>
             <a:prstGeom prst="rect">
@@ -5554,7 +5557,7 @@
           </p:nvSpPr>
           <p:spPr>
             <a:xfrm>
-              <a:off x="6096000" y="6451600"/>
+              <a:off x="6502400" y="6451600"/>
               <a:ext cx="203200" cy="203200"/>
             </a:xfrm>
             <a:prstGeom prst="rect">
@@ -5584,7 +5587,7 @@
           </p:nvSpPr>
           <p:spPr>
             <a:xfrm>
-              <a:off x="6502400" y="6451600"/>
+              <a:off x="6908800" y="6451600"/>
               <a:ext cx="203200" cy="203200"/>
             </a:xfrm>
             <a:prstGeom prst="rect">
@@ -5614,7 +5617,7 @@
           </p:nvSpPr>
           <p:spPr>
             <a:xfrm>
-              <a:off x="6908800" y="6451600"/>
+              <a:off x="7315200" y="6451600"/>
               <a:ext cx="203200" cy="203200"/>
             </a:xfrm>
             <a:prstGeom prst="rect">
@@ -5644,7 +5647,7 @@
           </p:nvSpPr>
           <p:spPr>
             <a:xfrm>
-              <a:off x="7315200" y="6451600"/>
+              <a:off x="7721600" y="6451600"/>
               <a:ext cx="203200" cy="203200"/>
             </a:xfrm>
             <a:prstGeom prst="rect">
@@ -5674,7 +5677,7 @@
           </p:nvSpPr>
           <p:spPr>
             <a:xfrm>
-              <a:off x="7721600" y="6451600"/>
+              <a:off x="8128000" y="6451600"/>
               <a:ext cx="203200" cy="203200"/>
             </a:xfrm>
             <a:prstGeom prst="rect">
@@ -5704,7 +5707,7 @@
           </p:nvSpPr>
           <p:spPr>
             <a:xfrm>
-              <a:off x="8128000" y="6451600"/>
+              <a:off x="8534400" y="6451600"/>
               <a:ext cx="203200" cy="203200"/>
             </a:xfrm>
             <a:prstGeom prst="rect">
@@ -5734,7 +5737,7 @@
           </p:nvSpPr>
           <p:spPr>
             <a:xfrm>
-              <a:off x="8534400" y="6451600"/>
+              <a:off x="8940800" y="6451600"/>
               <a:ext cx="203200" cy="203200"/>
             </a:xfrm>
             <a:prstGeom prst="rect">
@@ -5764,7 +5767,7 @@
           </p:nvSpPr>
           <p:spPr>
             <a:xfrm>
-              <a:off x="8940800" y="6451600"/>
+              <a:off x="9347200" y="6451600"/>
               <a:ext cx="203200" cy="203200"/>
             </a:xfrm>
             <a:prstGeom prst="rect">
@@ -5794,7 +5797,7 @@
           </p:nvSpPr>
           <p:spPr>
             <a:xfrm>
-              <a:off x="9347200" y="6451600"/>
+              <a:off x="9753600" y="6451600"/>
               <a:ext cx="203200" cy="203200"/>
             </a:xfrm>
             <a:prstGeom prst="rect">
@@ -5824,7 +5827,7 @@
           </p:nvSpPr>
           <p:spPr>
             <a:xfrm>
-              <a:off x="9753600" y="6451600"/>
+              <a:off x="10160000" y="6451600"/>
               <a:ext cx="203200" cy="203200"/>
             </a:xfrm>
             <a:prstGeom prst="rect">
@@ -5854,7 +5857,7 @@
           </p:nvSpPr>
           <p:spPr>
             <a:xfrm>
-              <a:off x="10160000" y="6451600"/>
+              <a:off x="10566400" y="6451600"/>
               <a:ext cx="203200" cy="203200"/>
             </a:xfrm>
             <a:prstGeom prst="rect">
@@ -5884,7 +5887,7 @@
           </p:nvSpPr>
           <p:spPr>
             <a:xfrm>
-              <a:off x="10566400" y="6451600"/>
+              <a:off x="10972800" y="6451600"/>
               <a:ext cx="203200" cy="203200"/>
             </a:xfrm>
             <a:prstGeom prst="rect">
@@ -5914,7 +5917,7 @@
           </p:nvSpPr>
           <p:spPr>
             <a:xfrm>
-              <a:off x="10972800" y="6451600"/>
+              <a:off x="11379200" y="6451600"/>
               <a:ext cx="203200" cy="203200"/>
             </a:xfrm>
             <a:prstGeom prst="rect">
@@ -5944,7 +5947,7 @@
           </p:nvSpPr>
           <p:spPr>
             <a:xfrm>
-              <a:off x="11379200" y="6451600"/>
+              <a:off x="11785600" y="6451600"/>
               <a:ext cx="203200" cy="203200"/>
             </a:xfrm>
             <a:prstGeom prst="rect">
@@ -5974,7 +5977,7 @@
           </p:nvSpPr>
           <p:spPr>
             <a:xfrm>
-              <a:off x="11785600" y="6451600"/>
+              <a:off x="203200" y="6654800"/>
               <a:ext cx="203200" cy="203200"/>
             </a:xfrm>
             <a:prstGeom prst="rect">
@@ -6004,7 +6007,7 @@
           </p:nvSpPr>
           <p:spPr>
             <a:xfrm>
-              <a:off x="203200" y="6654800"/>
+              <a:off x="609600" y="6654800"/>
               <a:ext cx="203200" cy="203200"/>
             </a:xfrm>
             <a:prstGeom prst="rect">
@@ -6034,7 +6037,7 @@
           </p:nvSpPr>
           <p:spPr>
             <a:xfrm>
-              <a:off x="609600" y="6654800"/>
+              <a:off x="1016000" y="6654800"/>
               <a:ext cx="203200" cy="203200"/>
             </a:xfrm>
             <a:prstGeom prst="rect">
@@ -6064,7 +6067,7 @@
           </p:nvSpPr>
           <p:spPr>
             <a:xfrm>
-              <a:off x="1016000" y="6654800"/>
+              <a:off x="1422400" y="6654800"/>
               <a:ext cx="203200" cy="203200"/>
             </a:xfrm>
             <a:prstGeom prst="rect">
@@ -6094,7 +6097,7 @@
           </p:nvSpPr>
           <p:spPr>
             <a:xfrm>
-              <a:off x="1422400" y="6654800"/>
+              <a:off x="1828800" y="6654800"/>
               <a:ext cx="203200" cy="203200"/>
             </a:xfrm>
             <a:prstGeom prst="rect">
@@ -6124,7 +6127,7 @@
           </p:nvSpPr>
           <p:spPr>
             <a:xfrm>
-              <a:off x="1828800" y="6654800"/>
+              <a:off x="2235200" y="6654800"/>
               <a:ext cx="203200" cy="203200"/>
             </a:xfrm>
             <a:prstGeom prst="rect">
@@ -6154,7 +6157,7 @@
           </p:nvSpPr>
           <p:spPr>
             <a:xfrm>
-              <a:off x="2235200" y="6654800"/>
+              <a:off x="2641600" y="6654800"/>
               <a:ext cx="203200" cy="203200"/>
             </a:xfrm>
             <a:prstGeom prst="rect">
@@ -6184,7 +6187,7 @@
           </p:nvSpPr>
           <p:spPr>
             <a:xfrm>
-              <a:off x="2641600" y="6654800"/>
+              <a:off x="3048000" y="6654800"/>
               <a:ext cx="203200" cy="203200"/>
             </a:xfrm>
             <a:prstGeom prst="rect">
@@ -6214,7 +6217,7 @@
           </p:nvSpPr>
           <p:spPr>
             <a:xfrm>
-              <a:off x="3048000" y="6654800"/>
+              <a:off x="3454400" y="6654800"/>
               <a:ext cx="203200" cy="203200"/>
             </a:xfrm>
             <a:prstGeom prst="rect">
@@ -6244,7 +6247,7 @@
           </p:nvSpPr>
           <p:spPr>
             <a:xfrm>
-              <a:off x="3454400" y="6654800"/>
+              <a:off x="3860800" y="6654800"/>
               <a:ext cx="203200" cy="203200"/>
             </a:xfrm>
             <a:prstGeom prst="rect">
@@ -6274,7 +6277,7 @@
           </p:nvSpPr>
           <p:spPr>
             <a:xfrm>
-              <a:off x="3860800" y="6654800"/>
+              <a:off x="4267200" y="6654800"/>
               <a:ext cx="203200" cy="203200"/>
             </a:xfrm>
             <a:prstGeom prst="rect">
@@ -6304,7 +6307,7 @@
           </p:nvSpPr>
           <p:spPr>
             <a:xfrm>
-              <a:off x="4267200" y="6654800"/>
+              <a:off x="4673600" y="6654800"/>
               <a:ext cx="203200" cy="203200"/>
             </a:xfrm>
             <a:prstGeom prst="rect">
@@ -6334,7 +6337,7 @@
           </p:nvSpPr>
           <p:spPr>
             <a:xfrm>
-              <a:off x="4673600" y="6654800"/>
+              <a:off x="5080000" y="6654800"/>
               <a:ext cx="203200" cy="203200"/>
             </a:xfrm>
             <a:prstGeom prst="rect">
@@ -6364,7 +6367,7 @@
           </p:nvSpPr>
           <p:spPr>
             <a:xfrm>
-              <a:off x="5080000" y="6654800"/>
+              <a:off x="5486400" y="6654800"/>
               <a:ext cx="203200" cy="203200"/>
             </a:xfrm>
             <a:prstGeom prst="rect">
@@ -6394,7 +6397,7 @@
           </p:nvSpPr>
           <p:spPr>
             <a:xfrm>
-              <a:off x="5486400" y="6654800"/>
+              <a:off x="5892800" y="6654800"/>
               <a:ext cx="203200" cy="203200"/>
             </a:xfrm>
             <a:prstGeom prst="rect">
@@ -6424,7 +6427,7 @@
           </p:nvSpPr>
           <p:spPr>
             <a:xfrm>
-              <a:off x="5892800" y="6654800"/>
+              <a:off x="6299200" y="6654800"/>
               <a:ext cx="203200" cy="203200"/>
             </a:xfrm>
             <a:prstGeom prst="rect">
@@ -6454,7 +6457,7 @@
           </p:nvSpPr>
           <p:spPr>
             <a:xfrm>
-              <a:off x="6299200" y="6654800"/>
+              <a:off x="6705600" y="6654800"/>
               <a:ext cx="203200" cy="203200"/>
             </a:xfrm>
             <a:prstGeom prst="rect">
@@ -6484,7 +6487,7 @@
           </p:nvSpPr>
           <p:spPr>
             <a:xfrm>
-              <a:off x="6705600" y="6654800"/>
+              <a:off x="7112000" y="6654800"/>
               <a:ext cx="203200" cy="203200"/>
             </a:xfrm>
             <a:prstGeom prst="rect">
@@ -6514,7 +6517,7 @@
           </p:nvSpPr>
           <p:spPr>
             <a:xfrm>
-              <a:off x="7112000" y="6654800"/>
+              <a:off x="7518400" y="6654800"/>
               <a:ext cx="203200" cy="203200"/>
             </a:xfrm>
             <a:prstGeom prst="rect">
@@ -6544,7 +6547,7 @@
           </p:nvSpPr>
           <p:spPr>
             <a:xfrm>
-              <a:off x="7518400" y="6654800"/>
+              <a:off x="7924800" y="6654800"/>
               <a:ext cx="203200" cy="203200"/>
             </a:xfrm>
             <a:prstGeom prst="rect">
@@ -6574,7 +6577,7 @@
           </p:nvSpPr>
           <p:spPr>
             <a:xfrm>
-              <a:off x="7924800" y="6654800"/>
+              <a:off x="8331200" y="6654800"/>
               <a:ext cx="203200" cy="203200"/>
             </a:xfrm>
             <a:prstGeom prst="rect">
@@ -6604,7 +6607,7 @@
           </p:nvSpPr>
           <p:spPr>
             <a:xfrm>
-              <a:off x="8331200" y="6654800"/>
+              <a:off x="8737600" y="6654800"/>
               <a:ext cx="203200" cy="203200"/>
             </a:xfrm>
             <a:prstGeom prst="rect">
@@ -6634,7 +6637,7 @@
           </p:nvSpPr>
           <p:spPr>
             <a:xfrm>
-              <a:off x="8737600" y="6654800"/>
+              <a:off x="9144000" y="6654800"/>
               <a:ext cx="203200" cy="203200"/>
             </a:xfrm>
             <a:prstGeom prst="rect">
@@ -6664,7 +6667,7 @@
           </p:nvSpPr>
           <p:spPr>
             <a:xfrm>
-              <a:off x="9144000" y="6654800"/>
+              <a:off x="9550400" y="6654800"/>
               <a:ext cx="203200" cy="203200"/>
             </a:xfrm>
             <a:prstGeom prst="rect">
@@ -6694,7 +6697,7 @@
           </p:nvSpPr>
           <p:spPr>
             <a:xfrm>
-              <a:off x="9550400" y="6654800"/>
+              <a:off x="9956800" y="6654800"/>
               <a:ext cx="203200" cy="203200"/>
             </a:xfrm>
             <a:prstGeom prst="rect">
@@ -6724,7 +6727,7 @@
           </p:nvSpPr>
           <p:spPr>
             <a:xfrm>
-              <a:off x="9956800" y="6654800"/>
+              <a:off x="10363200" y="6654800"/>
               <a:ext cx="203200" cy="203200"/>
             </a:xfrm>
             <a:prstGeom prst="rect">
@@ -6754,7 +6757,7 @@
           </p:nvSpPr>
           <p:spPr>
             <a:xfrm>
-              <a:off x="10363200" y="6654800"/>
+              <a:off x="10769600" y="6654800"/>
               <a:ext cx="203200" cy="203200"/>
             </a:xfrm>
             <a:prstGeom prst="rect">
@@ -6784,7 +6787,7 @@
           </p:nvSpPr>
           <p:spPr>
             <a:xfrm>
-              <a:off x="10769600" y="6654800"/>
+              <a:off x="11176000" y="6654800"/>
               <a:ext cx="203200" cy="203200"/>
             </a:xfrm>
             <a:prstGeom prst="rect">
@@ -6814,7 +6817,7 @@
           </p:nvSpPr>
           <p:spPr>
             <a:xfrm>
-              <a:off x="11176000" y="6654800"/>
+              <a:off x="11582400" y="6654800"/>
               <a:ext cx="203200" cy="203200"/>
             </a:xfrm>
             <a:prstGeom prst="rect">
@@ -6839,36 +6842,6 @@
         <p:sp>
           <p:nvSpPr>
             <p:cNvPr id="64" name="Rectangle 63"/>
-            <p:cNvSpPr/>
-            <p:nvPr/>
-          </p:nvSpPr>
-          <p:spPr>
-            <a:xfrm>
-              <a:off x="11582400" y="6654800"/>
-              <a:ext cx="203200" cy="203200"/>
-            </a:xfrm>
-            <a:prstGeom prst="rect">
-              <a:avLst/>
-            </a:prstGeom>
-            <a:solidFill>
-              <a:srgbClr val="ED1C24"/>
-            </a:solidFill>
-            <a:ln>
-              <a:noFill/>
-            </a:ln>
-            <a:effectLst/>
-          </p:spPr>
-          <p:txBody>
-            <a:bodyPr rtlCol="0" anchor="ctr"/>
-            <a:lstStyle/>
-            <a:p>
-              <a:pPr algn="ctr"/>
-            </a:p>
-          </p:txBody>
-        </p:sp>
-        <p:sp>
-          <p:nvSpPr>
-            <p:cNvPr id="65" name="Rectangle 64"/>
             <p:cNvSpPr/>
             <p:nvPr/>
           </p:nvSpPr>
@@ -8858,7 +8831,7 @@
         </p:nvPicPr>
         <p:blipFill>
           <a:blip r:embed="rId2"/>
-          <a:srcRect t="8831" b="8831"/>
+          <a:srcRect l="16808" r="6808" t="12000" b="8000"/>
           <a:stretch>
             <a:fillRect/>
           </a:stretch>
@@ -10837,7 +10810,7 @@
         </p:nvPicPr>
         <p:blipFill>
           <a:blip r:embed="rId2"/>
-          <a:srcRect l="16000" r="12000" t="30805" b="14805"/>
+          <a:srcRect l="21543" r="17543" t="10000"/>
           <a:stretch>
             <a:fillRect/>
           </a:stretch>
@@ -10845,50 +10818,18 @@
         <p:spPr>
           <a:xfrm>
             <a:off x="457200" y="411480"/>
-            <a:ext cx="4846320" cy="2745740"/>
+            <a:ext cx="5120640" cy="5674360"/>
           </a:xfrm>
           <a:prstGeom prst="roundRect">
             <a:avLst>
-              <a:gd name="adj" fmla="val 4662"/>
+              <a:gd name="adj" fmla="val 2500"/>
             </a:avLst>
           </a:prstGeom>
         </p:spPr>
       </p:pic>
-      <p:sp>
-        <p:nvSpPr>
-          <p:cNvPr id="3" name="Map panel"/>
-          <p:cNvSpPr/>
-          <p:nvPr/>
-        </p:nvSpPr>
-        <p:spPr>
-          <a:xfrm>
-            <a:off x="457200" y="3340100"/>
-            <a:ext cx="4846320" cy="2745740"/>
-          </a:xfrm>
-          <a:prstGeom prst="roundRect">
-            <a:avLst>
-              <a:gd name="adj" fmla="val 4662"/>
-            </a:avLst>
-          </a:prstGeom>
-          <a:solidFill>
-            <a:srgbClr val="1E1E1E"/>
-          </a:solidFill>
-          <a:ln>
-            <a:noFill/>
-          </a:ln>
-          <a:effectLst/>
-        </p:spPr>
-        <p:txBody>
-          <a:bodyPr rtlCol="0" anchor="ctr"/>
-          <a:lstStyle/>
-          <a:p>
-            <a:pPr algn="ctr"/>
-          </a:p>
-        </p:txBody>
-      </p:sp>
       <p:pic>
         <p:nvPicPr>
-          <p:cNvPr id="4" name="Photo five_guys_world_map" descr="World map with the countries that have Five Guys restaurants in red"/>
+          <p:cNvPr id="3" name="Photo cajun_fries" descr="Five Guys Cajun fries in a white cup"/>
           <p:cNvPicPr>
             <a:picLocks noChangeAspect="1"/>
           </p:cNvPicPr>
@@ -10896,39 +10837,15 @@
         </p:nvPicPr>
         <p:blipFill>
           <a:blip r:embed="rId3"/>
+          <a:srcRect l="12417" r="28417"/>
           <a:stretch>
             <a:fillRect/>
           </a:stretch>
         </p:blipFill>
         <p:spPr>
           <a:xfrm>
-            <a:off x="640080" y="3575328"/>
-            <a:ext cx="4480560" cy="2275284"/>
-          </a:xfrm>
-          <a:prstGeom prst="rect">
-            <a:avLst/>
-          </a:prstGeom>
-        </p:spPr>
-      </p:pic>
-      <p:pic>
-        <p:nvPicPr>
-          <p:cNvPr id="5" name="Photo cajun_fries" descr="Five Guys Cajun fries in a white cup"/>
-          <p:cNvPicPr>
-            <a:picLocks noChangeAspect="1"/>
-          </p:cNvPicPr>
-          <p:nvPr/>
-        </p:nvPicPr>
-        <p:blipFill>
-          <a:blip r:embed="rId4"/>
-          <a:srcRect l="11058" r="27058"/>
-          <a:stretch>
-            <a:fillRect/>
-          </a:stretch>
-        </p:blipFill>
-        <p:spPr>
-          <a:xfrm>
-            <a:off x="5486400" y="411480"/>
-            <a:ext cx="6248400" cy="5674360"/>
+            <a:off x="5760720" y="411480"/>
+            <a:ext cx="5974080" cy="5674360"/>
           </a:xfrm>
           <a:prstGeom prst="roundRect">
             <a:avLst>
@@ -10939,7 +10856,7 @@
       </p:pic>
       <p:grpSp>
         <p:nvGrpSpPr>
-          <p:cNvPr id="6" name="Checker band"/>
+          <p:cNvPr id="4" name="Checker band"/>
           <p:cNvGrpSpPr/>
           <p:nvPr/>
         </p:nvGrpSpPr>
@@ -10953,7 +10870,7 @@
         </p:grpSpPr>
         <p:sp>
           <p:nvSpPr>
-            <p:cNvPr id="7" name="Rectangle 6"/>
+            <p:cNvPr id="5" name="Rectangle 4"/>
             <p:cNvSpPr/>
             <p:nvPr/>
           </p:nvSpPr>
@@ -10983,13 +10900,73 @@
         </p:sp>
         <p:sp>
           <p:nvSpPr>
+            <p:cNvPr id="6" name="Rectangle 5"/>
+            <p:cNvSpPr/>
+            <p:nvPr/>
+          </p:nvSpPr>
+          <p:spPr>
+            <a:xfrm>
+              <a:off x="0" y="6451600"/>
+              <a:ext cx="203200" cy="203200"/>
+            </a:xfrm>
+            <a:prstGeom prst="rect">
+              <a:avLst/>
+            </a:prstGeom>
+            <a:solidFill>
+              <a:srgbClr val="ED1C24"/>
+            </a:solidFill>
+            <a:ln>
+              <a:noFill/>
+            </a:ln>
+            <a:effectLst/>
+          </p:spPr>
+          <p:txBody>
+            <a:bodyPr rtlCol="0" anchor="ctr"/>
+            <a:lstStyle/>
+            <a:p>
+              <a:pPr algn="ctr"/>
+            </a:p>
+          </p:txBody>
+        </p:sp>
+        <p:sp>
+          <p:nvSpPr>
+            <p:cNvPr id="7" name="Rectangle 6"/>
+            <p:cNvSpPr/>
+            <p:nvPr/>
+          </p:nvSpPr>
+          <p:spPr>
+            <a:xfrm>
+              <a:off x="406400" y="6451600"/>
+              <a:ext cx="203200" cy="203200"/>
+            </a:xfrm>
+            <a:prstGeom prst="rect">
+              <a:avLst/>
+            </a:prstGeom>
+            <a:solidFill>
+              <a:srgbClr val="ED1C24"/>
+            </a:solidFill>
+            <a:ln>
+              <a:noFill/>
+            </a:ln>
+            <a:effectLst/>
+          </p:spPr>
+          <p:txBody>
+            <a:bodyPr rtlCol="0" anchor="ctr"/>
+            <a:lstStyle/>
+            <a:p>
+              <a:pPr algn="ctr"/>
+            </a:p>
+          </p:txBody>
+        </p:sp>
+        <p:sp>
+          <p:nvSpPr>
             <p:cNvPr id="8" name="Rectangle 7"/>
             <p:cNvSpPr/>
             <p:nvPr/>
           </p:nvSpPr>
           <p:spPr>
             <a:xfrm>
-              <a:off x="0" y="6451600"/>
+              <a:off x="812800" y="6451600"/>
               <a:ext cx="203200" cy="203200"/>
             </a:xfrm>
             <a:prstGeom prst="rect">
@@ -11019,7 +10996,7 @@
           </p:nvSpPr>
           <p:spPr>
             <a:xfrm>
-              <a:off x="406400" y="6451600"/>
+              <a:off x="1219200" y="6451600"/>
               <a:ext cx="203200" cy="203200"/>
             </a:xfrm>
             <a:prstGeom prst="rect">
@@ -11049,7 +11026,7 @@
           </p:nvSpPr>
           <p:spPr>
             <a:xfrm>
-              <a:off x="812800" y="6451600"/>
+              <a:off x="1625600" y="6451600"/>
               <a:ext cx="203200" cy="203200"/>
             </a:xfrm>
             <a:prstGeom prst="rect">
@@ -11079,7 +11056,7 @@
           </p:nvSpPr>
           <p:spPr>
             <a:xfrm>
-              <a:off x="1219200" y="6451600"/>
+              <a:off x="2032000" y="6451600"/>
               <a:ext cx="203200" cy="203200"/>
             </a:xfrm>
             <a:prstGeom prst="rect">
@@ -11109,7 +11086,7 @@
           </p:nvSpPr>
           <p:spPr>
             <a:xfrm>
-              <a:off x="1625600" y="6451600"/>
+              <a:off x="2438400" y="6451600"/>
               <a:ext cx="203200" cy="203200"/>
             </a:xfrm>
             <a:prstGeom prst="rect">
@@ -11139,7 +11116,7 @@
           </p:nvSpPr>
           <p:spPr>
             <a:xfrm>
-              <a:off x="2032000" y="6451600"/>
+              <a:off x="2844800" y="6451600"/>
               <a:ext cx="203200" cy="203200"/>
             </a:xfrm>
             <a:prstGeom prst="rect">
@@ -11169,7 +11146,7 @@
           </p:nvSpPr>
           <p:spPr>
             <a:xfrm>
-              <a:off x="2438400" y="6451600"/>
+              <a:off x="3251200" y="6451600"/>
               <a:ext cx="203200" cy="203200"/>
             </a:xfrm>
             <a:prstGeom prst="rect">
@@ -11199,7 +11176,7 @@
           </p:nvSpPr>
           <p:spPr>
             <a:xfrm>
-              <a:off x="2844800" y="6451600"/>
+              <a:off x="3657600" y="6451600"/>
               <a:ext cx="203200" cy="203200"/>
             </a:xfrm>
             <a:prstGeom prst="rect">
@@ -11229,7 +11206,7 @@
           </p:nvSpPr>
           <p:spPr>
             <a:xfrm>
-              <a:off x="3251200" y="6451600"/>
+              <a:off x="4064000" y="6451600"/>
               <a:ext cx="203200" cy="203200"/>
             </a:xfrm>
             <a:prstGeom prst="rect">
@@ -11259,7 +11236,7 @@
           </p:nvSpPr>
           <p:spPr>
             <a:xfrm>
-              <a:off x="3657600" y="6451600"/>
+              <a:off x="4470400" y="6451600"/>
               <a:ext cx="203200" cy="203200"/>
             </a:xfrm>
             <a:prstGeom prst="rect">
@@ -11289,7 +11266,7 @@
           </p:nvSpPr>
           <p:spPr>
             <a:xfrm>
-              <a:off x="4064000" y="6451600"/>
+              <a:off x="4876800" y="6451600"/>
               <a:ext cx="203200" cy="203200"/>
             </a:xfrm>
             <a:prstGeom prst="rect">
@@ -11319,7 +11296,7 @@
           </p:nvSpPr>
           <p:spPr>
             <a:xfrm>
-              <a:off x="4470400" y="6451600"/>
+              <a:off x="5283200" y="6451600"/>
               <a:ext cx="203200" cy="203200"/>
             </a:xfrm>
             <a:prstGeom prst="rect">
@@ -11349,7 +11326,7 @@
           </p:nvSpPr>
           <p:spPr>
             <a:xfrm>
-              <a:off x="4876800" y="6451600"/>
+              <a:off x="5689600" y="6451600"/>
               <a:ext cx="203200" cy="203200"/>
             </a:xfrm>
             <a:prstGeom prst="rect">
@@ -11379,7 +11356,7 @@
           </p:nvSpPr>
           <p:spPr>
             <a:xfrm>
-              <a:off x="5283200" y="6451600"/>
+              <a:off x="6096000" y="6451600"/>
               <a:ext cx="203200" cy="203200"/>
             </a:xfrm>
             <a:prstGeom prst="rect">
@@ -11409,7 +11386,7 @@
           </p:nvSpPr>
           <p:spPr>
             <a:xfrm>
-              <a:off x="5689600" y="6451600"/>
+              <a:off x="6502400" y="6451600"/>
               <a:ext cx="203200" cy="203200"/>
             </a:xfrm>
             <a:prstGeom prst="rect">
@@ -11439,7 +11416,7 @@
           </p:nvSpPr>
           <p:spPr>
             <a:xfrm>
-              <a:off x="6096000" y="6451600"/>
+              <a:off x="6908800" y="6451600"/>
               <a:ext cx="203200" cy="203200"/>
             </a:xfrm>
             <a:prstGeom prst="rect">
@@ -11469,7 +11446,7 @@
           </p:nvSpPr>
           <p:spPr>
             <a:xfrm>
-              <a:off x="6502400" y="6451600"/>
+              <a:off x="7315200" y="6451600"/>
               <a:ext cx="203200" cy="203200"/>
             </a:xfrm>
             <a:prstGeom prst="rect">
@@ -11499,7 +11476,7 @@
           </p:nvSpPr>
           <p:spPr>
             <a:xfrm>
-              <a:off x="6908800" y="6451600"/>
+              <a:off x="7721600" y="6451600"/>
               <a:ext cx="203200" cy="203200"/>
             </a:xfrm>
             <a:prstGeom prst="rect">
@@ -11529,7 +11506,7 @@
           </p:nvSpPr>
           <p:spPr>
             <a:xfrm>
-              <a:off x="7315200" y="6451600"/>
+              <a:off x="8128000" y="6451600"/>
               <a:ext cx="203200" cy="203200"/>
             </a:xfrm>
             <a:prstGeom prst="rect">
@@ -11559,7 +11536,7 @@
           </p:nvSpPr>
           <p:spPr>
             <a:xfrm>
-              <a:off x="7721600" y="6451600"/>
+              <a:off x="8534400" y="6451600"/>
               <a:ext cx="203200" cy="203200"/>
             </a:xfrm>
             <a:prstGeom prst="rect">
@@ -11589,7 +11566,7 @@
           </p:nvSpPr>
           <p:spPr>
             <a:xfrm>
-              <a:off x="8128000" y="6451600"/>
+              <a:off x="8940800" y="6451600"/>
               <a:ext cx="203200" cy="203200"/>
             </a:xfrm>
             <a:prstGeom prst="rect">
@@ -11619,7 +11596,7 @@
           </p:nvSpPr>
           <p:spPr>
             <a:xfrm>
-              <a:off x="8534400" y="6451600"/>
+              <a:off x="9347200" y="6451600"/>
               <a:ext cx="203200" cy="203200"/>
             </a:xfrm>
             <a:prstGeom prst="rect">
@@ -11649,7 +11626,7 @@
           </p:nvSpPr>
           <p:spPr>
             <a:xfrm>
-              <a:off x="8940800" y="6451600"/>
+              <a:off x="9753600" y="6451600"/>
               <a:ext cx="203200" cy="203200"/>
             </a:xfrm>
             <a:prstGeom prst="rect">
@@ -11679,7 +11656,7 @@
           </p:nvSpPr>
           <p:spPr>
             <a:xfrm>
-              <a:off x="9347200" y="6451600"/>
+              <a:off x="10160000" y="6451600"/>
               <a:ext cx="203200" cy="203200"/>
             </a:xfrm>
             <a:prstGeom prst="rect">
@@ -11709,7 +11686,7 @@
           </p:nvSpPr>
           <p:spPr>
             <a:xfrm>
-              <a:off x="9753600" y="6451600"/>
+              <a:off x="10566400" y="6451600"/>
               <a:ext cx="203200" cy="203200"/>
             </a:xfrm>
             <a:prstGeom prst="rect">
@@ -11739,7 +11716,7 @@
           </p:nvSpPr>
           <p:spPr>
             <a:xfrm>
-              <a:off x="10160000" y="6451600"/>
+              <a:off x="10972800" y="6451600"/>
               <a:ext cx="203200" cy="203200"/>
             </a:xfrm>
             <a:prstGeom prst="rect">
@@ -11769,7 +11746,7 @@
           </p:nvSpPr>
           <p:spPr>
             <a:xfrm>
-              <a:off x="10566400" y="6451600"/>
+              <a:off x="11379200" y="6451600"/>
               <a:ext cx="203200" cy="203200"/>
             </a:xfrm>
             <a:prstGeom prst="rect">
@@ -11799,7 +11776,7 @@
           </p:nvSpPr>
           <p:spPr>
             <a:xfrm>
-              <a:off x="10972800" y="6451600"/>
+              <a:off x="11785600" y="6451600"/>
               <a:ext cx="203200" cy="203200"/>
             </a:xfrm>
             <a:prstGeom prst="rect">
@@ -11829,7 +11806,7 @@
           </p:nvSpPr>
           <p:spPr>
             <a:xfrm>
-              <a:off x="11379200" y="6451600"/>
+              <a:off x="203200" y="6654800"/>
               <a:ext cx="203200" cy="203200"/>
             </a:xfrm>
             <a:prstGeom prst="rect">
@@ -11859,7 +11836,7 @@
           </p:nvSpPr>
           <p:spPr>
             <a:xfrm>
-              <a:off x="11785600" y="6451600"/>
+              <a:off x="609600" y="6654800"/>
               <a:ext cx="203200" cy="203200"/>
             </a:xfrm>
             <a:prstGeom prst="rect">
@@ -11889,7 +11866,7 @@
           </p:nvSpPr>
           <p:spPr>
             <a:xfrm>
-              <a:off x="203200" y="6654800"/>
+              <a:off x="1016000" y="6654800"/>
               <a:ext cx="203200" cy="203200"/>
             </a:xfrm>
             <a:prstGeom prst="rect">
@@ -11919,7 +11896,7 @@
           </p:nvSpPr>
           <p:spPr>
             <a:xfrm>
-              <a:off x="609600" y="6654800"/>
+              <a:off x="1422400" y="6654800"/>
               <a:ext cx="203200" cy="203200"/>
             </a:xfrm>
             <a:prstGeom prst="rect">
@@ -11949,7 +11926,7 @@
           </p:nvSpPr>
           <p:spPr>
             <a:xfrm>
-              <a:off x="1016000" y="6654800"/>
+              <a:off x="1828800" y="6654800"/>
               <a:ext cx="203200" cy="203200"/>
             </a:xfrm>
             <a:prstGeom prst="rect">
@@ -11979,7 +11956,7 @@
           </p:nvSpPr>
           <p:spPr>
             <a:xfrm>
-              <a:off x="1422400" y="6654800"/>
+              <a:off x="2235200" y="6654800"/>
               <a:ext cx="203200" cy="203200"/>
             </a:xfrm>
             <a:prstGeom prst="rect">
@@ -12009,7 +11986,7 @@
           </p:nvSpPr>
           <p:spPr>
             <a:xfrm>
-              <a:off x="1828800" y="6654800"/>
+              <a:off x="2641600" y="6654800"/>
               <a:ext cx="203200" cy="203200"/>
             </a:xfrm>
             <a:prstGeom prst="rect">
@@ -12039,7 +12016,7 @@
           </p:nvSpPr>
           <p:spPr>
             <a:xfrm>
-              <a:off x="2235200" y="6654800"/>
+              <a:off x="3048000" y="6654800"/>
               <a:ext cx="203200" cy="203200"/>
             </a:xfrm>
             <a:prstGeom prst="rect">
@@ -12069,7 +12046,7 @@
           </p:nvSpPr>
           <p:spPr>
             <a:xfrm>
-              <a:off x="2641600" y="6654800"/>
+              <a:off x="3454400" y="6654800"/>
               <a:ext cx="203200" cy="203200"/>
             </a:xfrm>
             <a:prstGeom prst="rect">
@@ -12099,7 +12076,7 @@
           </p:nvSpPr>
           <p:spPr>
             <a:xfrm>
-              <a:off x="3048000" y="6654800"/>
+              <a:off x="3860800" y="6654800"/>
               <a:ext cx="203200" cy="203200"/>
             </a:xfrm>
             <a:prstGeom prst="rect">
@@ -12129,7 +12106,7 @@
           </p:nvSpPr>
           <p:spPr>
             <a:xfrm>
-              <a:off x="3454400" y="6654800"/>
+              <a:off x="4267200" y="6654800"/>
               <a:ext cx="203200" cy="203200"/>
             </a:xfrm>
             <a:prstGeom prst="rect">
@@ -12159,7 +12136,7 @@
           </p:nvSpPr>
           <p:spPr>
             <a:xfrm>
-              <a:off x="3860800" y="6654800"/>
+              <a:off x="4673600" y="6654800"/>
               <a:ext cx="203200" cy="203200"/>
             </a:xfrm>
             <a:prstGeom prst="rect">
@@ -12189,7 +12166,7 @@
           </p:nvSpPr>
           <p:spPr>
             <a:xfrm>
-              <a:off x="4267200" y="6654800"/>
+              <a:off x="5080000" y="6654800"/>
               <a:ext cx="203200" cy="203200"/>
             </a:xfrm>
             <a:prstGeom prst="rect">
@@ -12219,7 +12196,7 @@
           </p:nvSpPr>
           <p:spPr>
             <a:xfrm>
-              <a:off x="4673600" y="6654800"/>
+              <a:off x="5486400" y="6654800"/>
               <a:ext cx="203200" cy="203200"/>
             </a:xfrm>
             <a:prstGeom prst="rect">
@@ -12249,7 +12226,7 @@
           </p:nvSpPr>
           <p:spPr>
             <a:xfrm>
-              <a:off x="5080000" y="6654800"/>
+              <a:off x="5892800" y="6654800"/>
               <a:ext cx="203200" cy="203200"/>
             </a:xfrm>
             <a:prstGeom prst="rect">
@@ -12279,7 +12256,7 @@
           </p:nvSpPr>
           <p:spPr>
             <a:xfrm>
-              <a:off x="5486400" y="6654800"/>
+              <a:off x="6299200" y="6654800"/>
               <a:ext cx="203200" cy="203200"/>
             </a:xfrm>
             <a:prstGeom prst="rect">
@@ -12309,7 +12286,7 @@
           </p:nvSpPr>
           <p:spPr>
             <a:xfrm>
-              <a:off x="5892800" y="6654800"/>
+              <a:off x="6705600" y="6654800"/>
               <a:ext cx="203200" cy="203200"/>
             </a:xfrm>
             <a:prstGeom prst="rect">
@@ -12339,7 +12316,7 @@
           </p:nvSpPr>
           <p:spPr>
             <a:xfrm>
-              <a:off x="6299200" y="6654800"/>
+              <a:off x="7112000" y="6654800"/>
               <a:ext cx="203200" cy="203200"/>
             </a:xfrm>
             <a:prstGeom prst="rect">
@@ -12369,7 +12346,7 @@
           </p:nvSpPr>
           <p:spPr>
             <a:xfrm>
-              <a:off x="6705600" y="6654800"/>
+              <a:off x="7518400" y="6654800"/>
               <a:ext cx="203200" cy="203200"/>
             </a:xfrm>
             <a:prstGeom prst="rect">
@@ -12399,7 +12376,7 @@
           </p:nvSpPr>
           <p:spPr>
             <a:xfrm>
-              <a:off x="7112000" y="6654800"/>
+              <a:off x="7924800" y="6654800"/>
               <a:ext cx="203200" cy="203200"/>
             </a:xfrm>
             <a:prstGeom prst="rect">
@@ -12429,7 +12406,7 @@
           </p:nvSpPr>
           <p:spPr>
             <a:xfrm>
-              <a:off x="7518400" y="6654800"/>
+              <a:off x="8331200" y="6654800"/>
               <a:ext cx="203200" cy="203200"/>
             </a:xfrm>
             <a:prstGeom prst="rect">
@@ -12459,7 +12436,7 @@
           </p:nvSpPr>
           <p:spPr>
             <a:xfrm>
-              <a:off x="7924800" y="6654800"/>
+              <a:off x="8737600" y="6654800"/>
               <a:ext cx="203200" cy="203200"/>
             </a:xfrm>
             <a:prstGeom prst="rect">
@@ -12489,7 +12466,7 @@
           </p:nvSpPr>
           <p:spPr>
             <a:xfrm>
-              <a:off x="8331200" y="6654800"/>
+              <a:off x="9144000" y="6654800"/>
               <a:ext cx="203200" cy="203200"/>
             </a:xfrm>
             <a:prstGeom prst="rect">
@@ -12519,7 +12496,7 @@
           </p:nvSpPr>
           <p:spPr>
             <a:xfrm>
-              <a:off x="8737600" y="6654800"/>
+              <a:off x="9550400" y="6654800"/>
               <a:ext cx="203200" cy="203200"/>
             </a:xfrm>
             <a:prstGeom prst="rect">
@@ -12549,7 +12526,7 @@
           </p:nvSpPr>
           <p:spPr>
             <a:xfrm>
-              <a:off x="9144000" y="6654800"/>
+              <a:off x="9956800" y="6654800"/>
               <a:ext cx="203200" cy="203200"/>
             </a:xfrm>
             <a:prstGeom prst="rect">
@@ -12579,7 +12556,7 @@
           </p:nvSpPr>
           <p:spPr>
             <a:xfrm>
-              <a:off x="9550400" y="6654800"/>
+              <a:off x="10363200" y="6654800"/>
               <a:ext cx="203200" cy="203200"/>
             </a:xfrm>
             <a:prstGeom prst="rect">
@@ -12609,7 +12586,7 @@
           </p:nvSpPr>
           <p:spPr>
             <a:xfrm>
-              <a:off x="9956800" y="6654800"/>
+              <a:off x="10769600" y="6654800"/>
               <a:ext cx="203200" cy="203200"/>
             </a:xfrm>
             <a:prstGeom prst="rect">
@@ -12639,7 +12616,7 @@
           </p:nvSpPr>
           <p:spPr>
             <a:xfrm>
-              <a:off x="10363200" y="6654800"/>
+              <a:off x="11176000" y="6654800"/>
               <a:ext cx="203200" cy="203200"/>
             </a:xfrm>
             <a:prstGeom prst="rect">
@@ -12669,7 +12646,7 @@
           </p:nvSpPr>
           <p:spPr>
             <a:xfrm>
-              <a:off x="10769600" y="6654800"/>
+              <a:off x="11582400" y="6654800"/>
               <a:ext cx="203200" cy="203200"/>
             </a:xfrm>
             <a:prstGeom prst="rect">
@@ -12694,66 +12671,6 @@
         <p:sp>
           <p:nvSpPr>
             <p:cNvPr id="65" name="Rectangle 64"/>
-            <p:cNvSpPr/>
-            <p:nvPr/>
-          </p:nvSpPr>
-          <p:spPr>
-            <a:xfrm>
-              <a:off x="11176000" y="6654800"/>
-              <a:ext cx="203200" cy="203200"/>
-            </a:xfrm>
-            <a:prstGeom prst="rect">
-              <a:avLst/>
-            </a:prstGeom>
-            <a:solidFill>
-              <a:srgbClr val="ED1C24"/>
-            </a:solidFill>
-            <a:ln>
-              <a:noFill/>
-            </a:ln>
-            <a:effectLst/>
-          </p:spPr>
-          <p:txBody>
-            <a:bodyPr rtlCol="0" anchor="ctr"/>
-            <a:lstStyle/>
-            <a:p>
-              <a:pPr algn="ctr"/>
-            </a:p>
-          </p:txBody>
-        </p:sp>
-        <p:sp>
-          <p:nvSpPr>
-            <p:cNvPr id="66" name="Rectangle 65"/>
-            <p:cNvSpPr/>
-            <p:nvPr/>
-          </p:nvSpPr>
-          <p:spPr>
-            <a:xfrm>
-              <a:off x="11582400" y="6654800"/>
-              <a:ext cx="203200" cy="203200"/>
-            </a:xfrm>
-            <a:prstGeom prst="rect">
-              <a:avLst/>
-            </a:prstGeom>
-            <a:solidFill>
-              <a:srgbClr val="ED1C24"/>
-            </a:solidFill>
-            <a:ln>
-              <a:noFill/>
-            </a:ln>
-            <a:effectLst/>
-          </p:spPr>
-          <p:txBody>
-            <a:bodyPr rtlCol="0" anchor="ctr"/>
-            <a:lstStyle/>
-            <a:p>
-              <a:pPr algn="ctr"/>
-            </a:p>
-          </p:txBody>
-        </p:sp>
-        <p:sp>
-          <p:nvSpPr>
-            <p:cNvPr id="67" name="Rectangle 66"/>
             <p:cNvSpPr/>
             <p:nvPr/>
           </p:nvSpPr>
